--- a/paper/presentation/ietf_ambiguity_detection_presentation.pptx
+++ b/paper/presentation/ietf_ambiguity_detection_presentation.pptx
@@ -9798,7 +9798,7 @@
         <p:spPr>
           <a:xfrm>
             <a:off x="7132320" y="1371600"/>
-            <a:ext cx="4069080" cy="3611880"/>
+            <a:ext cx="4069080" cy="2331720"/>
           </a:xfrm>
           <a:prstGeom prst="roundRect">
             <a:avLst/>
@@ -9842,7 +9842,7 @@
         </p:nvSpPr>
         <p:spPr>
           <a:xfrm>
-            <a:off x="7452360" y="1700784"/>
+            <a:off x="7452360" y="1627632"/>
             <a:ext cx="3429000" cy="384048"/>
           </a:xfrm>
           <a:prstGeom prst="rect">
@@ -9881,7 +9881,7 @@
         </p:nvSpPr>
         <p:spPr>
           <a:xfrm>
-            <a:off x="7452360" y="2368296"/>
+            <a:off x="7452360" y="2139696"/>
             <a:ext cx="164592" cy="164592"/>
           </a:xfrm>
           <a:prstGeom prst="ellipse">
@@ -9924,7 +9924,7 @@
         </p:nvSpPr>
         <p:spPr>
           <a:xfrm>
-            <a:off x="7452360" y="2372868"/>
+            <a:off x="7452360" y="2144268"/>
             <a:ext cx="164592" cy="155448"/>
           </a:xfrm>
           <a:prstGeom prst="rect">
@@ -9960,8 +9960,8 @@
         </p:nvSpPr>
         <p:spPr>
           <a:xfrm>
-            <a:off x="7744968" y="2331720"/>
-            <a:ext cx="3044952" cy="667512"/>
+            <a:off x="7744968" y="2103120"/>
+            <a:ext cx="3044952" cy="384048"/>
           </a:xfrm>
           <a:prstGeom prst="rect">
             <a:avLst/>
@@ -9978,7 +9978,7 @@
               <a:spcAft>
                 <a:spcPts val="500"/>
               </a:spcAft>
-              <a:defRPr sz="1500" b="0">
+              <a:defRPr sz="1300" b="0">
                 <a:solidFill>
                   <a:srgbClr val="26313B"/>
                 </a:solidFill>
@@ -9999,7 +9999,7 @@
         </p:nvSpPr>
         <p:spPr>
           <a:xfrm>
-            <a:off x="7452360" y="3090672"/>
+            <a:off x="7452360" y="2578608"/>
             <a:ext cx="164592" cy="164592"/>
           </a:xfrm>
           <a:prstGeom prst="ellipse">
@@ -10042,7 +10042,7 @@
         </p:nvSpPr>
         <p:spPr>
           <a:xfrm>
-            <a:off x="7452360" y="3095244"/>
+            <a:off x="7452360" y="2583179"/>
             <a:ext cx="164592" cy="155448"/>
           </a:xfrm>
           <a:prstGeom prst="rect">
@@ -10078,8 +10078,8 @@
         </p:nvSpPr>
         <p:spPr>
           <a:xfrm>
-            <a:off x="7744968" y="3054096"/>
-            <a:ext cx="3044952" cy="667512"/>
+            <a:off x="7744968" y="2542032"/>
+            <a:ext cx="3044952" cy="384048"/>
           </a:xfrm>
           <a:prstGeom prst="rect">
             <a:avLst/>
@@ -10096,7 +10096,7 @@
               <a:spcAft>
                 <a:spcPts val="500"/>
               </a:spcAft>
-              <a:defRPr sz="1500" b="0">
+              <a:defRPr sz="1300" b="0">
                 <a:solidFill>
                   <a:srgbClr val="26313B"/>
                 </a:solidFill>
@@ -10117,7 +10117,7 @@
         </p:nvSpPr>
         <p:spPr>
           <a:xfrm>
-            <a:off x="7452360" y="3813048"/>
+            <a:off x="7452360" y="3017520"/>
             <a:ext cx="164592" cy="164592"/>
           </a:xfrm>
           <a:prstGeom prst="ellipse">
@@ -10160,7 +10160,7 @@
         </p:nvSpPr>
         <p:spPr>
           <a:xfrm>
-            <a:off x="7452360" y="3817620"/>
+            <a:off x="7452360" y="3022091"/>
             <a:ext cx="164592" cy="155448"/>
           </a:xfrm>
           <a:prstGeom prst="rect">
@@ -10196,8 +10196,8 @@
         </p:nvSpPr>
         <p:spPr>
           <a:xfrm>
-            <a:off x="7744968" y="3776472"/>
-            <a:ext cx="3044952" cy="667512"/>
+            <a:off x="7744968" y="2980944"/>
+            <a:ext cx="3044952" cy="384048"/>
           </a:xfrm>
           <a:prstGeom prst="rect">
             <a:avLst/>
@@ -10214,7 +10214,7 @@
               <a:spcAft>
                 <a:spcPts val="500"/>
               </a:spcAft>
-              <a:defRPr sz="1500" b="0">
+              <a:defRPr sz="1300" b="0">
                 <a:solidFill>
                   <a:srgbClr val="26313B"/>
                 </a:solidFill>
@@ -10229,7 +10229,169 @@
       </p:sp>
       <p:sp>
         <p:nvSpPr>
-          <p:cNvPr id="30" name="TextBox 29"/>
+          <p:cNvPr id="30" name="Rounded Rectangle 29"/>
+          <p:cNvSpPr/>
+          <p:nvPr/>
+        </p:nvSpPr>
+        <p:spPr>
+          <a:xfrm>
+            <a:off x="7132320" y="3877056"/>
+            <a:ext cx="4069080" cy="1207008"/>
+          </a:xfrm>
+          <a:prstGeom prst="roundRect">
+            <a:avLst/>
+          </a:prstGeom>
+          <a:solidFill>
+            <a:srgbClr val="E7F5F3"/>
+          </a:solidFill>
+          <a:ln w="13970">
+            <a:solidFill>
+              <a:srgbClr val="E7F5F3"/>
+            </a:solidFill>
+          </a:ln>
+        </p:spPr>
+        <p:style>
+          <a:lnRef idx="1">
+            <a:schemeClr val="accent1"/>
+          </a:lnRef>
+          <a:fillRef idx="3">
+            <a:schemeClr val="accent1"/>
+          </a:fillRef>
+          <a:effectRef idx="2">
+            <a:schemeClr val="accent1"/>
+          </a:effectRef>
+          <a:fontRef idx="minor">
+            <a:schemeClr val="lt1"/>
+          </a:fontRef>
+        </p:style>
+        <p:txBody>
+          <a:bodyPr rtlCol="0" anchor="ctr"/>
+          <a:lstStyle/>
+          <a:p>
+            <a:pPr algn="ctr"/>
+          </a:p>
+        </p:txBody>
+      </p:sp>
+      <p:sp>
+        <p:nvSpPr>
+          <p:cNvPr id="31" name="TextBox 30"/>
+          <p:cNvSpPr txBox="1"/>
+          <p:nvPr/>
+        </p:nvSpPr>
+        <p:spPr>
+          <a:xfrm>
+            <a:off x="7388352" y="4023360"/>
+            <a:ext cx="3566160" cy="237744"/>
+          </a:xfrm>
+          <a:prstGeom prst="rect">
+            <a:avLst/>
+          </a:prstGeom>
+          <a:noFill/>
+        </p:spPr>
+        <p:txBody>
+          <a:bodyPr wrap="square" lIns="36576" rIns="36576" tIns="36576" bIns="36576" anchor="t">
+            <a:spAutoFit/>
+          </a:bodyPr>
+          <a:lstStyle/>
+          <a:p>
+            <a:pPr algn="l">
+              <a:spcAft>
+                <a:spcPts val="500"/>
+              </a:spcAft>
+              <a:defRPr sz="1000" b="1">
+                <a:solidFill>
+                  <a:srgbClr val="1C8585"/>
+                </a:solidFill>
+                <a:latin typeface="Aptos"/>
+              </a:defRPr>
+            </a:pPr>
+            <a:r>
+              <a:t>ILLUSTRATIVE MODEL OUTPUT</a:t>
+            </a:r>
+          </a:p>
+        </p:txBody>
+      </p:sp>
+      <p:sp>
+        <p:nvSpPr>
+          <p:cNvPr id="32" name="TextBox 31"/>
+          <p:cNvSpPr txBox="1"/>
+          <p:nvPr/>
+        </p:nvSpPr>
+        <p:spPr>
+          <a:xfrm>
+            <a:off x="7388352" y="4343400"/>
+            <a:ext cx="566928" cy="310896"/>
+          </a:xfrm>
+          <a:prstGeom prst="rect">
+            <a:avLst/>
+          </a:prstGeom>
+          <a:noFill/>
+        </p:spPr>
+        <p:txBody>
+          <a:bodyPr wrap="square" lIns="36576" rIns="36576" tIns="36576" bIns="36576" anchor="t">
+            <a:spAutoFit/>
+          </a:bodyPr>
+          <a:lstStyle/>
+          <a:p>
+            <a:pPr algn="l">
+              <a:spcAft>
+                <a:spcPts val="500"/>
+              </a:spcAft>
+              <a:defRPr sz="1700" b="1">
+                <a:solidFill>
+                  <a:srgbClr val="1C8585"/>
+                </a:solidFill>
+                <a:latin typeface="Aptos"/>
+              </a:defRPr>
+            </a:pPr>
+            <a:r>
+              <a:t>YES</a:t>
+            </a:r>
+          </a:p>
+        </p:txBody>
+      </p:sp>
+      <p:sp>
+        <p:nvSpPr>
+          <p:cNvPr id="33" name="TextBox 32"/>
+          <p:cNvSpPr txBox="1"/>
+          <p:nvPr/>
+        </p:nvSpPr>
+        <p:spPr>
+          <a:xfrm>
+            <a:off x="8028431" y="4288536"/>
+            <a:ext cx="2907792" cy="603504"/>
+          </a:xfrm>
+          <a:prstGeom prst="rect">
+            <a:avLst/>
+          </a:prstGeom>
+          <a:noFill/>
+        </p:spPr>
+        <p:txBody>
+          <a:bodyPr wrap="square" lIns="36576" rIns="36576" tIns="36576" bIns="36576" anchor="t">
+            <a:spAutoFit/>
+          </a:bodyPr>
+          <a:lstStyle/>
+          <a:p>
+            <a:pPr algn="l">
+              <a:spcAft>
+                <a:spcPts val="500"/>
+              </a:spcAft>
+              <a:defRPr sz="1300" b="0">
+                <a:solidFill>
+                  <a:srgbClr val="26313B"/>
+                </a:solidFill>
+                <a:latin typeface="Aptos"/>
+              </a:defRPr>
+            </a:pPr>
+            <a:r>
+              <a:t>“When appropriate” leaves the retry condition open.</a:t>
+            </a:r>
+          </a:p>
+        </p:txBody>
+      </p:sp>
+      <p:sp>
+        <p:nvSpPr>
+          <p:cNvPr id="34" name="TextBox 33"/>
           <p:cNvSpPr txBox="1"/>
           <p:nvPr/>
         </p:nvSpPr>
@@ -10268,7 +10430,7 @@
       </p:sp>
       <p:sp>
         <p:nvSpPr>
-          <p:cNvPr id="31" name="TextBox 30"/>
+          <p:cNvPr id="35" name="TextBox 34"/>
           <p:cNvSpPr txBox="1"/>
           <p:nvPr/>
         </p:nvSpPr>
@@ -10307,7 +10469,7 @@
       </p:sp>
       <p:sp>
         <p:nvSpPr>
-          <p:cNvPr id="32" name="TextBox 31"/>
+          <p:cNvPr id="36" name="TextBox 35"/>
           <p:cNvSpPr txBox="1"/>
           <p:nvPr/>
         </p:nvSpPr>

--- a/paper/presentation/ietf_ambiguity_detection_presentation.pptx
+++ b/paper/presentation/ietf_ambiguity_detection_presentation.pptx
@@ -5309,7 +5309,7 @@
               </a:defRPr>
             </a:pPr>
             <a:r>
-              <a:t>Latest DeBERTa study: encouraging ranking, wide uncertainty</a:t>
+              <a:t>Latest DeBERTa comparison: promising ranking, wide uncertainty</a:t>
             </a:r>
           </a:p>
         </p:txBody>
@@ -5461,7 +5461,7 @@
               </a:defRPr>
             </a:pPr>
             <a:r>
-              <a:t>2,125 clauses  ·  136 positives  ·  9 families  ·  5-fold family-isolated OOF</a:t>
+              <a:t>2,143 clauses  ·  138 positives  ·  9 families  ·  5-fold family-isolated OOF</a:t>
             </a:r>
           </a:p>
         </p:txBody>
@@ -5474,7 +5474,7 @@
         </p:nvCxnSpPr>
         <p:spPr>
           <a:xfrm>
-            <a:off x="4497850" y="1975104"/>
+            <a:off x="4397459" y="1975104"/>
             <a:ext cx="0" cy="2523744"/>
           </a:xfrm>
           <a:prstGeom prst="line">
@@ -5509,7 +5509,7 @@
         </p:nvSpPr>
         <p:spPr>
           <a:xfrm>
-            <a:off x="4534426" y="1764792"/>
+            <a:off x="4434035" y="1764792"/>
             <a:ext cx="1005840" cy="201168"/>
           </a:xfrm>
           <a:prstGeom prst="rect">
@@ -5588,7 +5588,7 @@
         <p:spPr>
           <a:xfrm>
             <a:off x="4114800" y="2084832"/>
-            <a:ext cx="2221094" cy="310896"/>
+            <a:ext cx="2956511" cy="310896"/>
           </a:xfrm>
           <a:prstGeom prst="rect">
             <a:avLst/>
@@ -5632,7 +5632,7 @@
         </p:nvSpPr>
         <p:spPr>
           <a:xfrm>
-            <a:off x="6418190" y="2057400"/>
+            <a:off x="7153607" y="2057400"/>
             <a:ext cx="566928" cy="320040"/>
           </a:xfrm>
           <a:prstGeom prst="rect">
@@ -5658,7 +5658,7 @@
               </a:defRPr>
             </a:pPr>
             <a:r>
-              <a:t>0.3711</a:t>
+              <a:t>0.6736</a:t>
             </a:r>
           </a:p>
         </p:txBody>
@@ -5697,7 +5697,7 @@
               </a:defRPr>
             </a:pPr>
             <a:r>
-              <a:t>Partial fine-tuning</a:t>
+              <a:t>Focal loss</a:t>
             </a:r>
           </a:p>
         </p:txBody>
@@ -5711,7 +5711,130 @@
         <p:spPr>
           <a:xfrm>
             <a:off x="4114800" y="2724912"/>
-            <a:ext cx="1952360" cy="310896"/>
+            <a:ext cx="2555784" cy="310896"/>
+          </a:xfrm>
+          <a:prstGeom prst="rect">
+            <a:avLst/>
+          </a:prstGeom>
+          <a:solidFill>
+            <a:srgbClr val="DA8B35"/>
+          </a:solidFill>
+          <a:ln>
+            <a:solidFill>
+              <a:srgbClr val="DA8B35"/>
+            </a:solidFill>
+          </a:ln>
+        </p:spPr>
+        <p:style>
+          <a:lnRef idx="1">
+            <a:schemeClr val="accent1"/>
+          </a:lnRef>
+          <a:fillRef idx="3">
+            <a:schemeClr val="accent1"/>
+          </a:fillRef>
+          <a:effectRef idx="2">
+            <a:schemeClr val="accent1"/>
+          </a:effectRef>
+          <a:fontRef idx="minor">
+            <a:schemeClr val="lt1"/>
+          </a:fontRef>
+        </p:style>
+        <p:txBody>
+          <a:bodyPr rtlCol="0" anchor="ctr"/>
+          <a:lstStyle/>
+          <a:p>
+            <a:pPr algn="ctr"/>
+          </a:p>
+        </p:txBody>
+      </p:sp>
+      <p:sp>
+        <p:nvSpPr>
+          <p:cNvPr id="14" name="TextBox 13"/>
+          <p:cNvSpPr txBox="1"/>
+          <p:nvPr/>
+        </p:nvSpPr>
+        <p:spPr>
+          <a:xfrm>
+            <a:off x="6752880" y="2697480"/>
+            <a:ext cx="566928" cy="320040"/>
+          </a:xfrm>
+          <a:prstGeom prst="rect">
+            <a:avLst/>
+          </a:prstGeom>
+          <a:noFill/>
+        </p:spPr>
+        <p:txBody>
+          <a:bodyPr wrap="square" lIns="36576" rIns="36576" tIns="36576" bIns="36576" anchor="t">
+            <a:spAutoFit/>
+          </a:bodyPr>
+          <a:lstStyle/>
+          <a:p>
+            <a:pPr algn="l">
+              <a:spcAft>
+                <a:spcPts val="500"/>
+              </a:spcAft>
+              <a:defRPr sz="1200" b="1">
+                <a:solidFill>
+                  <a:srgbClr val="26313B"/>
+                </a:solidFill>
+                <a:latin typeface="Aptos"/>
+              </a:defRPr>
+            </a:pPr>
+            <a:r>
+              <a:t>0.5823</a:t>
+            </a:r>
+          </a:p>
+        </p:txBody>
+      </p:sp>
+      <p:sp>
+        <p:nvSpPr>
+          <p:cNvPr id="15" name="TextBox 14"/>
+          <p:cNvSpPr txBox="1"/>
+          <p:nvPr/>
+        </p:nvSpPr>
+        <p:spPr>
+          <a:xfrm>
+            <a:off x="1051560" y="3328416"/>
+            <a:ext cx="2953512" cy="347472"/>
+          </a:xfrm>
+          <a:prstGeom prst="rect">
+            <a:avLst/>
+          </a:prstGeom>
+          <a:noFill/>
+        </p:spPr>
+        <p:txBody>
+          <a:bodyPr wrap="square" lIns="36576" rIns="36576" tIns="36576" bIns="36576" anchor="t">
+            <a:spAutoFit/>
+          </a:bodyPr>
+          <a:lstStyle/>
+          <a:p>
+            <a:pPr algn="l">
+              <a:spcAft>
+                <a:spcPts val="500"/>
+              </a:spcAft>
+              <a:defRPr sz="1400" b="0">
+                <a:solidFill>
+                  <a:srgbClr val="26313B"/>
+                </a:solidFill>
+                <a:latin typeface="Aptos"/>
+              </a:defRPr>
+            </a:pPr>
+            <a:r>
+              <a:t>Partial fine-tuning</a:t>
+            </a:r>
+          </a:p>
+        </p:txBody>
+      </p:sp>
+      <p:sp>
+        <p:nvSpPr>
+          <p:cNvPr id="16" name="Rectangle 15"/>
+          <p:cNvSpPr/>
+          <p:nvPr/>
+        </p:nvSpPr>
+        <p:spPr>
+          <a:xfrm>
+            <a:off x="4114800" y="3364992"/>
+            <a:ext cx="2528572" cy="310896"/>
           </a:xfrm>
           <a:prstGeom prst="rect">
             <a:avLst/>
@@ -5749,13 +5872,13 @@
       </p:sp>
       <p:sp>
         <p:nvSpPr>
-          <p:cNvPr id="14" name="TextBox 13"/>
-          <p:cNvSpPr txBox="1"/>
-          <p:nvPr/>
-        </p:nvSpPr>
-        <p:spPr>
-          <a:xfrm>
-            <a:off x="6149456" y="2697480"/>
+          <p:cNvPr id="17" name="TextBox 16"/>
+          <p:cNvSpPr txBox="1"/>
+          <p:nvPr/>
+        </p:nvSpPr>
+        <p:spPr>
+          <a:xfrm>
+            <a:off x="6725668" y="3337560"/>
             <a:ext cx="566928" cy="320040"/>
           </a:xfrm>
           <a:prstGeom prst="rect">
@@ -5781,130 +5904,7 @@
               </a:defRPr>
             </a:pPr>
             <a:r>
-              <a:t>0.3262</a:t>
-            </a:r>
-          </a:p>
-        </p:txBody>
-      </p:sp>
-      <p:sp>
-        <p:nvSpPr>
-          <p:cNvPr id="15" name="TextBox 14"/>
-          <p:cNvSpPr txBox="1"/>
-          <p:nvPr/>
-        </p:nvSpPr>
-        <p:spPr>
-          <a:xfrm>
-            <a:off x="1051560" y="3328416"/>
-            <a:ext cx="2953512" cy="347472"/>
-          </a:xfrm>
-          <a:prstGeom prst="rect">
-            <a:avLst/>
-          </a:prstGeom>
-          <a:noFill/>
-        </p:spPr>
-        <p:txBody>
-          <a:bodyPr wrap="square" lIns="36576" rIns="36576" tIns="36576" bIns="36576" anchor="t">
-            <a:spAutoFit/>
-          </a:bodyPr>
-          <a:lstStyle/>
-          <a:p>
-            <a:pPr algn="l">
-              <a:spcAft>
-                <a:spcPts val="500"/>
-              </a:spcAft>
-              <a:defRPr sz="1400" b="0">
-                <a:solidFill>
-                  <a:srgbClr val="26313B"/>
-                </a:solidFill>
-                <a:latin typeface="Aptos"/>
-              </a:defRPr>
-            </a:pPr>
-            <a:r>
-              <a:t>Focal loss</a:t>
-            </a:r>
-          </a:p>
-        </p:txBody>
-      </p:sp>
-      <p:sp>
-        <p:nvSpPr>
-          <p:cNvPr id="16" name="Rectangle 15"/>
-          <p:cNvSpPr/>
-          <p:nvPr/>
-        </p:nvSpPr>
-        <p:spPr>
-          <a:xfrm>
-            <a:off x="4114800" y="3364992"/>
-            <a:ext cx="1827868" cy="310896"/>
-          </a:xfrm>
-          <a:prstGeom prst="rect">
-            <a:avLst/>
-          </a:prstGeom>
-          <a:solidFill>
-            <a:srgbClr val="DA8B35"/>
-          </a:solidFill>
-          <a:ln>
-            <a:solidFill>
-              <a:srgbClr val="DA8B35"/>
-            </a:solidFill>
-          </a:ln>
-        </p:spPr>
-        <p:style>
-          <a:lnRef idx="1">
-            <a:schemeClr val="accent1"/>
-          </a:lnRef>
-          <a:fillRef idx="3">
-            <a:schemeClr val="accent1"/>
-          </a:fillRef>
-          <a:effectRef idx="2">
-            <a:schemeClr val="accent1"/>
-          </a:effectRef>
-          <a:fontRef idx="minor">
-            <a:schemeClr val="lt1"/>
-          </a:fontRef>
-        </p:style>
-        <p:txBody>
-          <a:bodyPr rtlCol="0" anchor="ctr"/>
-          <a:lstStyle/>
-          <a:p>
-            <a:pPr algn="ctr"/>
-          </a:p>
-        </p:txBody>
-      </p:sp>
-      <p:sp>
-        <p:nvSpPr>
-          <p:cNvPr id="17" name="TextBox 16"/>
-          <p:cNvSpPr txBox="1"/>
-          <p:nvPr/>
-        </p:nvSpPr>
-        <p:spPr>
-          <a:xfrm>
-            <a:off x="6024964" y="3337560"/>
-            <a:ext cx="566928" cy="320040"/>
-          </a:xfrm>
-          <a:prstGeom prst="rect">
-            <a:avLst/>
-          </a:prstGeom>
-          <a:noFill/>
-        </p:spPr>
-        <p:txBody>
-          <a:bodyPr wrap="square" lIns="36576" rIns="36576" tIns="36576" bIns="36576" anchor="t">
-            <a:spAutoFit/>
-          </a:bodyPr>
-          <a:lstStyle/>
-          <a:p>
-            <a:pPr algn="l">
-              <a:spcAft>
-                <a:spcPts val="500"/>
-              </a:spcAft>
-              <a:defRPr sz="1200" b="1">
-                <a:solidFill>
-                  <a:srgbClr val="26313B"/>
-                </a:solidFill>
-                <a:latin typeface="Aptos"/>
-              </a:defRPr>
-            </a:pPr>
-            <a:r>
-              <a:t>0.3054</a:t>
+              <a:t>0.5761</a:t>
             </a:r>
           </a:p>
         </p:txBody>
@@ -5957,7 +5957,7 @@
         <p:spPr>
           <a:xfrm>
             <a:off x="4114800" y="4005072"/>
-            <a:ext cx="383050" cy="310896"/>
+            <a:ext cx="282659" cy="310896"/>
           </a:xfrm>
           <a:prstGeom prst="rect">
             <a:avLst/>
@@ -6001,7 +6001,7 @@
         </p:nvSpPr>
         <p:spPr>
           <a:xfrm>
-            <a:off x="4580146" y="3977639"/>
+            <a:off x="4479755" y="3977639"/>
             <a:ext cx="566928" cy="320040"/>
           </a:xfrm>
           <a:prstGeom prst="rect">
@@ -6027,7 +6027,7 @@
               </a:defRPr>
             </a:pPr>
             <a:r>
-              <a:t>0.0640</a:t>
+              <a:t>0.0644</a:t>
             </a:r>
           </a:p>
         </p:txBody>
@@ -6111,7 +6111,7 @@
               </a:defRPr>
             </a:pPr>
             <a:r>
-              <a:t>26 / 50</a:t>
+              <a:t>46 / 50</a:t>
             </a:r>
           </a:p>
         </p:txBody>
@@ -6189,7 +6189,7 @@
               </a:defRPr>
             </a:pPr>
             <a:r>
-              <a:t>AP family-cluster interval: 0.315–0.508</a:t>
+              <a:t>Ensemble AP family interval: 0.592–0.764</a:t>
             </a:r>
           </a:p>
         </p:txBody>
@@ -6202,8 +6202,8 @@
         </p:nvSpPr>
         <p:spPr>
           <a:xfrm>
-            <a:off x="1005840" y="5166360"/>
-            <a:ext cx="10149840" cy="566928"/>
+            <a:off x="1005840" y="4892040"/>
+            <a:ext cx="10149840" cy="868680"/>
           </a:xfrm>
           <a:prstGeom prst="rect">
             <a:avLst/>
@@ -6220,7 +6220,7 @@
               <a:spcAft>
                 <a:spcPts val="500"/>
               </a:spcAft>
-              <a:defRPr sz="1600" b="1">
+              <a:defRPr sz="1400" b="1">
                 <a:solidFill>
                   <a:srgbClr val="A6413E"/>
                 </a:solidFill>
@@ -6228,7 +6228,7 @@
               </a:defRPr>
             </a:pPr>
             <a:r>
-              <a:t>The interval resamples only nine families; it does not capture training-seed variation or test-set uncertainty.</a:t>
+              <a:t>The ECDF ensemble is a ranking score, not a calibrated probability. Intervals overlap across nine families; the 100 labels were error-selected, and this repair reuses parent predictions—not an independent test.</a:t>
             </a:r>
           </a:p>
         </p:txBody>
@@ -6267,7 +6267,7 @@
               </a:defRPr>
             </a:pPr>
             <a:r>
-              <a:t>Source: paper/main.tex, Table ranking and fixed-review-budget results.</a:t>
+              <a:t>Source: updated reviewed-label DeBERTa outputs; paper/main.tex. OOF development results.</a:t>
             </a:r>
           </a:p>
         </p:txBody>
@@ -9152,7 +9152,7 @@
               </a:defRPr>
             </a:pPr>
             <a:r>
-              <a:t>The right role is an explainable reviewer aid</a:t>
+              <a:t>GUI example: RFC 9000 review results</a:t>
             </a:r>
           </a:p>
         </p:txBody>
@@ -9226,7 +9226,7 @@
               </a:defRPr>
             </a:pPr>
             <a:r>
-              <a:t>RESPONSIBLE USE</a:t>
+              <a:t>INTERFACE</a:t>
             </a:r>
           </a:p>
         </p:txBody>
@@ -9278,8 +9278,8 @@
         </p:nvSpPr>
         <p:spPr>
           <a:xfrm>
-            <a:off x="914400" y="1280160"/>
-            <a:ext cx="4572000" cy="438912"/>
+            <a:off x="822960" y="1234440"/>
+            <a:ext cx="5303520" cy="347472"/>
           </a:xfrm>
           <a:prstGeom prst="rect">
             <a:avLst/>
@@ -9296,7 +9296,7 @@
               <a:spcAft>
                 <a:spcPts val="500"/>
               </a:spcAft>
-              <a:defRPr sz="2100" b="1">
+              <a:defRPr sz="2000" b="1">
                 <a:solidFill>
                   <a:srgbClr val="183452"/>
                 </a:solidFill>
@@ -9304,30 +9304,32 @@
               </a:defRPr>
             </a:pPr>
             <a:r>
-              <a:t>A human-in-the-loop workflow</a:t>
-            </a:r>
-          </a:p>
-        </p:txBody>
-      </p:sp>
-      <p:sp>
-        <p:nvSpPr>
-          <p:cNvPr id="7" name="Oval 6"/>
+              <a:t>Local scan summary</a:t>
+            </a:r>
+          </a:p>
+        </p:txBody>
+      </p:sp>
+      <p:sp>
+        <p:nvSpPr>
+          <p:cNvPr id="7" name="Rounded Rectangle 6"/>
           <p:cNvSpPr/>
           <p:nvPr/>
         </p:nvSpPr>
         <p:spPr>
           <a:xfrm>
-            <a:off x="1005840" y="1965960"/>
-            <a:ext cx="411480" cy="411480"/>
-          </a:xfrm>
-          <a:prstGeom prst="ellipse">
+            <a:off x="822960" y="1719072"/>
+            <a:ext cx="1572768" cy="1069848"/>
+          </a:xfrm>
+          <a:prstGeom prst="roundRect">
             <a:avLst/>
           </a:prstGeom>
           <a:solidFill>
-            <a:srgbClr val="2D6596"/>
+            <a:srgbClr val="E7F0F7"/>
           </a:solidFill>
-          <a:ln>
-            <a:noFill/>
+          <a:ln w="13970">
+            <a:solidFill>
+              <a:srgbClr val="E7F0F7"/>
+            </a:solidFill>
           </a:ln>
         </p:spPr>
         <p:style>
@@ -9360,16 +9362,16 @@
         </p:nvSpPr>
         <p:spPr>
           <a:xfrm>
-            <a:off x="1005840" y="1970531"/>
-            <a:ext cx="411480" cy="402336"/>
-          </a:xfrm>
-          <a:prstGeom prst="rect">
-            <a:avLst/>
-          </a:prstGeom>
-          <a:noFill/>
-        </p:spPr>
-        <p:txBody>
-          <a:bodyPr wrap="square" lIns="0" rIns="0" tIns="0" bIns="0" anchor="ctr">
+            <a:off x="896112" y="1828800"/>
+            <a:ext cx="1426464" cy="393192"/>
+          </a:xfrm>
+          <a:prstGeom prst="rect">
+            <a:avLst/>
+          </a:prstGeom>
+          <a:noFill/>
+        </p:spPr>
+        <p:txBody>
+          <a:bodyPr wrap="square" lIns="36576" rIns="36576" tIns="36576" bIns="36576" anchor="t">
             <a:spAutoFit/>
           </a:bodyPr>
           <a:lstStyle/>
@@ -9378,15 +9380,15 @@
               <a:spcAft>
                 <a:spcPts val="500"/>
               </a:spcAft>
-              <a:defRPr sz="1600" b="1">
-                <a:solidFill>
-                  <a:srgbClr val="FFFFFF"/>
-                </a:solidFill>
-                <a:latin typeface="Aptos"/>
-              </a:defRPr>
-            </a:pPr>
-            <a:r>
-              <a:t>1</a:t>
+              <a:defRPr sz="2700" b="1">
+                <a:solidFill>
+                  <a:srgbClr val="1C8585"/>
+                </a:solidFill>
+                <a:latin typeface="Aptos"/>
+              </a:defRPr>
+            </a:pPr>
+            <a:r>
+              <a:t>112</a:t>
             </a:r>
           </a:p>
         </p:txBody>
@@ -9399,64 +9401,25 @@
         </p:nvSpPr>
         <p:spPr>
           <a:xfrm>
-            <a:off x="1600200" y="1956816"/>
-            <a:ext cx="1325880" cy="320040"/>
-          </a:xfrm>
-          <a:prstGeom prst="rect">
-            <a:avLst/>
-          </a:prstGeom>
-          <a:noFill/>
-        </p:spPr>
-        <p:txBody>
-          <a:bodyPr wrap="square" lIns="36576" rIns="36576" tIns="36576" bIns="36576" anchor="t">
-            <a:spAutoFit/>
-          </a:bodyPr>
-          <a:lstStyle/>
-          <a:p>
-            <a:pPr algn="l">
-              <a:spcAft>
-                <a:spcPts val="500"/>
-              </a:spcAft>
-              <a:defRPr sz="1800" b="1">
-                <a:solidFill>
-                  <a:srgbClr val="183452"/>
-                </a:solidFill>
-                <a:latin typeface="Aptos"/>
-              </a:defRPr>
-            </a:pPr>
-            <a:r>
-              <a:t>Rank</a:t>
-            </a:r>
-          </a:p>
-        </p:txBody>
-      </p:sp>
-      <p:sp>
-        <p:nvSpPr>
-          <p:cNvPr id="10" name="TextBox 9"/>
-          <p:cNvSpPr txBox="1"/>
-          <p:nvPr/>
-        </p:nvSpPr>
-        <p:spPr>
-          <a:xfrm>
-            <a:off x="2880360" y="1956816"/>
-            <a:ext cx="3657600" cy="512064"/>
-          </a:xfrm>
-          <a:prstGeom prst="rect">
-            <a:avLst/>
-          </a:prstGeom>
-          <a:noFill/>
-        </p:spPr>
-        <p:txBody>
-          <a:bodyPr wrap="square" lIns="36576" rIns="36576" tIns="36576" bIns="36576" anchor="t">
-            <a:spAutoFit/>
-          </a:bodyPr>
-          <a:lstStyle/>
-          <a:p>
-            <a:pPr algn="l">
-              <a:spcAft>
-                <a:spcPts val="500"/>
-              </a:spcAft>
-              <a:defRPr sz="1600" b="0">
+            <a:off x="896112" y="2286000"/>
+            <a:ext cx="1426464" cy="384048"/>
+          </a:xfrm>
+          <a:prstGeom prst="rect">
+            <a:avLst/>
+          </a:prstGeom>
+          <a:noFill/>
+        </p:spPr>
+        <p:txBody>
+          <a:bodyPr wrap="square" lIns="36576" rIns="36576" tIns="36576" bIns="36576" anchor="t">
+            <a:spAutoFit/>
+          </a:bodyPr>
+          <a:lstStyle/>
+          <a:p>
+            <a:pPr algn="ctr">
+              <a:spcAft>
+                <a:spcPts val="500"/>
+              </a:spcAft>
+              <a:defRPr sz="1100" b="0">
                 <a:solidFill>
                   <a:srgbClr val="26313B"/>
                 </a:solidFill>
@@ -9464,30 +9427,48 @@
               </a:defRPr>
             </a:pPr>
             <a:r>
-              <a:t>Surface clauses worth a closer read</a:t>
-            </a:r>
-          </a:p>
-        </p:txBody>
-      </p:sp>
-      <p:sp>
-        <p:nvSpPr>
-          <p:cNvPr id="11" name="Oval 10"/>
+              <a:t>potentially</a:t>
+            </a:r>
+          </a:p>
+          <a:p>
+            <a:pPr algn="ctr">
+              <a:spcAft>
+                <a:spcPts val="500"/>
+              </a:spcAft>
+              <a:defRPr sz="1100" b="0">
+                <a:solidFill>
+                  <a:srgbClr val="26313B"/>
+                </a:solidFill>
+                <a:latin typeface="Aptos"/>
+              </a:defRPr>
+            </a:pPr>
+            <a:r>
+              <a:t>ambiguous</a:t>
+            </a:r>
+          </a:p>
+        </p:txBody>
+      </p:sp>
+      <p:sp>
+        <p:nvSpPr>
+          <p:cNvPr id="10" name="Rounded Rectangle 9"/>
           <p:cNvSpPr/>
           <p:nvPr/>
         </p:nvSpPr>
         <p:spPr>
           <a:xfrm>
-            <a:off x="1005840" y="3008376"/>
-            <a:ext cx="411480" cy="411480"/>
-          </a:xfrm>
-          <a:prstGeom prst="ellipse">
+            <a:off x="2578608" y="1719072"/>
+            <a:ext cx="1572768" cy="1069848"/>
+          </a:xfrm>
+          <a:prstGeom prst="roundRect">
             <a:avLst/>
           </a:prstGeom>
           <a:solidFill>
-            <a:srgbClr val="1C8585"/>
+            <a:srgbClr val="E7F0F7"/>
           </a:solidFill>
-          <a:ln>
-            <a:noFill/>
+          <a:ln w="13970">
+            <a:solidFill>
+              <a:srgbClr val="E7F0F7"/>
+            </a:solidFill>
           </a:ln>
         </p:spPr>
         <p:style>
@@ -9514,22 +9495,61 @@
       </p:sp>
       <p:sp>
         <p:nvSpPr>
+          <p:cNvPr id="11" name="TextBox 10"/>
+          <p:cNvSpPr txBox="1"/>
+          <p:nvPr/>
+        </p:nvSpPr>
+        <p:spPr>
+          <a:xfrm>
+            <a:off x="2651760" y="1828800"/>
+            <a:ext cx="1426464" cy="393192"/>
+          </a:xfrm>
+          <a:prstGeom prst="rect">
+            <a:avLst/>
+          </a:prstGeom>
+          <a:noFill/>
+        </p:spPr>
+        <p:txBody>
+          <a:bodyPr wrap="square" lIns="36576" rIns="36576" tIns="36576" bIns="36576" anchor="t">
+            <a:spAutoFit/>
+          </a:bodyPr>
+          <a:lstStyle/>
+          <a:p>
+            <a:pPr algn="ctr">
+              <a:spcAft>
+                <a:spcPts val="500"/>
+              </a:spcAft>
+              <a:defRPr sz="2700" b="1">
+                <a:solidFill>
+                  <a:srgbClr val="2D6596"/>
+                </a:solidFill>
+                <a:latin typeface="Aptos"/>
+              </a:defRPr>
+            </a:pPr>
+            <a:r>
+              <a:t>516</a:t>
+            </a:r>
+          </a:p>
+        </p:txBody>
+      </p:sp>
+      <p:sp>
+        <p:nvSpPr>
           <p:cNvPr id="12" name="TextBox 11"/>
           <p:cNvSpPr txBox="1"/>
           <p:nvPr/>
         </p:nvSpPr>
         <p:spPr>
           <a:xfrm>
-            <a:off x="1005840" y="3012948"/>
-            <a:ext cx="411480" cy="402336"/>
-          </a:xfrm>
-          <a:prstGeom prst="rect">
-            <a:avLst/>
-          </a:prstGeom>
-          <a:noFill/>
-        </p:spPr>
-        <p:txBody>
-          <a:bodyPr wrap="square" lIns="0" rIns="0" tIns="0" bIns="0" anchor="ctr">
+            <a:off x="2651760" y="2286000"/>
+            <a:ext cx="1426464" cy="384048"/>
+          </a:xfrm>
+          <a:prstGeom prst="rect">
+            <a:avLst/>
+          </a:prstGeom>
+          <a:noFill/>
+        </p:spPr>
+        <p:txBody>
+          <a:bodyPr wrap="square" lIns="36576" rIns="36576" tIns="36576" bIns="36576" anchor="t">
             <a:spAutoFit/>
           </a:bodyPr>
           <a:lstStyle/>
@@ -9538,85 +9558,7 @@
               <a:spcAft>
                 <a:spcPts val="500"/>
               </a:spcAft>
-              <a:defRPr sz="1600" b="1">
-                <a:solidFill>
-                  <a:srgbClr val="FFFFFF"/>
-                </a:solidFill>
-                <a:latin typeface="Aptos"/>
-              </a:defRPr>
-            </a:pPr>
-            <a:r>
-              <a:t>2</a:t>
-            </a:r>
-          </a:p>
-        </p:txBody>
-      </p:sp>
-      <p:sp>
-        <p:nvSpPr>
-          <p:cNvPr id="13" name="TextBox 12"/>
-          <p:cNvSpPr txBox="1"/>
-          <p:nvPr/>
-        </p:nvSpPr>
-        <p:spPr>
-          <a:xfrm>
-            <a:off x="1600200" y="2999232"/>
-            <a:ext cx="1325880" cy="320040"/>
-          </a:xfrm>
-          <a:prstGeom prst="rect">
-            <a:avLst/>
-          </a:prstGeom>
-          <a:noFill/>
-        </p:spPr>
-        <p:txBody>
-          <a:bodyPr wrap="square" lIns="36576" rIns="36576" tIns="36576" bIns="36576" anchor="t">
-            <a:spAutoFit/>
-          </a:bodyPr>
-          <a:lstStyle/>
-          <a:p>
-            <a:pPr algn="l">
-              <a:spcAft>
-                <a:spcPts val="500"/>
-              </a:spcAft>
-              <a:defRPr sz="1800" b="1">
-                <a:solidFill>
-                  <a:srgbClr val="183452"/>
-                </a:solidFill>
-                <a:latin typeface="Aptos"/>
-              </a:defRPr>
-            </a:pPr>
-            <a:r>
-              <a:t>Inspect</a:t>
-            </a:r>
-          </a:p>
-        </p:txBody>
-      </p:sp>
-      <p:sp>
-        <p:nvSpPr>
-          <p:cNvPr id="14" name="TextBox 13"/>
-          <p:cNvSpPr txBox="1"/>
-          <p:nvPr/>
-        </p:nvSpPr>
-        <p:spPr>
-          <a:xfrm>
-            <a:off x="2880360" y="2999232"/>
-            <a:ext cx="3657600" cy="512064"/>
-          </a:xfrm>
-          <a:prstGeom prst="rect">
-            <a:avLst/>
-          </a:prstGeom>
-          <a:noFill/>
-        </p:spPr>
-        <p:txBody>
-          <a:bodyPr wrap="square" lIns="36576" rIns="36576" tIns="36576" bIns="36576" anchor="t">
-            <a:spAutoFit/>
-          </a:bodyPr>
-          <a:lstStyle/>
-          <a:p>
-            <a:pPr algn="l">
-              <a:spcAft>
-                <a:spcPts val="500"/>
-              </a:spcAft>
-              <a:defRPr sz="1600" b="0">
+              <a:defRPr sz="1100" b="0">
                 <a:solidFill>
                   <a:srgbClr val="26313B"/>
                 </a:solidFill>
@@ -9624,30 +9566,48 @@
               </a:defRPr>
             </a:pPr>
             <a:r>
-              <a:t>Return to the exact draft text and context</a:t>
-            </a:r>
-          </a:p>
-        </p:txBody>
-      </p:sp>
-      <p:sp>
-        <p:nvSpPr>
-          <p:cNvPr id="15" name="Oval 14"/>
+              <a:t>normative clauses</a:t>
+            </a:r>
+          </a:p>
+          <a:p>
+            <a:pPr algn="ctr">
+              <a:spcAft>
+                <a:spcPts val="500"/>
+              </a:spcAft>
+              <a:defRPr sz="1100" b="0">
+                <a:solidFill>
+                  <a:srgbClr val="26313B"/>
+                </a:solidFill>
+                <a:latin typeface="Aptos"/>
+              </a:defRPr>
+            </a:pPr>
+            <a:r>
+              <a:t>scored</a:t>
+            </a:r>
+          </a:p>
+        </p:txBody>
+      </p:sp>
+      <p:sp>
+        <p:nvSpPr>
+          <p:cNvPr id="13" name="Rounded Rectangle 12"/>
           <p:cNvSpPr/>
           <p:nvPr/>
         </p:nvSpPr>
         <p:spPr>
           <a:xfrm>
-            <a:off x="1005840" y="4050791"/>
-            <a:ext cx="411480" cy="411480"/>
-          </a:xfrm>
-          <a:prstGeom prst="ellipse">
+            <a:off x="4334256" y="1719072"/>
+            <a:ext cx="1572768" cy="1069848"/>
+          </a:xfrm>
+          <a:prstGeom prst="roundRect">
             <a:avLst/>
           </a:prstGeom>
           <a:solidFill>
-            <a:srgbClr val="DA8B35"/>
+            <a:srgbClr val="E7F0F7"/>
           </a:solidFill>
-          <a:ln>
-            <a:noFill/>
+          <a:ln w="13970">
+            <a:solidFill>
+              <a:srgbClr val="E7F0F7"/>
+            </a:solidFill>
           </a:ln>
         </p:spPr>
         <p:style>
@@ -9674,22 +9634,22 @@
       </p:sp>
       <p:sp>
         <p:nvSpPr>
-          <p:cNvPr id="16" name="TextBox 15"/>
-          <p:cNvSpPr txBox="1"/>
-          <p:nvPr/>
-        </p:nvSpPr>
-        <p:spPr>
-          <a:xfrm>
-            <a:off x="1005840" y="4055363"/>
-            <a:ext cx="411480" cy="402336"/>
-          </a:xfrm>
-          <a:prstGeom prst="rect">
-            <a:avLst/>
-          </a:prstGeom>
-          <a:noFill/>
-        </p:spPr>
-        <p:txBody>
-          <a:bodyPr wrap="square" lIns="0" rIns="0" tIns="0" bIns="0" anchor="ctr">
+          <p:cNvPr id="14" name="TextBox 13"/>
+          <p:cNvSpPr txBox="1"/>
+          <p:nvPr/>
+        </p:nvSpPr>
+        <p:spPr>
+          <a:xfrm>
+            <a:off x="4407408" y="1828800"/>
+            <a:ext cx="1426464" cy="393192"/>
+          </a:xfrm>
+          <a:prstGeom prst="rect">
+            <a:avLst/>
+          </a:prstGeom>
+          <a:noFill/>
+        </p:spPr>
+        <p:txBody>
+          <a:bodyPr wrap="square" lIns="36576" rIns="36576" tIns="36576" bIns="36576" anchor="t">
             <a:spAutoFit/>
           </a:bodyPr>
           <a:lstStyle/>
@@ -9698,85 +9658,46 @@
               <a:spcAft>
                 <a:spcPts val="500"/>
               </a:spcAft>
-              <a:defRPr sz="1600" b="1">
-                <a:solidFill>
-                  <a:srgbClr val="FFFFFF"/>
-                </a:solidFill>
-                <a:latin typeface="Aptos"/>
-              </a:defRPr>
-            </a:pPr>
-            <a:r>
-              <a:t>3</a:t>
-            </a:r>
-          </a:p>
-        </p:txBody>
-      </p:sp>
-      <p:sp>
-        <p:nvSpPr>
-          <p:cNvPr id="17" name="TextBox 16"/>
-          <p:cNvSpPr txBox="1"/>
-          <p:nvPr/>
-        </p:nvSpPr>
-        <p:spPr>
-          <a:xfrm>
-            <a:off x="1600200" y="4041648"/>
-            <a:ext cx="1325880" cy="320040"/>
-          </a:xfrm>
-          <a:prstGeom prst="rect">
-            <a:avLst/>
-          </a:prstGeom>
-          <a:noFill/>
-        </p:spPr>
-        <p:txBody>
-          <a:bodyPr wrap="square" lIns="36576" rIns="36576" tIns="36576" bIns="36576" anchor="t">
-            <a:spAutoFit/>
-          </a:bodyPr>
-          <a:lstStyle/>
-          <a:p>
-            <a:pPr algn="l">
-              <a:spcAft>
-                <a:spcPts val="500"/>
-              </a:spcAft>
-              <a:defRPr sz="1800" b="1">
-                <a:solidFill>
-                  <a:srgbClr val="183452"/>
-                </a:solidFill>
-                <a:latin typeface="Aptos"/>
-              </a:defRPr>
-            </a:pPr>
-            <a:r>
-              <a:t>Decide</a:t>
-            </a:r>
-          </a:p>
-        </p:txBody>
-      </p:sp>
-      <p:sp>
-        <p:nvSpPr>
-          <p:cNvPr id="18" name="TextBox 17"/>
-          <p:cNvSpPr txBox="1"/>
-          <p:nvPr/>
-        </p:nvSpPr>
-        <p:spPr>
-          <a:xfrm>
-            <a:off x="2880360" y="4041648"/>
-            <a:ext cx="3657600" cy="512064"/>
-          </a:xfrm>
-          <a:prstGeom prst="rect">
-            <a:avLst/>
-          </a:prstGeom>
-          <a:noFill/>
-        </p:spPr>
-        <p:txBody>
-          <a:bodyPr wrap="square" lIns="36576" rIns="36576" tIns="36576" bIns="36576" anchor="t">
-            <a:spAutoFit/>
-          </a:bodyPr>
-          <a:lstStyle/>
-          <a:p>
-            <a:pPr algn="l">
-              <a:spcAft>
-                <a:spcPts val="500"/>
-              </a:spcAft>
-              <a:defRPr sz="1600" b="0">
+              <a:defRPr sz="2700" b="1">
+                <a:solidFill>
+                  <a:srgbClr val="DA8B35"/>
+                </a:solidFill>
+                <a:latin typeface="Aptos"/>
+              </a:defRPr>
+            </a:pPr>
+            <a:r>
+              <a:t>69</a:t>
+            </a:r>
+          </a:p>
+        </p:txBody>
+      </p:sp>
+      <p:sp>
+        <p:nvSpPr>
+          <p:cNvPr id="15" name="TextBox 14"/>
+          <p:cNvSpPr txBox="1"/>
+          <p:nvPr/>
+        </p:nvSpPr>
+        <p:spPr>
+          <a:xfrm>
+            <a:off x="4407408" y="2286000"/>
+            <a:ext cx="1426464" cy="384048"/>
+          </a:xfrm>
+          <a:prstGeom prst="rect">
+            <a:avLst/>
+          </a:prstGeom>
+          <a:noFill/>
+        </p:spPr>
+        <p:txBody>
+          <a:bodyPr wrap="square" lIns="36576" rIns="36576" tIns="36576" bIns="36576" anchor="t">
+            <a:spAutoFit/>
+          </a:bodyPr>
+          <a:lstStyle/>
+          <a:p>
+            <a:pPr algn="ctr">
+              <a:spcAft>
+                <a:spcPts val="500"/>
+              </a:spcAft>
+              <a:defRPr sz="1100" b="0">
                 <a:solidFill>
                   <a:srgbClr val="26313B"/>
                 </a:solidFill>
@@ -9784,31 +9705,47 @@
               </a:defRPr>
             </a:pPr>
             <a:r>
-              <a:t>Author or reviewer interprets the requirement</a:t>
-            </a:r>
-          </a:p>
-        </p:txBody>
-      </p:sp>
-      <p:sp>
-        <p:nvSpPr>
-          <p:cNvPr id="19" name="Rounded Rectangle 18"/>
+              <a:t>sections</a:t>
+            </a:r>
+          </a:p>
+          <a:p>
+            <a:pPr algn="ctr">
+              <a:spcAft>
+                <a:spcPts val="500"/>
+              </a:spcAft>
+              <a:defRPr sz="1100" b="0">
+                <a:solidFill>
+                  <a:srgbClr val="26313B"/>
+                </a:solidFill>
+                <a:latin typeface="Aptos"/>
+              </a:defRPr>
+            </a:pPr>
+            <a:r>
+              <a:t>represented</a:t>
+            </a:r>
+          </a:p>
+        </p:txBody>
+      </p:sp>
+      <p:sp>
+        <p:nvSpPr>
+          <p:cNvPr id="16" name="Rounded Rectangle 15"/>
           <p:cNvSpPr/>
           <p:nvPr/>
         </p:nvSpPr>
         <p:spPr>
           <a:xfrm>
-            <a:off x="7132320" y="1371600"/>
-            <a:ext cx="4069080" cy="2331720"/>
+            <a:off x="822960" y="3108960"/>
+            <a:ext cx="5084064" cy="1417320"/>
           </a:xfrm>
           <a:prstGeom prst="roundRect">
             <a:avLst/>
           </a:prstGeom>
           <a:solidFill>
-            <a:srgbClr val="FAEDEB"/>
+            <a:srgbClr val="E7F5F3"/>
           </a:solidFill>
           <a:ln w="13970">
             <a:solidFill>
-              <a:srgbClr val="FAEDEB"/>
+              <a:srgbClr val="D6E0E7"/>
             </a:solidFill>
           </a:ln>
         </p:spPr>
@@ -9836,62 +9773,25 @@
       </p:sp>
       <p:sp>
         <p:nvSpPr>
-          <p:cNvPr id="20" name="TextBox 19"/>
-          <p:cNvSpPr txBox="1"/>
-          <p:nvPr/>
-        </p:nvSpPr>
-        <p:spPr>
-          <a:xfrm>
-            <a:off x="7452360" y="1627632"/>
-            <a:ext cx="3429000" cy="384048"/>
-          </a:xfrm>
-          <a:prstGeom prst="rect">
-            <a:avLst/>
-          </a:prstGeom>
-          <a:noFill/>
-        </p:spPr>
-        <p:txBody>
-          <a:bodyPr wrap="square" lIns="36576" rIns="36576" tIns="36576" bIns="36576" anchor="t">
-            <a:spAutoFit/>
-          </a:bodyPr>
-          <a:lstStyle/>
-          <a:p>
-            <a:pPr algn="l">
-              <a:spcAft>
-                <a:spcPts val="500"/>
-              </a:spcAft>
-              <a:defRPr sz="2100" b="1">
-                <a:solidFill>
-                  <a:srgbClr val="A6413E"/>
-                </a:solidFill>
-                <a:latin typeface="Aptos"/>
-              </a:defRPr>
-            </a:pPr>
-            <a:r>
-              <a:t>Guardrails</a:t>
-            </a:r>
-          </a:p>
-        </p:txBody>
-      </p:sp>
-      <p:sp>
-        <p:nvSpPr>
-          <p:cNvPr id="21" name="Oval 20"/>
+          <p:cNvPr id="17" name="Rectangle 16"/>
           <p:cNvSpPr/>
           <p:nvPr/>
         </p:nvSpPr>
         <p:spPr>
           <a:xfrm>
-            <a:off x="7452360" y="2139696"/>
-            <a:ext cx="164592" cy="164592"/>
-          </a:xfrm>
-          <a:prstGeom prst="ellipse">
+            <a:off x="822960" y="3108960"/>
+            <a:ext cx="82296" cy="1417320"/>
+          </a:xfrm>
+          <a:prstGeom prst="rect">
             <a:avLst/>
           </a:prstGeom>
           <a:solidFill>
             <a:srgbClr val="1C8585"/>
           </a:solidFill>
           <a:ln>
-            <a:noFill/>
+            <a:solidFill>
+              <a:srgbClr val="1C8585"/>
+            </a:solidFill>
           </a:ln>
         </p:spPr>
         <p:style>
@@ -9918,50 +9818,14 @@
       </p:sp>
       <p:sp>
         <p:nvSpPr>
-          <p:cNvPr id="22" name="TextBox 21"/>
-          <p:cNvSpPr txBox="1"/>
-          <p:nvPr/>
-        </p:nvSpPr>
-        <p:spPr>
-          <a:xfrm>
-            <a:off x="7452360" y="2144268"/>
-            <a:ext cx="164592" cy="155448"/>
-          </a:xfrm>
-          <a:prstGeom prst="rect">
-            <a:avLst/>
-          </a:prstGeom>
-          <a:noFill/>
-        </p:spPr>
-        <p:txBody>
-          <a:bodyPr wrap="square" lIns="0" rIns="0" tIns="0" bIns="0" anchor="ctr">
-            <a:spAutoFit/>
-          </a:bodyPr>
-          <a:lstStyle/>
-          <a:p>
-            <a:pPr algn="ctr">
-              <a:spcAft>
-                <a:spcPts val="500"/>
-              </a:spcAft>
-              <a:defRPr sz="600" b="1">
-                <a:solidFill>
-                  <a:srgbClr val="FFFFFF"/>
-                </a:solidFill>
-                <a:latin typeface="Aptos"/>
-              </a:defRPr>
-            </a:pPr>
-          </a:p>
-        </p:txBody>
-      </p:sp>
-      <p:sp>
-        <p:nvSpPr>
-          <p:cNvPr id="23" name="TextBox 22"/>
-          <p:cNvSpPr txBox="1"/>
-          <p:nvPr/>
-        </p:nvSpPr>
-        <p:spPr>
-          <a:xfrm>
-            <a:off x="7744968" y="2103120"/>
-            <a:ext cx="3044952" cy="384048"/>
+          <p:cNvPr id="18" name="TextBox 17"/>
+          <p:cNvSpPr txBox="1"/>
+          <p:nvPr/>
+        </p:nvSpPr>
+        <p:spPr>
+          <a:xfrm>
+            <a:off x="1042416" y="3291840"/>
+            <a:ext cx="4690872" cy="347472"/>
           </a:xfrm>
           <a:prstGeom prst="rect">
             <a:avLst/>
@@ -9978,7 +9842,46 @@
               <a:spcAft>
                 <a:spcPts val="500"/>
               </a:spcAft>
-              <a:defRPr sz="1300" b="0">
+              <a:defRPr sz="1600" b="1">
+                <a:solidFill>
+                  <a:srgbClr val="183452"/>
+                </a:solidFill>
+                <a:latin typeface="Aptos"/>
+              </a:defRPr>
+            </a:pPr>
+            <a:r>
+              <a:t>Example ranked suggestion</a:t>
+            </a:r>
+          </a:p>
+        </p:txBody>
+      </p:sp>
+      <p:sp>
+        <p:nvSpPr>
+          <p:cNvPr id="19" name="TextBox 18"/>
+          <p:cNvSpPr txBox="1"/>
+          <p:nvPr/>
+        </p:nvSpPr>
+        <p:spPr>
+          <a:xfrm>
+            <a:off x="1042416" y="3721608"/>
+            <a:ext cx="4672583" cy="667512"/>
+          </a:xfrm>
+          <a:prstGeom prst="rect">
+            <a:avLst/>
+          </a:prstGeom>
+          <a:noFill/>
+        </p:spPr>
+        <p:txBody>
+          <a:bodyPr wrap="square" lIns="36576" rIns="36576" tIns="36576" bIns="36576" anchor="t">
+            <a:spAutoFit/>
+          </a:bodyPr>
+          <a:lstStyle/>
+          <a:p>
+            <a:pPr algn="l">
+              <a:spcAft>
+                <a:spcPts val="500"/>
+              </a:spcAft>
+              <a:defRPr sz="1400" b="0">
                 <a:solidFill>
                   <a:srgbClr val="26313B"/>
                 </a:solidFill>
@@ -9986,30 +9889,48 @@
               </a:defRPr>
             </a:pPr>
             <a:r>
-              <a:t>Never auto-reject a draft</a:t>
-            </a:r>
-          </a:p>
-        </p:txBody>
-      </p:sp>
-      <p:sp>
-        <p:nvSpPr>
-          <p:cNvPr id="24" name="Oval 23"/>
+              <a:t>Line 4727 · Section 14.2.1 · score 0.5433</a:t>
+            </a:r>
+          </a:p>
+          <a:p>
+            <a:pPr algn="l">
+              <a:spcAft>
+                <a:spcPts val="500"/>
+              </a:spcAft>
+              <a:defRPr sz="1400" b="0">
+                <a:solidFill>
+                  <a:srgbClr val="26313B"/>
+                </a:solidFill>
+                <a:latin typeface="Aptos"/>
+              </a:defRPr>
+            </a:pPr>
+            <a:r>
+              <a:t>“The endpoint SHOULD ignore all ICMP messages that fail validation.”</a:t>
+            </a:r>
+          </a:p>
+        </p:txBody>
+      </p:sp>
+      <p:sp>
+        <p:nvSpPr>
+          <p:cNvPr id="20" name="Rounded Rectangle 19"/>
           <p:cNvSpPr/>
           <p:nvPr/>
         </p:nvSpPr>
         <p:spPr>
           <a:xfrm>
-            <a:off x="7452360" y="2578608"/>
-            <a:ext cx="164592" cy="164592"/>
-          </a:xfrm>
-          <a:prstGeom prst="ellipse">
+            <a:off x="822960" y="4800600"/>
+            <a:ext cx="5084064" cy="960120"/>
+          </a:xfrm>
+          <a:prstGeom prst="roundRect">
             <a:avLst/>
           </a:prstGeom>
           <a:solidFill>
-            <a:srgbClr val="1C8585"/>
+            <a:srgbClr val="FBF2E3"/>
           </a:solidFill>
-          <a:ln>
-            <a:noFill/>
+          <a:ln w="13970">
+            <a:solidFill>
+              <a:srgbClr val="FBF2E3"/>
+            </a:solidFill>
           </a:ln>
         </p:spPr>
         <p:style>
@@ -10036,401 +9957,172 @@
       </p:sp>
       <p:sp>
         <p:nvSpPr>
-          <p:cNvPr id="25" name="TextBox 24"/>
-          <p:cNvSpPr txBox="1"/>
-          <p:nvPr/>
-        </p:nvSpPr>
-        <p:spPr>
-          <a:xfrm>
-            <a:off x="7452360" y="2583179"/>
-            <a:ext cx="164592" cy="155448"/>
-          </a:xfrm>
-          <a:prstGeom prst="rect">
-            <a:avLst/>
-          </a:prstGeom>
-          <a:noFill/>
-        </p:spPr>
-        <p:txBody>
-          <a:bodyPr wrap="square" lIns="0" rIns="0" tIns="0" bIns="0" anchor="ctr">
-            <a:spAutoFit/>
-          </a:bodyPr>
-          <a:lstStyle/>
-          <a:p>
-            <a:pPr algn="ctr">
-              <a:spcAft>
-                <a:spcPts val="500"/>
-              </a:spcAft>
-              <a:defRPr sz="600" b="1">
-                <a:solidFill>
-                  <a:srgbClr val="FFFFFF"/>
-                </a:solidFill>
-                <a:latin typeface="Aptos"/>
-              </a:defRPr>
-            </a:pPr>
-          </a:p>
-        </p:txBody>
-      </p:sp>
+          <p:cNvPr id="21" name="TextBox 20"/>
+          <p:cNvSpPr txBox="1"/>
+          <p:nvPr/>
+        </p:nvSpPr>
+        <p:spPr>
+          <a:xfrm>
+            <a:off x="1024128" y="4965192"/>
+            <a:ext cx="4681728" cy="621792"/>
+          </a:xfrm>
+          <a:prstGeom prst="rect">
+            <a:avLst/>
+          </a:prstGeom>
+          <a:noFill/>
+        </p:spPr>
+        <p:txBody>
+          <a:bodyPr wrap="square" lIns="36576" rIns="36576" tIns="36576" bIns="36576" anchor="t">
+            <a:spAutoFit/>
+          </a:bodyPr>
+          <a:lstStyle/>
+          <a:p>
+            <a:pPr algn="l">
+              <a:spcAft>
+                <a:spcPts val="500"/>
+              </a:spcAft>
+              <a:defRPr sz="1300" b="0">
+                <a:solidFill>
+                  <a:srgbClr val="26313B"/>
+                </a:solidFill>
+                <a:latin typeface="Aptos"/>
+              </a:defRPr>
+            </a:pPr>
+            <a:r>
+              <a:t>Scores rank clauses for review; they are not calibrated probabilities or ambiguity verdicts. This capture also had a scikit-learn artifact/runtime version warning.</a:t>
+            </a:r>
+          </a:p>
+        </p:txBody>
+      </p:sp>
+      <p:sp>
+        <p:nvSpPr>
+          <p:cNvPr id="22" name="TextBox 21"/>
+          <p:cNvSpPr txBox="1"/>
+          <p:nvPr/>
+        </p:nvSpPr>
+        <p:spPr>
+          <a:xfrm>
+            <a:off x="6720840" y="1152144"/>
+            <a:ext cx="4892040" cy="201168"/>
+          </a:xfrm>
+          <a:prstGeom prst="rect">
+            <a:avLst/>
+          </a:prstGeom>
+          <a:noFill/>
+        </p:spPr>
+        <p:txBody>
+          <a:bodyPr wrap="square" lIns="36576" rIns="36576" tIns="36576" bIns="36576" anchor="t">
+            <a:spAutoFit/>
+          </a:bodyPr>
+          <a:lstStyle/>
+          <a:p>
+            <a:pPr algn="l">
+              <a:spcAft>
+                <a:spcPts val="500"/>
+              </a:spcAft>
+              <a:defRPr sz="1100" b="1">
+                <a:solidFill>
+                  <a:srgbClr val="1C8585"/>
+                </a:solidFill>
+                <a:latin typeface="Aptos"/>
+              </a:defRPr>
+            </a:pPr>
+            <a:r>
+              <a:t>Overview · RFC 9000</a:t>
+            </a:r>
+          </a:p>
+        </p:txBody>
+      </p:sp>
+      <p:pic>
+        <p:nvPicPr>
+          <p:cNvPr id="23" name="Picture 22" descr="gui_rfc9000_overview.png"/>
+          <p:cNvPicPr>
+            <a:picLocks noChangeAspect="1"/>
+          </p:cNvPicPr>
+          <p:nvPr/>
+        </p:nvPicPr>
+        <p:blipFill>
+          <a:blip r:embed="rId2"/>
+          <a:stretch>
+            <a:fillRect/>
+          </a:stretch>
+        </p:blipFill>
+        <p:spPr>
+          <a:xfrm>
+            <a:off x="6720840" y="1389888"/>
+            <a:ext cx="4800600" cy="2226478"/>
+          </a:xfrm>
+          <a:prstGeom prst="rect">
+            <a:avLst/>
+          </a:prstGeom>
+        </p:spPr>
+      </p:pic>
+      <p:sp>
+        <p:nvSpPr>
+          <p:cNvPr id="24" name="TextBox 23"/>
+          <p:cNvSpPr txBox="1"/>
+          <p:nvPr/>
+        </p:nvSpPr>
+        <p:spPr>
+          <a:xfrm>
+            <a:off x="6720840" y="3730752"/>
+            <a:ext cx="4892040" cy="201168"/>
+          </a:xfrm>
+          <a:prstGeom prst="rect">
+            <a:avLst/>
+          </a:prstGeom>
+          <a:noFill/>
+        </p:spPr>
+        <p:txBody>
+          <a:bodyPr wrap="square" lIns="36576" rIns="36576" tIns="36576" bIns="36576" anchor="t">
+            <a:spAutoFit/>
+          </a:bodyPr>
+          <a:lstStyle/>
+          <a:p>
+            <a:pPr algn="l">
+              <a:spcAft>
+                <a:spcPts val="500"/>
+              </a:spcAft>
+              <a:defRPr sz="1100" b="1">
+                <a:solidFill>
+                  <a:srgbClr val="1C8585"/>
+                </a:solidFill>
+                <a:latin typeface="Aptos"/>
+              </a:defRPr>
+            </a:pPr>
+            <a:r>
+              <a:t>Filtered suggestion · one of 112 flagged clauses</a:t>
+            </a:r>
+          </a:p>
+        </p:txBody>
+      </p:sp>
+      <p:pic>
+        <p:nvPicPr>
+          <p:cNvPr id="25" name="Picture 24" descr="gui_rfc9000_filtered_results.png"/>
+          <p:cNvPicPr>
+            <a:picLocks noChangeAspect="1"/>
+          </p:cNvPicPr>
+          <p:nvPr/>
+        </p:nvPicPr>
+        <p:blipFill>
+          <a:blip r:embed="rId3"/>
+          <a:stretch>
+            <a:fillRect/>
+          </a:stretch>
+        </p:blipFill>
+        <p:spPr>
+          <a:xfrm>
+            <a:off x="6720840" y="3968496"/>
+            <a:ext cx="4800600" cy="2226478"/>
+          </a:xfrm>
+          <a:prstGeom prst="rect">
+            <a:avLst/>
+          </a:prstGeom>
+        </p:spPr>
+      </p:pic>
       <p:sp>
         <p:nvSpPr>
           <p:cNvPr id="26" name="TextBox 25"/>
-          <p:cNvSpPr txBox="1"/>
-          <p:nvPr/>
-        </p:nvSpPr>
-        <p:spPr>
-          <a:xfrm>
-            <a:off x="7744968" y="2542032"/>
-            <a:ext cx="3044952" cy="384048"/>
-          </a:xfrm>
-          <a:prstGeom prst="rect">
-            <a:avLst/>
-          </a:prstGeom>
-          <a:noFill/>
-        </p:spPr>
-        <p:txBody>
-          <a:bodyPr wrap="square" lIns="36576" rIns="36576" tIns="36576" bIns="36576" anchor="t">
-            <a:spAutoFit/>
-          </a:bodyPr>
-          <a:lstStyle/>
-          <a:p>
-            <a:pPr algn="l">
-              <a:spcAft>
-                <a:spcPts val="500"/>
-              </a:spcAft>
-              <a:defRPr sz="1300" b="0">
-                <a:solidFill>
-                  <a:srgbClr val="26313B"/>
-                </a:solidFill>
-                <a:latin typeface="Aptos"/>
-              </a:defRPr>
-            </a:pPr>
-            <a:r>
-              <a:t>Expose uncertainty and provenance</a:t>
-            </a:r>
-          </a:p>
-        </p:txBody>
-      </p:sp>
-      <p:sp>
-        <p:nvSpPr>
-          <p:cNvPr id="27" name="Oval 26"/>
-          <p:cNvSpPr/>
-          <p:nvPr/>
-        </p:nvSpPr>
-        <p:spPr>
-          <a:xfrm>
-            <a:off x="7452360" y="3017520"/>
-            <a:ext cx="164592" cy="164592"/>
-          </a:xfrm>
-          <a:prstGeom prst="ellipse">
-            <a:avLst/>
-          </a:prstGeom>
-          <a:solidFill>
-            <a:srgbClr val="1C8585"/>
-          </a:solidFill>
-          <a:ln>
-            <a:noFill/>
-          </a:ln>
-        </p:spPr>
-        <p:style>
-          <a:lnRef idx="1">
-            <a:schemeClr val="accent1"/>
-          </a:lnRef>
-          <a:fillRef idx="3">
-            <a:schemeClr val="accent1"/>
-          </a:fillRef>
-          <a:effectRef idx="2">
-            <a:schemeClr val="accent1"/>
-          </a:effectRef>
-          <a:fontRef idx="minor">
-            <a:schemeClr val="lt1"/>
-          </a:fontRef>
-        </p:style>
-        <p:txBody>
-          <a:bodyPr rtlCol="0" anchor="ctr"/>
-          <a:lstStyle/>
-          <a:p>
-            <a:pPr algn="ctr"/>
-          </a:p>
-        </p:txBody>
-      </p:sp>
-      <p:sp>
-        <p:nvSpPr>
-          <p:cNvPr id="28" name="TextBox 27"/>
-          <p:cNvSpPr txBox="1"/>
-          <p:nvPr/>
-        </p:nvSpPr>
-        <p:spPr>
-          <a:xfrm>
-            <a:off x="7452360" y="3022091"/>
-            <a:ext cx="164592" cy="155448"/>
-          </a:xfrm>
-          <a:prstGeom prst="rect">
-            <a:avLst/>
-          </a:prstGeom>
-          <a:noFill/>
-        </p:spPr>
-        <p:txBody>
-          <a:bodyPr wrap="square" lIns="0" rIns="0" tIns="0" bIns="0" anchor="ctr">
-            <a:spAutoFit/>
-          </a:bodyPr>
-          <a:lstStyle/>
-          <a:p>
-            <a:pPr algn="ctr">
-              <a:spcAft>
-                <a:spcPts val="500"/>
-              </a:spcAft>
-              <a:defRPr sz="600" b="1">
-                <a:solidFill>
-                  <a:srgbClr val="FFFFFF"/>
-                </a:solidFill>
-                <a:latin typeface="Aptos"/>
-              </a:defRPr>
-            </a:pPr>
-          </a:p>
-        </p:txBody>
-      </p:sp>
-      <p:sp>
-        <p:nvSpPr>
-          <p:cNvPr id="29" name="TextBox 28"/>
-          <p:cNvSpPr txBox="1"/>
-          <p:nvPr/>
-        </p:nvSpPr>
-        <p:spPr>
-          <a:xfrm>
-            <a:off x="7744968" y="2980944"/>
-            <a:ext cx="3044952" cy="384048"/>
-          </a:xfrm>
-          <a:prstGeom prst="rect">
-            <a:avLst/>
-          </a:prstGeom>
-          <a:noFill/>
-        </p:spPr>
-        <p:txBody>
-          <a:bodyPr wrap="square" lIns="36576" rIns="36576" tIns="36576" bIns="36576" anchor="t">
-            <a:spAutoFit/>
-          </a:bodyPr>
-          <a:lstStyle/>
-          <a:p>
-            <a:pPr algn="l">
-              <a:spcAft>
-                <a:spcPts val="500"/>
-              </a:spcAft>
-              <a:defRPr sz="1300" b="0">
-                <a:solidFill>
-                  <a:srgbClr val="26313B"/>
-                </a:solidFill>
-                <a:latin typeface="Aptos"/>
-              </a:defRPr>
-            </a:pPr>
-            <a:r>
-              <a:t>Do not treat generated explanations as proof</a:t>
-            </a:r>
-          </a:p>
-        </p:txBody>
-      </p:sp>
-      <p:sp>
-        <p:nvSpPr>
-          <p:cNvPr id="30" name="Rounded Rectangle 29"/>
-          <p:cNvSpPr/>
-          <p:nvPr/>
-        </p:nvSpPr>
-        <p:spPr>
-          <a:xfrm>
-            <a:off x="7132320" y="3877056"/>
-            <a:ext cx="4069080" cy="1207008"/>
-          </a:xfrm>
-          <a:prstGeom prst="roundRect">
-            <a:avLst/>
-          </a:prstGeom>
-          <a:solidFill>
-            <a:srgbClr val="E7F5F3"/>
-          </a:solidFill>
-          <a:ln w="13970">
-            <a:solidFill>
-              <a:srgbClr val="E7F5F3"/>
-            </a:solidFill>
-          </a:ln>
-        </p:spPr>
-        <p:style>
-          <a:lnRef idx="1">
-            <a:schemeClr val="accent1"/>
-          </a:lnRef>
-          <a:fillRef idx="3">
-            <a:schemeClr val="accent1"/>
-          </a:fillRef>
-          <a:effectRef idx="2">
-            <a:schemeClr val="accent1"/>
-          </a:effectRef>
-          <a:fontRef idx="minor">
-            <a:schemeClr val="lt1"/>
-          </a:fontRef>
-        </p:style>
-        <p:txBody>
-          <a:bodyPr rtlCol="0" anchor="ctr"/>
-          <a:lstStyle/>
-          <a:p>
-            <a:pPr algn="ctr"/>
-          </a:p>
-        </p:txBody>
-      </p:sp>
-      <p:sp>
-        <p:nvSpPr>
-          <p:cNvPr id="31" name="TextBox 30"/>
-          <p:cNvSpPr txBox="1"/>
-          <p:nvPr/>
-        </p:nvSpPr>
-        <p:spPr>
-          <a:xfrm>
-            <a:off x="7388352" y="4023360"/>
-            <a:ext cx="3566160" cy="237744"/>
-          </a:xfrm>
-          <a:prstGeom prst="rect">
-            <a:avLst/>
-          </a:prstGeom>
-          <a:noFill/>
-        </p:spPr>
-        <p:txBody>
-          <a:bodyPr wrap="square" lIns="36576" rIns="36576" tIns="36576" bIns="36576" anchor="t">
-            <a:spAutoFit/>
-          </a:bodyPr>
-          <a:lstStyle/>
-          <a:p>
-            <a:pPr algn="l">
-              <a:spcAft>
-                <a:spcPts val="500"/>
-              </a:spcAft>
-              <a:defRPr sz="1000" b="1">
-                <a:solidFill>
-                  <a:srgbClr val="1C8585"/>
-                </a:solidFill>
-                <a:latin typeface="Aptos"/>
-              </a:defRPr>
-            </a:pPr>
-            <a:r>
-              <a:t>ILLUSTRATIVE MODEL OUTPUT</a:t>
-            </a:r>
-          </a:p>
-        </p:txBody>
-      </p:sp>
-      <p:sp>
-        <p:nvSpPr>
-          <p:cNvPr id="32" name="TextBox 31"/>
-          <p:cNvSpPr txBox="1"/>
-          <p:nvPr/>
-        </p:nvSpPr>
-        <p:spPr>
-          <a:xfrm>
-            <a:off x="7388352" y="4343400"/>
-            <a:ext cx="566928" cy="310896"/>
-          </a:xfrm>
-          <a:prstGeom prst="rect">
-            <a:avLst/>
-          </a:prstGeom>
-          <a:noFill/>
-        </p:spPr>
-        <p:txBody>
-          <a:bodyPr wrap="square" lIns="36576" rIns="36576" tIns="36576" bIns="36576" anchor="t">
-            <a:spAutoFit/>
-          </a:bodyPr>
-          <a:lstStyle/>
-          <a:p>
-            <a:pPr algn="l">
-              <a:spcAft>
-                <a:spcPts val="500"/>
-              </a:spcAft>
-              <a:defRPr sz="1700" b="1">
-                <a:solidFill>
-                  <a:srgbClr val="1C8585"/>
-                </a:solidFill>
-                <a:latin typeface="Aptos"/>
-              </a:defRPr>
-            </a:pPr>
-            <a:r>
-              <a:t>YES</a:t>
-            </a:r>
-          </a:p>
-        </p:txBody>
-      </p:sp>
-      <p:sp>
-        <p:nvSpPr>
-          <p:cNvPr id="33" name="TextBox 32"/>
-          <p:cNvSpPr txBox="1"/>
-          <p:nvPr/>
-        </p:nvSpPr>
-        <p:spPr>
-          <a:xfrm>
-            <a:off x="8028431" y="4288536"/>
-            <a:ext cx="2907792" cy="603504"/>
-          </a:xfrm>
-          <a:prstGeom prst="rect">
-            <a:avLst/>
-          </a:prstGeom>
-          <a:noFill/>
-        </p:spPr>
-        <p:txBody>
-          <a:bodyPr wrap="square" lIns="36576" rIns="36576" tIns="36576" bIns="36576" anchor="t">
-            <a:spAutoFit/>
-          </a:bodyPr>
-          <a:lstStyle/>
-          <a:p>
-            <a:pPr algn="l">
-              <a:spcAft>
-                <a:spcPts val="500"/>
-              </a:spcAft>
-              <a:defRPr sz="1300" b="0">
-                <a:solidFill>
-                  <a:srgbClr val="26313B"/>
-                </a:solidFill>
-                <a:latin typeface="Aptos"/>
-              </a:defRPr>
-            </a:pPr>
-            <a:r>
-              <a:t>“When appropriate” leaves the retry condition open.</a:t>
-            </a:r>
-          </a:p>
-        </p:txBody>
-      </p:sp>
-      <p:sp>
-        <p:nvSpPr>
-          <p:cNvPr id="34" name="TextBox 33"/>
-          <p:cNvSpPr txBox="1"/>
-          <p:nvPr/>
-        </p:nvSpPr>
-        <p:spPr>
-          <a:xfrm>
-            <a:off x="914400" y="5394960"/>
-            <a:ext cx="10241280" cy="484632"/>
-          </a:xfrm>
-          <a:prstGeom prst="rect">
-            <a:avLst/>
-          </a:prstGeom>
-          <a:noFill/>
-        </p:spPr>
-        <p:txBody>
-          <a:bodyPr wrap="square" lIns="36576" rIns="36576" tIns="36576" bIns="36576" anchor="t">
-            <a:spAutoFit/>
-          </a:bodyPr>
-          <a:lstStyle/>
-          <a:p>
-            <a:pPr algn="ctr">
-              <a:spcAft>
-                <a:spcPts val="500"/>
-              </a:spcAft>
-              <a:defRPr sz="1800" b="1">
-                <a:solidFill>
-                  <a:srgbClr val="183452"/>
-                </a:solidFill>
-                <a:latin typeface="Aptos"/>
-              </a:defRPr>
-            </a:pPr>
-            <a:r>
-              <a:t>A false flag costs reviewer time; a missed flag can create false reassurance.</a:t>
-            </a:r>
-          </a:p>
-        </p:txBody>
-      </p:sp>
-      <p:sp>
-        <p:nvSpPr>
-          <p:cNvPr id="35" name="TextBox 34"/>
           <p:cNvSpPr txBox="1"/>
           <p:nvPr/>
         </p:nvSpPr>
@@ -10462,14 +10154,14 @@
               </a:defRPr>
             </a:pPr>
             <a:r>
-              <a:t>Source: paper/main.tex, Ethical and Practical Considerations.</a:t>
-            </a:r>
-          </a:p>
-        </p:txBody>
-      </p:sp>
-      <p:sp>
-        <p:nvSpPr>
-          <p:cNvPr id="36" name="TextBox 35"/>
+              <a:t>GUI screenshots: local scan of corpus/raw/rfcs/RFC9000.txt; model scores are screening ranks.</a:t>
+            </a:r>
+          </a:p>
+        </p:txBody>
+      </p:sp>
+      <p:sp>
+        <p:nvSpPr>
+          <p:cNvPr id="27" name="TextBox 26"/>
           <p:cNvSpPr txBox="1"/>
           <p:nvPr/>
         </p:nvSpPr>
@@ -11089,7 +10781,7 @@
               </a:defRPr>
             </a:pPr>
             <a:r>
-              <a:t>Retrain ML on the same frozen labels; repeat finalists across seeds.</a:t>
+              <a:t>Retrain classical and Qwen/hybrid on common labels and folds; repeat finalists across seeds.</a:t>
             </a:r>
           </a:p>
         </p:txBody>
@@ -16964,7 +16656,7 @@
               </a:defRPr>
             </a:pPr>
             <a:r>
-              <a:t>2,125 clauses · 9 families</a:t>
+              <a:t>2,143 clauses · 9 families</a:t>
             </a:r>
           </a:p>
         </p:txBody>
@@ -17003,7 +16695,7 @@
               </a:defRPr>
             </a:pPr>
             <a:r>
-              <a:t>136 positives · prevalence 6.40%</a:t>
+              <a:t>138 positives · prevalence 6.44%</a:t>
             </a:r>
           </a:p>
         </p:txBody>
@@ -17042,7 +16734,7 @@
               </a:defRPr>
             </a:pPr>
             <a:r>
-              <a:t>Different label snapshots and eligibility rules: these cohorts are not one shared leaderboard.</a:t>
+              <a:t>Different label snapshots and eligibility rules: only the three latest DeBERTa methods share one cohort.</a:t>
             </a:r>
           </a:p>
         </p:txBody>
@@ -17081,7 +16773,7 @@
               </a:defRPr>
             </a:pPr>
             <a:r>
-              <a:t>Source: README.md; paper/main.tex. Cohort metrics are study-specific.</a:t>
+              <a:t>Source: paper/main.tex; study-specific cohorts and label snapshots.</a:t>
             </a:r>
           </a:p>
         </p:txBody>

--- a/paper/presentation/ietf_ambiguity_detection_presentation.pptx
+++ b/paper/presentation/ietf_ambiguity_detection_presentation.pptx
@@ -4373,45 +4373,6 @@
         </p:nvSpPr>
         <p:spPr>
           <a:xfrm>
-            <a:off x="10744200" y="6492240"/>
-            <a:ext cx="777240" cy="201168"/>
-          </a:xfrm>
-          <a:prstGeom prst="rect">
-            <a:avLst/>
-          </a:prstGeom>
-          <a:noFill/>
-        </p:spPr>
-        <p:txBody>
-          <a:bodyPr wrap="square" lIns="36576" rIns="36576" tIns="36576" bIns="36576" anchor="t">
-            <a:spAutoFit/>
-          </a:bodyPr>
-          <a:lstStyle/>
-          <a:p>
-            <a:pPr algn="r">
-              <a:spcAft>
-                <a:spcPts val="500"/>
-              </a:spcAft>
-              <a:defRPr sz="900" b="0">
-                <a:solidFill>
-                  <a:srgbClr val="5B6974"/>
-                </a:solidFill>
-                <a:latin typeface="Aptos"/>
-              </a:defRPr>
-            </a:pPr>
-            <a:r>
-              <a:t>10  |  18</a:t>
-            </a:r>
-          </a:p>
-        </p:txBody>
-      </p:sp>
-      <p:sp>
-        <p:nvSpPr>
-          <p:cNvPr id="6" name="TextBox 5"/>
-          <p:cNvSpPr txBox="1"/>
-          <p:nvPr/>
-        </p:nvSpPr>
-        <p:spPr>
-          <a:xfrm>
             <a:off x="868680" y="1143000"/>
             <a:ext cx="5577840" cy="475488"/>
           </a:xfrm>
@@ -4438,21 +4399,21 @@
               </a:defRPr>
             </a:pPr>
             <a:r>
-              <a:t>2,406 clauses  ·  158 positives  ·  11 families</a:t>
+              <a:t>2,425 clauses  ·  160 positives  ·  11 families</a:t>
             </a:r>
           </a:p>
         </p:txBody>
       </p:sp>
       <p:cxnSp>
         <p:nvCxnSpPr>
-          <p:cNvPr id="7" name="Connector 6"/>
+          <p:cNvPr id="6" name="Connector 5"/>
           <p:cNvCxnSpPr/>
           <p:nvPr/>
         </p:nvCxnSpPr>
         <p:spPr>
           <a:xfrm>
-            <a:off x="4773254" y="1929384"/>
-            <a:ext cx="0" cy="2633472"/>
+            <a:off x="5076063" y="1773936"/>
+            <a:ext cx="0" cy="2798064"/>
           </a:xfrm>
           <a:prstGeom prst="line">
             <a:avLst/>
@@ -4480,14 +4441,53 @@
       </p:cxnSp>
       <p:sp>
         <p:nvSpPr>
+          <p:cNvPr id="7" name="TextBox 6"/>
+          <p:cNvSpPr txBox="1"/>
+          <p:nvPr/>
+        </p:nvSpPr>
+        <p:spPr>
+          <a:xfrm>
+            <a:off x="5112639" y="1563624"/>
+            <a:ext cx="1005840" cy="201168"/>
+          </a:xfrm>
+          <a:prstGeom prst="rect">
+            <a:avLst/>
+          </a:prstGeom>
+          <a:noFill/>
+        </p:spPr>
+        <p:txBody>
+          <a:bodyPr wrap="square" lIns="36576" rIns="36576" tIns="36576" bIns="36576" anchor="t">
+            <a:spAutoFit/>
+          </a:bodyPr>
+          <a:lstStyle/>
+          <a:p>
+            <a:pPr algn="l">
+              <a:spcAft>
+                <a:spcPts val="500"/>
+              </a:spcAft>
+              <a:defRPr sz="900" b="0">
+                <a:solidFill>
+                  <a:srgbClr val="A6413E"/>
+                </a:solidFill>
+                <a:latin typeface="Aptos"/>
+              </a:defRPr>
+            </a:pPr>
+            <a:r>
+              <a:t>base 0.066</a:t>
+            </a:r>
+          </a:p>
+        </p:txBody>
+      </p:sp>
+      <p:sp>
+        <p:nvSpPr>
           <p:cNvPr id="8" name="TextBox 7"/>
           <p:cNvSpPr txBox="1"/>
           <p:nvPr/>
         </p:nvSpPr>
         <p:spPr>
           <a:xfrm>
-            <a:off x="4809830" y="1719072"/>
-            <a:ext cx="1005840" cy="201168"/>
+            <a:off x="868680" y="1847088"/>
+            <a:ext cx="3456432" cy="347472"/>
           </a:xfrm>
           <a:prstGeom prst="rect">
             <a:avLst/>
@@ -4504,29 +4504,74 @@
               <a:spcAft>
                 <a:spcPts val="500"/>
               </a:spcAft>
-              <a:defRPr sz="900" b="0">
-                <a:solidFill>
-                  <a:srgbClr val="A6413E"/>
-                </a:solidFill>
-                <a:latin typeface="Aptos"/>
-              </a:defRPr>
-            </a:pPr>
-            <a:r>
-              <a:t>base 0.066</a:t>
-            </a:r>
-          </a:p>
-        </p:txBody>
-      </p:sp>
-      <p:sp>
-        <p:nvSpPr>
-          <p:cNvPr id="9" name="TextBox 8"/>
-          <p:cNvSpPr txBox="1"/>
-          <p:nvPr/>
-        </p:nvSpPr>
-        <p:spPr>
-          <a:xfrm>
-            <a:off x="960120" y="2002536"/>
-            <a:ext cx="3273552" cy="347472"/>
+              <a:defRPr sz="1400" b="1">
+                <a:solidFill>
+                  <a:srgbClr val="26313B"/>
+                </a:solidFill>
+                <a:latin typeface="Aptos"/>
+              </a:defRPr>
+            </a:pPr>
+            <a:r>
+              <a:t>Linear SVM: engineered + TF–IDF</a:t>
+            </a:r>
+          </a:p>
+        </p:txBody>
+      </p:sp>
+      <p:sp>
+        <p:nvSpPr>
+          <p:cNvPr id="9" name="Rectangle 8"/>
+          <p:cNvSpPr/>
+          <p:nvPr/>
+        </p:nvSpPr>
+        <p:spPr>
+          <a:xfrm>
+            <a:off x="4434840" y="1883664"/>
+            <a:ext cx="3482035" cy="310896"/>
+          </a:xfrm>
+          <a:prstGeom prst="rect">
+            <a:avLst/>
+          </a:prstGeom>
+          <a:solidFill>
+            <a:srgbClr val="1C8585"/>
+          </a:solidFill>
+          <a:ln>
+            <a:solidFill>
+              <a:srgbClr val="1C8585"/>
+            </a:solidFill>
+          </a:ln>
+        </p:spPr>
+        <p:style>
+          <a:lnRef idx="1">
+            <a:schemeClr val="accent1"/>
+          </a:lnRef>
+          <a:fillRef idx="3">
+            <a:schemeClr val="accent1"/>
+          </a:fillRef>
+          <a:effectRef idx="2">
+            <a:schemeClr val="accent1"/>
+          </a:effectRef>
+          <a:fontRef idx="minor">
+            <a:schemeClr val="lt1"/>
+          </a:fontRef>
+        </p:style>
+        <p:txBody>
+          <a:bodyPr rtlCol="0" anchor="ctr"/>
+          <a:lstStyle/>
+          <a:p>
+            <a:pPr algn="ctr"/>
+          </a:p>
+        </p:txBody>
+      </p:sp>
+      <p:sp>
+        <p:nvSpPr>
+          <p:cNvPr id="10" name="TextBox 9"/>
+          <p:cNvSpPr txBox="1"/>
+          <p:nvPr/>
+        </p:nvSpPr>
+        <p:spPr>
+          <a:xfrm>
+            <a:off x="7999171" y="1856231"/>
+            <a:ext cx="566928" cy="320040"/>
           </a:xfrm>
           <a:prstGeom prst="rect">
             <a:avLst/>
@@ -4543,7 +4588,7 @@
               <a:spcAft>
                 <a:spcPts val="500"/>
               </a:spcAft>
-              <a:defRPr sz="1400" b="1">
+              <a:defRPr sz="1200" b="1">
                 <a:solidFill>
                   <a:srgbClr val="26313B"/>
                 </a:solidFill>
@@ -4551,6 +4596,168 @@
               </a:defRPr>
             </a:pPr>
             <a:r>
+              <a:t>0.3584</a:t>
+            </a:r>
+          </a:p>
+        </p:txBody>
+      </p:sp>
+      <p:sp>
+        <p:nvSpPr>
+          <p:cNvPr id="11" name="TextBox 10"/>
+          <p:cNvSpPr txBox="1"/>
+          <p:nvPr/>
+        </p:nvSpPr>
+        <p:spPr>
+          <a:xfrm>
+            <a:off x="868680" y="2414016"/>
+            <a:ext cx="3456432" cy="347472"/>
+          </a:xfrm>
+          <a:prstGeom prst="rect">
+            <a:avLst/>
+          </a:prstGeom>
+          <a:noFill/>
+        </p:spPr>
+        <p:txBody>
+          <a:bodyPr wrap="square" lIns="36576" rIns="36576" tIns="36576" bIns="36576" anchor="t">
+            <a:spAutoFit/>
+          </a:bodyPr>
+          <a:lstStyle/>
+          <a:p>
+            <a:pPr algn="l">
+              <a:spcAft>
+                <a:spcPts val="500"/>
+              </a:spcAft>
+              <a:defRPr sz="1400" b="0">
+                <a:solidFill>
+                  <a:srgbClr val="26313B"/>
+                </a:solidFill>
+                <a:latin typeface="Aptos"/>
+              </a:defRPr>
+            </a:pPr>
+            <a:r>
+              <a:t>Random forest: engineered + TF–IDF</a:t>
+            </a:r>
+          </a:p>
+        </p:txBody>
+      </p:sp>
+      <p:sp>
+        <p:nvSpPr>
+          <p:cNvPr id="12" name="Rectangle 11"/>
+          <p:cNvSpPr/>
+          <p:nvPr/>
+        </p:nvSpPr>
+        <p:spPr>
+          <a:xfrm>
+            <a:off x="4434840" y="2450592"/>
+            <a:ext cx="3267322" cy="310896"/>
+          </a:xfrm>
+          <a:prstGeom prst="rect">
+            <a:avLst/>
+          </a:prstGeom>
+          <a:solidFill>
+            <a:srgbClr val="183452"/>
+          </a:solidFill>
+          <a:ln>
+            <a:solidFill>
+              <a:srgbClr val="183452"/>
+            </a:solidFill>
+          </a:ln>
+        </p:spPr>
+        <p:style>
+          <a:lnRef idx="1">
+            <a:schemeClr val="accent1"/>
+          </a:lnRef>
+          <a:fillRef idx="3">
+            <a:schemeClr val="accent1"/>
+          </a:fillRef>
+          <a:effectRef idx="2">
+            <a:schemeClr val="accent1"/>
+          </a:effectRef>
+          <a:fontRef idx="minor">
+            <a:schemeClr val="lt1"/>
+          </a:fontRef>
+        </p:style>
+        <p:txBody>
+          <a:bodyPr rtlCol="0" anchor="ctr"/>
+          <a:lstStyle/>
+          <a:p>
+            <a:pPr algn="ctr"/>
+          </a:p>
+        </p:txBody>
+      </p:sp>
+      <p:sp>
+        <p:nvSpPr>
+          <p:cNvPr id="13" name="TextBox 12"/>
+          <p:cNvSpPr txBox="1"/>
+          <p:nvPr/>
+        </p:nvSpPr>
+        <p:spPr>
+          <a:xfrm>
+            <a:off x="7784458" y="2423160"/>
+            <a:ext cx="566928" cy="320040"/>
+          </a:xfrm>
+          <a:prstGeom prst="rect">
+            <a:avLst/>
+          </a:prstGeom>
+          <a:noFill/>
+        </p:spPr>
+        <p:txBody>
+          <a:bodyPr wrap="square" lIns="36576" rIns="36576" tIns="36576" bIns="36576" anchor="t">
+            <a:spAutoFit/>
+          </a:bodyPr>
+          <a:lstStyle/>
+          <a:p>
+            <a:pPr algn="l">
+              <a:spcAft>
+                <a:spcPts val="500"/>
+              </a:spcAft>
+              <a:defRPr sz="1200" b="1">
+                <a:solidFill>
+                  <a:srgbClr val="26313B"/>
+                </a:solidFill>
+                <a:latin typeface="Aptos"/>
+              </a:defRPr>
+            </a:pPr>
+            <a:r>
+              <a:t>0.3363</a:t>
+            </a:r>
+          </a:p>
+        </p:txBody>
+      </p:sp>
+      <p:sp>
+        <p:nvSpPr>
+          <p:cNvPr id="14" name="TextBox 13"/>
+          <p:cNvSpPr txBox="1"/>
+          <p:nvPr/>
+        </p:nvSpPr>
+        <p:spPr>
+          <a:xfrm>
+            <a:off x="868680" y="2980944"/>
+            <a:ext cx="3456432" cy="347472"/>
+          </a:xfrm>
+          <a:prstGeom prst="rect">
+            <a:avLst/>
+          </a:prstGeom>
+          <a:noFill/>
+        </p:spPr>
+        <p:txBody>
+          <a:bodyPr wrap="square" lIns="36576" rIns="36576" tIns="36576" bIns="36576" anchor="t">
+            <a:spAutoFit/>
+          </a:bodyPr>
+          <a:lstStyle/>
+          <a:p>
+            <a:pPr algn="l">
+              <a:spcAft>
+                <a:spcPts val="500"/>
+              </a:spcAft>
+              <a:defRPr sz="1400" b="0">
+                <a:solidFill>
+                  <a:srgbClr val="26313B"/>
+                </a:solidFill>
+                <a:latin typeface="Aptos"/>
+              </a:defRPr>
+            </a:pPr>
+            <a:r>
               <a:t>Logistic: engineered + TF–IDF</a:t>
             </a:r>
           </a:p>
@@ -4558,14 +4765,14 @@
       </p:sp>
       <p:sp>
         <p:nvSpPr>
-          <p:cNvPr id="10" name="Rectangle 9"/>
+          <p:cNvPr id="15" name="Rectangle 14"/>
           <p:cNvSpPr/>
           <p:nvPr/>
         </p:nvSpPr>
         <p:spPr>
           <a:xfrm>
-            <a:off x="4343400" y="2039112"/>
-            <a:ext cx="3418555" cy="310896"/>
+            <a:off x="4434840" y="3017520"/>
+            <a:ext cx="3172110" cy="310896"/>
           </a:xfrm>
           <a:prstGeom prst="rect">
             <a:avLst/>
@@ -4603,13 +4810,13 @@
       </p:sp>
       <p:sp>
         <p:nvSpPr>
-          <p:cNvPr id="11" name="TextBox 10"/>
-          <p:cNvSpPr txBox="1"/>
-          <p:nvPr/>
-        </p:nvSpPr>
-        <p:spPr>
-          <a:xfrm>
-            <a:off x="7844251" y="2011679"/>
+          <p:cNvPr id="16" name="TextBox 15"/>
+          <p:cNvSpPr txBox="1"/>
+          <p:nvPr/>
+        </p:nvSpPr>
+        <p:spPr>
+          <a:xfrm>
+            <a:off x="7689246" y="2990087"/>
             <a:ext cx="566928" cy="320040"/>
           </a:xfrm>
           <a:prstGeom prst="rect">
@@ -4635,21 +4842,21 @@
               </a:defRPr>
             </a:pPr>
             <a:r>
-              <a:t>0.5225</a:t>
-            </a:r>
-          </a:p>
-        </p:txBody>
-      </p:sp>
-      <p:sp>
-        <p:nvSpPr>
-          <p:cNvPr id="12" name="TextBox 11"/>
-          <p:cNvSpPr txBox="1"/>
-          <p:nvPr/>
-        </p:nvSpPr>
-        <p:spPr>
-          <a:xfrm>
-            <a:off x="960120" y="2670048"/>
-            <a:ext cx="3273552" cy="347472"/>
+              <a:t>0.3265</a:t>
+            </a:r>
+          </a:p>
+        </p:txBody>
+      </p:sp>
+      <p:sp>
+        <p:nvSpPr>
+          <p:cNvPr id="17" name="TextBox 16"/>
+          <p:cNvSpPr txBox="1"/>
+          <p:nvPr/>
+        </p:nvSpPr>
+        <p:spPr>
+          <a:xfrm>
+            <a:off x="868680" y="3547872"/>
+            <a:ext cx="3456432" cy="347472"/>
           </a:xfrm>
           <a:prstGeom prst="rect">
             <a:avLst/>
@@ -4674,144 +4881,21 @@
               </a:defRPr>
             </a:pPr>
             <a:r>
-              <a:t>Linear SVM: engineered + TF–IDF</a:t>
-            </a:r>
-          </a:p>
-        </p:txBody>
-      </p:sp>
-      <p:sp>
-        <p:nvSpPr>
-          <p:cNvPr id="13" name="Rectangle 12"/>
+              <a:t>Fixed engineered heuristic</a:t>
+            </a:r>
+          </a:p>
+        </p:txBody>
+      </p:sp>
+      <p:sp>
+        <p:nvSpPr>
+          <p:cNvPr id="18" name="Rectangle 17"/>
           <p:cNvSpPr/>
           <p:nvPr/>
         </p:nvSpPr>
         <p:spPr>
           <a:xfrm>
-            <a:off x="4343400" y="2706624"/>
-            <a:ext cx="3342660" cy="310896"/>
-          </a:xfrm>
-          <a:prstGeom prst="rect">
-            <a:avLst/>
-          </a:prstGeom>
-          <a:solidFill>
-            <a:srgbClr val="1C8585"/>
-          </a:solidFill>
-          <a:ln>
-            <a:solidFill>
-              <a:srgbClr val="1C8585"/>
-            </a:solidFill>
-          </a:ln>
-        </p:spPr>
-        <p:style>
-          <a:lnRef idx="1">
-            <a:schemeClr val="accent1"/>
-          </a:lnRef>
-          <a:fillRef idx="3">
-            <a:schemeClr val="accent1"/>
-          </a:fillRef>
-          <a:effectRef idx="2">
-            <a:schemeClr val="accent1"/>
-          </a:effectRef>
-          <a:fontRef idx="minor">
-            <a:schemeClr val="lt1"/>
-          </a:fontRef>
-        </p:style>
-        <p:txBody>
-          <a:bodyPr rtlCol="0" anchor="ctr"/>
-          <a:lstStyle/>
-          <a:p>
-            <a:pPr algn="ctr"/>
-          </a:p>
-        </p:txBody>
-      </p:sp>
-      <p:sp>
-        <p:nvSpPr>
-          <p:cNvPr id="14" name="TextBox 13"/>
-          <p:cNvSpPr txBox="1"/>
-          <p:nvPr/>
-        </p:nvSpPr>
-        <p:spPr>
-          <a:xfrm>
-            <a:off x="7768356" y="2679191"/>
-            <a:ext cx="566928" cy="320040"/>
-          </a:xfrm>
-          <a:prstGeom prst="rect">
-            <a:avLst/>
-          </a:prstGeom>
-          <a:noFill/>
-        </p:spPr>
-        <p:txBody>
-          <a:bodyPr wrap="square" lIns="36576" rIns="36576" tIns="36576" bIns="36576" anchor="t">
-            <a:spAutoFit/>
-          </a:bodyPr>
-          <a:lstStyle/>
-          <a:p>
-            <a:pPr algn="l">
-              <a:spcAft>
-                <a:spcPts val="500"/>
-              </a:spcAft>
-              <a:defRPr sz="1200" b="1">
-                <a:solidFill>
-                  <a:srgbClr val="26313B"/>
-                </a:solidFill>
-                <a:latin typeface="Aptos"/>
-              </a:defRPr>
-            </a:pPr>
-            <a:r>
-              <a:t>0.5109</a:t>
-            </a:r>
-          </a:p>
-        </p:txBody>
-      </p:sp>
-      <p:sp>
-        <p:nvSpPr>
-          <p:cNvPr id="15" name="TextBox 14"/>
-          <p:cNvSpPr txBox="1"/>
-          <p:nvPr/>
-        </p:nvSpPr>
-        <p:spPr>
-          <a:xfrm>
-            <a:off x="960120" y="3337560"/>
-            <a:ext cx="3273552" cy="347472"/>
-          </a:xfrm>
-          <a:prstGeom prst="rect">
-            <a:avLst/>
-          </a:prstGeom>
-          <a:noFill/>
-        </p:spPr>
-        <p:txBody>
-          <a:bodyPr wrap="square" lIns="36576" rIns="36576" tIns="36576" bIns="36576" anchor="t">
-            <a:spAutoFit/>
-          </a:bodyPr>
-          <a:lstStyle/>
-          <a:p>
-            <a:pPr algn="l">
-              <a:spcAft>
-                <a:spcPts val="500"/>
-              </a:spcAft>
-              <a:defRPr sz="1400" b="0">
-                <a:solidFill>
-                  <a:srgbClr val="26313B"/>
-                </a:solidFill>
-                <a:latin typeface="Aptos"/>
-              </a:defRPr>
-            </a:pPr>
-            <a:r>
-              <a:t>Fixed engineered heuristic</a:t>
-            </a:r>
-          </a:p>
-        </p:txBody>
-      </p:sp>
-      <p:sp>
-        <p:nvSpPr>
-          <p:cNvPr id="16" name="Rectangle 15"/>
-          <p:cNvSpPr/>
-          <p:nvPr/>
-        </p:nvSpPr>
-        <p:spPr>
-          <a:xfrm>
-            <a:off x="4343400" y="3374136"/>
-            <a:ext cx="686328" cy="310896"/>
+            <a:off x="4434840" y="3584448"/>
+            <a:ext cx="848163" cy="310896"/>
           </a:xfrm>
           <a:prstGeom prst="rect">
             <a:avLst/>
@@ -4849,13 +4933,13 @@
       </p:sp>
       <p:sp>
         <p:nvSpPr>
-          <p:cNvPr id="17" name="TextBox 16"/>
-          <p:cNvSpPr txBox="1"/>
-          <p:nvPr/>
-        </p:nvSpPr>
-        <p:spPr>
-          <a:xfrm>
-            <a:off x="5112024" y="3346703"/>
+          <p:cNvPr id="19" name="TextBox 18"/>
+          <p:cNvSpPr txBox="1"/>
+          <p:nvPr/>
+        </p:nvSpPr>
+        <p:spPr>
+          <a:xfrm>
+            <a:off x="5365299" y="3557015"/>
             <a:ext cx="566928" cy="320040"/>
           </a:xfrm>
           <a:prstGeom prst="rect">
@@ -4881,21 +4965,21 @@
               </a:defRPr>
             </a:pPr>
             <a:r>
-              <a:t>0.1049</a:t>
-            </a:r>
-          </a:p>
-        </p:txBody>
-      </p:sp>
-      <p:sp>
-        <p:nvSpPr>
-          <p:cNvPr id="18" name="TextBox 17"/>
-          <p:cNvSpPr txBox="1"/>
-          <p:nvPr/>
-        </p:nvSpPr>
-        <p:spPr>
-          <a:xfrm>
-            <a:off x="960120" y="4005072"/>
-            <a:ext cx="3273552" cy="347472"/>
+              <a:t>0.0873</a:t>
+            </a:r>
+          </a:p>
+        </p:txBody>
+      </p:sp>
+      <p:sp>
+        <p:nvSpPr>
+          <p:cNvPr id="20" name="TextBox 19"/>
+          <p:cNvSpPr txBox="1"/>
+          <p:nvPr/>
+        </p:nvSpPr>
+        <p:spPr>
+          <a:xfrm>
+            <a:off x="868680" y="4114800"/>
+            <a:ext cx="3456432" cy="347472"/>
           </a:xfrm>
           <a:prstGeom prst="rect">
             <a:avLst/>
@@ -4927,14 +5011,14 @@
       </p:sp>
       <p:sp>
         <p:nvSpPr>
-          <p:cNvPr id="19" name="Rectangle 18"/>
+          <p:cNvPr id="21" name="Rectangle 20"/>
           <p:cNvSpPr/>
           <p:nvPr/>
         </p:nvSpPr>
         <p:spPr>
           <a:xfrm>
-            <a:off x="4343400" y="4041648"/>
-            <a:ext cx="429854" cy="310896"/>
+            <a:off x="4434840" y="4151376"/>
+            <a:ext cx="641223" cy="310896"/>
           </a:xfrm>
           <a:prstGeom prst="rect">
             <a:avLst/>
@@ -4972,13 +5056,13 @@
       </p:sp>
       <p:sp>
         <p:nvSpPr>
-          <p:cNvPr id="20" name="TextBox 19"/>
-          <p:cNvSpPr txBox="1"/>
-          <p:nvPr/>
-        </p:nvSpPr>
-        <p:spPr>
-          <a:xfrm>
-            <a:off x="4855550" y="4014215"/>
+          <p:cNvPr id="22" name="TextBox 21"/>
+          <p:cNvSpPr txBox="1"/>
+          <p:nvPr/>
+        </p:nvSpPr>
+        <p:spPr>
+          <a:xfrm>
+            <a:off x="5158358" y="4123944"/>
             <a:ext cx="566928" cy="320040"/>
           </a:xfrm>
           <a:prstGeom prst="rect">
@@ -5004,14 +5088,14 @@
               </a:defRPr>
             </a:pPr>
             <a:r>
-              <a:t>0.0657</a:t>
-            </a:r>
-          </a:p>
-        </p:txBody>
-      </p:sp>
-      <p:sp>
-        <p:nvSpPr>
-          <p:cNvPr id="21" name="Rounded Rectangle 20"/>
+              <a:t>0.0660</a:t>
+            </a:r>
+          </a:p>
+        </p:txBody>
+      </p:sp>
+      <p:sp>
+        <p:nvSpPr>
+          <p:cNvPr id="23" name="Rounded Rectangle 22"/>
           <p:cNvSpPr/>
           <p:nvPr/>
         </p:nvSpPr>
@@ -5056,7 +5140,7 @@
       </p:sp>
       <p:sp>
         <p:nvSpPr>
-          <p:cNvPr id="22" name="TextBox 21"/>
+          <p:cNvPr id="24" name="TextBox 23"/>
           <p:cNvSpPr txBox="1"/>
           <p:nvPr/>
         </p:nvSpPr>
@@ -5095,14 +5179,14 @@
       </p:sp>
       <p:sp>
         <p:nvSpPr>
-          <p:cNvPr id="23" name="TextBox 22"/>
-          <p:cNvSpPr txBox="1"/>
-          <p:nvPr/>
-        </p:nvSpPr>
-        <p:spPr>
-          <a:xfrm>
-            <a:off x="9144000" y="2697480"/>
-            <a:ext cx="1965960" cy="1325880"/>
+          <p:cNvPr id="25" name="TextBox 24"/>
+          <p:cNvSpPr txBox="1"/>
+          <p:nvPr/>
+        </p:nvSpPr>
+        <p:spPr>
+          <a:xfrm>
+            <a:off x="9144000" y="2596896"/>
+            <a:ext cx="1965960" cy="1417320"/>
           </a:xfrm>
           <a:prstGeom prst="rect">
             <a:avLst/>
@@ -5119,7 +5203,7 @@
               <a:spcAft>
                 <a:spcPts val="500"/>
               </a:spcAft>
-              <a:defRPr sz="1700" b="1">
+              <a:defRPr sz="1600" b="1">
                 <a:solidFill>
                   <a:srgbClr val="183452"/>
                 </a:solidFill>
@@ -5127,21 +5211,21 @@
               </a:defRPr>
             </a:pPr>
             <a:r>
-              <a:t>Word-level patterns plus engineered features ranked positives above simple rules.</a:t>
-            </a:r>
-          </a:p>
-        </p:txBody>
-      </p:sp>
-      <p:sp>
-        <p:nvSpPr>
-          <p:cNvPr id="24" name="TextBox 23"/>
-          <p:cNvSpPr txBox="1"/>
-          <p:nvPr/>
-        </p:nvSpPr>
-        <p:spPr>
-          <a:xfrm>
-            <a:off x="1005840" y="5257800"/>
-            <a:ext cx="10149840" cy="530352"/>
+              <a:t>Lexical plus engineered features lead this matched cohort; thresholds trade precision for recall.</a:t>
+            </a:r>
+          </a:p>
+        </p:txBody>
+      </p:sp>
+      <p:sp>
+        <p:nvSpPr>
+          <p:cNvPr id="26" name="TextBox 25"/>
+          <p:cNvSpPr txBox="1"/>
+          <p:nvPr/>
+        </p:nvSpPr>
+        <p:spPr>
+          <a:xfrm>
+            <a:off x="1005840" y="5193792"/>
+            <a:ext cx="10149840" cy="640080"/>
           </a:xfrm>
           <a:prstGeom prst="rect">
             <a:avLst/>
@@ -5158,7 +5242,7 @@
               <a:spcAft>
                 <a:spcPts val="500"/>
               </a:spcAft>
-              <a:defRPr sz="1700" b="1">
+              <a:defRPr sz="1500" b="1">
                 <a:solidFill>
                   <a:srgbClr val="A6413E"/>
                 </a:solidFill>
@@ -5166,14 +5250,14 @@
               </a:defRPr>
             </a:pPr>
             <a:r>
-              <a:t>This is not directly comparable with the transformer or Qwen cohorts: labels and eligibility differ.</a:t>
-            </a:r>
-          </a:p>
-        </p:txBody>
-      </p:sp>
-      <p:sp>
-        <p:nvSpPr>
-          <p:cNvPr id="25" name="TextBox 24"/>
+              <a:t>Logistic recall is 0.706 at precision 0.190; SVM recall is 0.313 at precision 0.455. TCP and DNS are included, so this is not untouched holdout evidence.</a:t>
+            </a:r>
+          </a:p>
+        </p:txBody>
+      </p:sp>
+      <p:sp>
+        <p:nvSpPr>
+          <p:cNvPr id="27" name="TextBox 26"/>
           <p:cNvSpPr txBox="1"/>
           <p:nvPr/>
         </p:nvSpPr>
@@ -5212,7 +5296,7 @@
       </p:sp>
       <p:sp>
         <p:nvSpPr>
-          <p:cNvPr id="26" name="TextBox 25"/>
+          <p:cNvPr id="28" name="TextBox 27"/>
           <p:cNvSpPr txBox="1"/>
           <p:nvPr/>
         </p:nvSpPr>
@@ -5396,45 +5480,6 @@
         </p:nvSpPr>
         <p:spPr>
           <a:xfrm>
-            <a:off x="10744200" y="6492240"/>
-            <a:ext cx="777240" cy="201168"/>
-          </a:xfrm>
-          <a:prstGeom prst="rect">
-            <a:avLst/>
-          </a:prstGeom>
-          <a:noFill/>
-        </p:spPr>
-        <p:txBody>
-          <a:bodyPr wrap="square" lIns="36576" rIns="36576" tIns="36576" bIns="36576" anchor="t">
-            <a:spAutoFit/>
-          </a:bodyPr>
-          <a:lstStyle/>
-          <a:p>
-            <a:pPr algn="r">
-              <a:spcAft>
-                <a:spcPts val="500"/>
-              </a:spcAft>
-              <a:defRPr sz="900" b="0">
-                <a:solidFill>
-                  <a:srgbClr val="5B6974"/>
-                </a:solidFill>
-                <a:latin typeface="Aptos"/>
-              </a:defRPr>
-            </a:pPr>
-            <a:r>
-              <a:t>11  |  18</a:t>
-            </a:r>
-          </a:p>
-        </p:txBody>
-      </p:sp>
-      <p:sp>
-        <p:nvSpPr>
-          <p:cNvPr id="6" name="TextBox 5"/>
-          <p:cNvSpPr txBox="1"/>
-          <p:nvPr/>
-        </p:nvSpPr>
-        <p:spPr>
-          <a:xfrm>
             <a:off x="868680" y="1170432"/>
             <a:ext cx="10332720" cy="347472"/>
           </a:xfrm>
@@ -5468,7 +5513,7 @@
       </p:sp>
       <p:cxnSp>
         <p:nvCxnSpPr>
-          <p:cNvPr id="7" name="Connector 6"/>
+          <p:cNvPr id="6" name="Connector 5"/>
           <p:cNvCxnSpPr/>
           <p:nvPr/>
         </p:nvCxnSpPr>
@@ -5503,7 +5548,7 @@
       </p:cxnSp>
       <p:sp>
         <p:nvSpPr>
-          <p:cNvPr id="8" name="TextBox 7"/>
+          <p:cNvPr id="7" name="TextBox 6"/>
           <p:cNvSpPr txBox="1"/>
           <p:nvPr/>
         </p:nvSpPr>
@@ -5542,7 +5587,7 @@
       </p:sp>
       <p:sp>
         <p:nvSpPr>
-          <p:cNvPr id="9" name="TextBox 8"/>
+          <p:cNvPr id="8" name="TextBox 7"/>
           <p:cNvSpPr txBox="1"/>
           <p:nvPr/>
         </p:nvSpPr>
@@ -5581,7 +5626,7 @@
       </p:sp>
       <p:sp>
         <p:nvSpPr>
-          <p:cNvPr id="10" name="Rectangle 9"/>
+          <p:cNvPr id="9" name="Rectangle 8"/>
           <p:cNvSpPr/>
           <p:nvPr/>
         </p:nvSpPr>
@@ -5626,7 +5671,7 @@
       </p:sp>
       <p:sp>
         <p:nvSpPr>
-          <p:cNvPr id="11" name="TextBox 10"/>
+          <p:cNvPr id="10" name="TextBox 9"/>
           <p:cNvSpPr txBox="1"/>
           <p:nvPr/>
         </p:nvSpPr>
@@ -5665,7 +5710,7 @@
       </p:sp>
       <p:sp>
         <p:nvSpPr>
-          <p:cNvPr id="12" name="TextBox 11"/>
+          <p:cNvPr id="11" name="TextBox 10"/>
           <p:cNvSpPr txBox="1"/>
           <p:nvPr/>
         </p:nvSpPr>
@@ -5704,7 +5749,7 @@
       </p:sp>
       <p:sp>
         <p:nvSpPr>
-          <p:cNvPr id="13" name="Rectangle 12"/>
+          <p:cNvPr id="12" name="Rectangle 11"/>
           <p:cNvSpPr/>
           <p:nvPr/>
         </p:nvSpPr>
@@ -5749,7 +5794,7 @@
       </p:sp>
       <p:sp>
         <p:nvSpPr>
-          <p:cNvPr id="14" name="TextBox 13"/>
+          <p:cNvPr id="13" name="TextBox 12"/>
           <p:cNvSpPr txBox="1"/>
           <p:nvPr/>
         </p:nvSpPr>
@@ -5788,7 +5833,7 @@
       </p:sp>
       <p:sp>
         <p:nvSpPr>
-          <p:cNvPr id="15" name="TextBox 14"/>
+          <p:cNvPr id="14" name="TextBox 13"/>
           <p:cNvSpPr txBox="1"/>
           <p:nvPr/>
         </p:nvSpPr>
@@ -5827,7 +5872,7 @@
       </p:sp>
       <p:sp>
         <p:nvSpPr>
-          <p:cNvPr id="16" name="Rectangle 15"/>
+          <p:cNvPr id="15" name="Rectangle 14"/>
           <p:cNvSpPr/>
           <p:nvPr/>
         </p:nvSpPr>
@@ -5872,7 +5917,7 @@
       </p:sp>
       <p:sp>
         <p:nvSpPr>
-          <p:cNvPr id="17" name="TextBox 16"/>
+          <p:cNvPr id="16" name="TextBox 15"/>
           <p:cNvSpPr txBox="1"/>
           <p:nvPr/>
         </p:nvSpPr>
@@ -5911,7 +5956,7 @@
       </p:sp>
       <p:sp>
         <p:nvSpPr>
-          <p:cNvPr id="18" name="TextBox 17"/>
+          <p:cNvPr id="17" name="TextBox 16"/>
           <p:cNvSpPr txBox="1"/>
           <p:nvPr/>
         </p:nvSpPr>
@@ -5950,7 +5995,7 @@
       </p:sp>
       <p:sp>
         <p:nvSpPr>
-          <p:cNvPr id="19" name="Rectangle 18"/>
+          <p:cNvPr id="18" name="Rectangle 17"/>
           <p:cNvSpPr/>
           <p:nvPr/>
         </p:nvSpPr>
@@ -5995,7 +6040,7 @@
       </p:sp>
       <p:sp>
         <p:nvSpPr>
-          <p:cNvPr id="20" name="TextBox 19"/>
+          <p:cNvPr id="19" name="TextBox 18"/>
           <p:cNvSpPr txBox="1"/>
           <p:nvPr/>
         </p:nvSpPr>
@@ -6034,7 +6079,7 @@
       </p:sp>
       <p:sp>
         <p:nvSpPr>
-          <p:cNvPr id="21" name="Rounded Rectangle 20"/>
+          <p:cNvPr id="20" name="Rounded Rectangle 19"/>
           <p:cNvSpPr/>
           <p:nvPr/>
         </p:nvSpPr>
@@ -6079,7 +6124,7 @@
       </p:sp>
       <p:sp>
         <p:nvSpPr>
-          <p:cNvPr id="22" name="TextBox 21"/>
+          <p:cNvPr id="21" name="TextBox 20"/>
           <p:cNvSpPr txBox="1"/>
           <p:nvPr/>
         </p:nvSpPr>
@@ -6118,7 +6163,7 @@
       </p:sp>
       <p:sp>
         <p:nvSpPr>
-          <p:cNvPr id="23" name="TextBox 22"/>
+          <p:cNvPr id="22" name="TextBox 21"/>
           <p:cNvSpPr txBox="1"/>
           <p:nvPr/>
         </p:nvSpPr>
@@ -6157,7 +6202,7 @@
       </p:sp>
       <p:sp>
         <p:nvSpPr>
-          <p:cNvPr id="24" name="TextBox 23"/>
+          <p:cNvPr id="23" name="TextBox 22"/>
           <p:cNvSpPr txBox="1"/>
           <p:nvPr/>
         </p:nvSpPr>
@@ -6196,7 +6241,7 @@
       </p:sp>
       <p:sp>
         <p:nvSpPr>
-          <p:cNvPr id="25" name="TextBox 24"/>
+          <p:cNvPr id="24" name="TextBox 23"/>
           <p:cNvSpPr txBox="1"/>
           <p:nvPr/>
         </p:nvSpPr>
@@ -6235,7 +6280,7 @@
       </p:sp>
       <p:sp>
         <p:nvSpPr>
-          <p:cNvPr id="26" name="TextBox 25"/>
+          <p:cNvPr id="25" name="TextBox 24"/>
           <p:cNvSpPr txBox="1"/>
           <p:nvPr/>
         </p:nvSpPr>
@@ -6274,7 +6319,7 @@
       </p:sp>
       <p:sp>
         <p:nvSpPr>
-          <p:cNvPr id="27" name="TextBox 26"/>
+          <p:cNvPr id="26" name="TextBox 25"/>
           <p:cNvSpPr txBox="1"/>
           <p:nvPr/>
         </p:nvSpPr>
@@ -6371,7 +6416,7 @@
               </a:defRPr>
             </a:pPr>
             <a:r>
-              <a:t>The three-model hybrid adds only a small AP increment</a:t>
+              <a:t>Revision history did not improve ranking AP in the matched rerun</a:t>
             </a:r>
           </a:p>
         </p:txBody>
@@ -6445,7 +6490,7 @@
               </a:defRPr>
             </a:pPr>
             <a:r>
-              <a:t>RESULTS · HYBRID</a:t>
+              <a:t>RESULTS · REVISION ABLATION</a:t>
             </a:r>
           </a:p>
         </p:txBody>
@@ -6458,47 +6503,121 @@
         </p:nvSpPr>
         <p:spPr>
           <a:xfrm>
-            <a:off x="10744200" y="6492240"/>
-            <a:ext cx="777240" cy="201168"/>
-          </a:xfrm>
-          <a:prstGeom prst="rect">
-            <a:avLst/>
-          </a:prstGeom>
-          <a:noFill/>
-        </p:spPr>
-        <p:txBody>
-          <a:bodyPr wrap="square" lIns="36576" rIns="36576" tIns="36576" bIns="36576" anchor="t">
-            <a:spAutoFit/>
-          </a:bodyPr>
-          <a:lstStyle/>
-          <a:p>
-            <a:pPr algn="r">
+            <a:off x="868680" y="1124712"/>
+            <a:ext cx="10515600" cy="438912"/>
+          </a:xfrm>
+          <a:prstGeom prst="rect">
+            <a:avLst/>
+          </a:prstGeom>
+          <a:noFill/>
+        </p:spPr>
+        <p:txBody>
+          <a:bodyPr wrap="square" lIns="36576" rIns="36576" tIns="36576" bIns="36576" anchor="t">
+            <a:spAutoFit/>
+          </a:bodyPr>
+          <a:lstStyle/>
+          <a:p>
+            <a:pPr algn="l">
+              <a:spcAft>
+                <a:spcPts val="500"/>
+              </a:spcAft>
+              <a:defRPr sz="1400" b="1">
+                <a:solidFill>
+                  <a:srgbClr val="5B6974"/>
+                </a:solidFill>
+                <a:latin typeface="Aptos"/>
+              </a:defRPr>
+            </a:pPr>
+            <a:r>
+              <a:t>Same 2,425 rows, grouped folds, engineered features, TF–IDF, and classifier settings; only 12 past-only revision features change</a:t>
+            </a:r>
+          </a:p>
+        </p:txBody>
+      </p:sp>
+      <p:cxnSp>
+        <p:nvCxnSpPr>
+          <p:cNvPr id="6" name="Connector 5"/>
+          <p:cNvCxnSpPr/>
+          <p:nvPr/>
+        </p:nvCxnSpPr>
+        <p:spPr>
+          <a:xfrm>
+            <a:off x="4252645" y="1746504"/>
+            <a:ext cx="0" cy="2980944"/>
+          </a:xfrm>
+          <a:prstGeom prst="line">
+            <a:avLst/>
+          </a:prstGeom>
+          <a:ln w="15240">
+            <a:solidFill>
+              <a:srgbClr val="A6413E"/>
+            </a:solidFill>
+          </a:ln>
+        </p:spPr>
+        <p:style>
+          <a:lnRef idx="2">
+            <a:schemeClr val="accent1"/>
+          </a:lnRef>
+          <a:fillRef idx="0">
+            <a:schemeClr val="accent1"/>
+          </a:fillRef>
+          <a:effectRef idx="1">
+            <a:schemeClr val="accent1"/>
+          </a:effectRef>
+          <a:fontRef idx="minor">
+            <a:schemeClr val="tx1"/>
+          </a:fontRef>
+        </p:style>
+      </p:cxnSp>
+      <p:sp>
+        <p:nvSpPr>
+          <p:cNvPr id="7" name="TextBox 6"/>
+          <p:cNvSpPr txBox="1"/>
+          <p:nvPr/>
+        </p:nvSpPr>
+        <p:spPr>
+          <a:xfrm>
+            <a:off x="4289221" y="1536192"/>
+            <a:ext cx="1005840" cy="201168"/>
+          </a:xfrm>
+          <a:prstGeom prst="rect">
+            <a:avLst/>
+          </a:prstGeom>
+          <a:noFill/>
+        </p:spPr>
+        <p:txBody>
+          <a:bodyPr wrap="square" lIns="36576" rIns="36576" tIns="36576" bIns="36576" anchor="t">
+            <a:spAutoFit/>
+          </a:bodyPr>
+          <a:lstStyle/>
+          <a:p>
+            <a:pPr algn="l">
               <a:spcAft>
                 <a:spcPts val="500"/>
               </a:spcAft>
               <a:defRPr sz="900" b="0">
                 <a:solidFill>
-                  <a:srgbClr val="5B6974"/>
-                </a:solidFill>
-                <a:latin typeface="Aptos"/>
-              </a:defRPr>
-            </a:pPr>
-            <a:r>
-              <a:t>12  |  18</a:t>
-            </a:r>
-          </a:p>
-        </p:txBody>
-      </p:sp>
-      <p:sp>
-        <p:nvSpPr>
-          <p:cNvPr id="6" name="TextBox 5"/>
-          <p:cNvSpPr txBox="1"/>
-          <p:nvPr/>
-        </p:nvSpPr>
-        <p:spPr>
-          <a:xfrm>
-            <a:off x="868680" y="1143000"/>
-            <a:ext cx="10515600" cy="438912"/>
+                  <a:srgbClr val="A6413E"/>
+                </a:solidFill>
+                <a:latin typeface="Aptos"/>
+              </a:defRPr>
+            </a:pPr>
+            <a:r>
+              <a:t>base 0.066</a:t>
+            </a:r>
+          </a:p>
+        </p:txBody>
+      </p:sp>
+      <p:sp>
+        <p:nvSpPr>
+          <p:cNvPr id="8" name="TextBox 7"/>
+          <p:cNvSpPr txBox="1"/>
+          <p:nvPr/>
+        </p:nvSpPr>
+        <p:spPr>
+          <a:xfrm>
+            <a:off x="822960" y="1819656"/>
+            <a:ext cx="2633472" cy="347472"/>
           </a:xfrm>
           <a:prstGeom prst="rect">
             <a:avLst/>
@@ -6515,45 +6634,6 @@
               <a:spcAft>
                 <a:spcPts val="500"/>
               </a:spcAft>
-              <a:defRPr sz="1500" b="1">
-                <a:solidFill>
-                  <a:srgbClr val="5B6974"/>
-                </a:solidFill>
-                <a:latin typeface="Aptos"/>
-              </a:defRPr>
-            </a:pPr>
-            <a:r>
-              <a:t>Label-compatible subset: 2,097 clauses  ·  116 positives  ·  equal-weight average of within-cohort percentile ranks</a:t>
-            </a:r>
-          </a:p>
-        </p:txBody>
-      </p:sp>
-      <p:sp>
-        <p:nvSpPr>
-          <p:cNvPr id="7" name="TextBox 6"/>
-          <p:cNvSpPr txBox="1"/>
-          <p:nvPr/>
-        </p:nvSpPr>
-        <p:spPr>
-          <a:xfrm>
-            <a:off x="868680" y="1865376"/>
-            <a:ext cx="2542032" cy="347472"/>
-          </a:xfrm>
-          <a:prstGeom prst="rect">
-            <a:avLst/>
-          </a:prstGeom>
-          <a:noFill/>
-        </p:spPr>
-        <p:txBody>
-          <a:bodyPr wrap="square" lIns="36576" rIns="36576" tIns="36576" bIns="36576" anchor="t">
-            <a:spAutoFit/>
-          </a:bodyPr>
-          <a:lstStyle/>
-          <a:p>
-            <a:pPr algn="l">
-              <a:spcAft>
-                <a:spcPts val="500"/>
-              </a:spcAft>
               <a:defRPr sz="1400" b="0">
                 <a:solidFill>
                   <a:srgbClr val="26313B"/>
@@ -6562,21 +6642,21 @@
               </a:defRPr>
             </a:pPr>
             <a:r>
-              <a:t>ML logistic regression</a:t>
-            </a:r>
-          </a:p>
-        </p:txBody>
-      </p:sp>
-      <p:sp>
-        <p:nvSpPr>
-          <p:cNvPr id="8" name="Rectangle 7"/>
+              <a:t>Logistic baseline</a:t>
+            </a:r>
+          </a:p>
+        </p:txBody>
+      </p:sp>
+      <p:sp>
+        <p:nvSpPr>
+          <p:cNvPr id="9" name="Rectangle 8"/>
           <p:cNvSpPr/>
           <p:nvPr/>
         </p:nvSpPr>
         <p:spPr>
           <a:xfrm>
-            <a:off x="3520439" y="1901952"/>
-            <a:ext cx="3427524" cy="310896"/>
+            <a:off x="3566160" y="1856231"/>
+            <a:ext cx="3396024" cy="310896"/>
           </a:xfrm>
           <a:prstGeom prst="rect">
             <a:avLst/>
@@ -6614,13 +6694,13 @@
       </p:sp>
       <p:sp>
         <p:nvSpPr>
-          <p:cNvPr id="9" name="TextBox 8"/>
-          <p:cNvSpPr txBox="1"/>
-          <p:nvPr/>
-        </p:nvSpPr>
-        <p:spPr>
-          <a:xfrm>
-            <a:off x="7030260" y="1874519"/>
+          <p:cNvPr id="10" name="TextBox 9"/>
+          <p:cNvSpPr txBox="1"/>
+          <p:nvPr/>
+        </p:nvSpPr>
+        <p:spPr>
+          <a:xfrm>
+            <a:off x="7044480" y="1828800"/>
             <a:ext cx="566928" cy="320040"/>
           </a:xfrm>
           <a:prstGeom prst="rect">
@@ -6646,21 +6726,21 @@
               </a:defRPr>
             </a:pPr>
             <a:r>
-              <a:t>0.4567</a:t>
-            </a:r>
-          </a:p>
-        </p:txBody>
-      </p:sp>
-      <p:sp>
-        <p:nvSpPr>
-          <p:cNvPr id="10" name="TextBox 9"/>
-          <p:cNvSpPr txBox="1"/>
-          <p:nvPr/>
-        </p:nvSpPr>
-        <p:spPr>
-          <a:xfrm>
-            <a:off x="868680" y="2404872"/>
-            <a:ext cx="2542032" cy="347472"/>
+              <a:t>0.3265</a:t>
+            </a:r>
+          </a:p>
+        </p:txBody>
+      </p:sp>
+      <p:sp>
+        <p:nvSpPr>
+          <p:cNvPr id="11" name="TextBox 10"/>
+          <p:cNvSpPr txBox="1"/>
+          <p:nvPr/>
+        </p:nvSpPr>
+        <p:spPr>
+          <a:xfrm>
+            <a:off x="822960" y="2322576"/>
+            <a:ext cx="2633472" cy="347472"/>
           </a:xfrm>
           <a:prstGeom prst="rect">
             <a:avLst/>
@@ -6685,31 +6765,31 @@
               </a:defRPr>
             </a:pPr>
             <a:r>
-              <a:t>V4 semantic ensemble</a:t>
-            </a:r>
-          </a:p>
-        </p:txBody>
-      </p:sp>
-      <p:sp>
-        <p:nvSpPr>
-          <p:cNvPr id="11" name="Rectangle 10"/>
+              <a:t>Logistic + revision</a:t>
+            </a:r>
+          </a:p>
+        </p:txBody>
+      </p:sp>
+      <p:sp>
+        <p:nvSpPr>
+          <p:cNvPr id="12" name="Rectangle 11"/>
           <p:cNvSpPr/>
           <p:nvPr/>
         </p:nvSpPr>
         <p:spPr>
           <a:xfrm>
-            <a:off x="3520439" y="2441448"/>
-            <a:ext cx="2531430" cy="310896"/>
+            <a:off x="3566160" y="2359152"/>
+            <a:ext cx="3312814" cy="310896"/>
           </a:xfrm>
           <a:prstGeom prst="rect">
             <a:avLst/>
           </a:prstGeom>
           <a:solidFill>
-            <a:srgbClr val="DA8B35"/>
+            <a:srgbClr val="7EA9CF"/>
           </a:solidFill>
           <a:ln>
             <a:solidFill>
-              <a:srgbClr val="DA8B35"/>
+              <a:srgbClr val="7EA9CF"/>
             </a:solidFill>
           </a:ln>
         </p:spPr>
@@ -6737,13 +6817,13 @@
       </p:sp>
       <p:sp>
         <p:nvSpPr>
-          <p:cNvPr id="12" name="TextBox 11"/>
-          <p:cNvSpPr txBox="1"/>
-          <p:nvPr/>
-        </p:nvSpPr>
-        <p:spPr>
-          <a:xfrm>
-            <a:off x="6134166" y="2414015"/>
+          <p:cNvPr id="13" name="TextBox 12"/>
+          <p:cNvSpPr txBox="1"/>
+          <p:nvPr/>
+        </p:nvSpPr>
+        <p:spPr>
+          <a:xfrm>
+            <a:off x="6961270" y="2331720"/>
             <a:ext cx="566928" cy="320040"/>
           </a:xfrm>
           <a:prstGeom prst="rect">
@@ -6769,21 +6849,21 @@
               </a:defRPr>
             </a:pPr>
             <a:r>
-              <a:t>0.3373</a:t>
-            </a:r>
-          </a:p>
-        </p:txBody>
-      </p:sp>
-      <p:sp>
-        <p:nvSpPr>
-          <p:cNvPr id="13" name="TextBox 12"/>
-          <p:cNvSpPr txBox="1"/>
-          <p:nvPr/>
-        </p:nvSpPr>
-        <p:spPr>
-          <a:xfrm>
-            <a:off x="868680" y="2944368"/>
-            <a:ext cx="2542032" cy="347472"/>
+              <a:t>0.3185</a:t>
+            </a:r>
+          </a:p>
+        </p:txBody>
+      </p:sp>
+      <p:sp>
+        <p:nvSpPr>
+          <p:cNvPr id="14" name="TextBox 13"/>
+          <p:cNvSpPr txBox="1"/>
+          <p:nvPr/>
+        </p:nvSpPr>
+        <p:spPr>
+          <a:xfrm>
+            <a:off x="822960" y="2825496"/>
+            <a:ext cx="2633472" cy="347472"/>
           </a:xfrm>
           <a:prstGeom prst="rect">
             <a:avLst/>
@@ -6808,21 +6888,21 @@
               </a:defRPr>
             </a:pPr>
             <a:r>
-              <a:t>DeBERTa-v3-base pilot</a:t>
-            </a:r>
-          </a:p>
-        </p:txBody>
-      </p:sp>
-      <p:sp>
-        <p:nvSpPr>
-          <p:cNvPr id="14" name="Rectangle 13"/>
+              <a:t>SVM baseline</a:t>
+            </a:r>
+          </a:p>
+        </p:txBody>
+      </p:sp>
+      <p:sp>
+        <p:nvSpPr>
+          <p:cNvPr id="15" name="Rectangle 14"/>
           <p:cNvSpPr/>
           <p:nvPr/>
         </p:nvSpPr>
         <p:spPr>
           <a:xfrm>
-            <a:off x="3520439" y="2980944"/>
-            <a:ext cx="1889003" cy="310896"/>
+            <a:off x="3566160" y="2862072"/>
+            <a:ext cx="3727825" cy="310896"/>
           </a:xfrm>
           <a:prstGeom prst="rect">
             <a:avLst/>
@@ -6860,13 +6940,13 @@
       </p:sp>
       <p:sp>
         <p:nvSpPr>
-          <p:cNvPr id="15" name="TextBox 14"/>
-          <p:cNvSpPr txBox="1"/>
-          <p:nvPr/>
-        </p:nvSpPr>
-        <p:spPr>
-          <a:xfrm>
-            <a:off x="5491739" y="2953511"/>
+          <p:cNvPr id="16" name="TextBox 15"/>
+          <p:cNvSpPr txBox="1"/>
+          <p:nvPr/>
+        </p:nvSpPr>
+        <p:spPr>
+          <a:xfrm>
+            <a:off x="7376281" y="2834639"/>
             <a:ext cx="566928" cy="320040"/>
           </a:xfrm>
           <a:prstGeom prst="rect">
@@ -6892,21 +6972,21 @@
               </a:defRPr>
             </a:pPr>
             <a:r>
-              <a:t>0.2517</a:t>
-            </a:r>
-          </a:p>
-        </p:txBody>
-      </p:sp>
-      <p:sp>
-        <p:nvSpPr>
-          <p:cNvPr id="16" name="TextBox 15"/>
-          <p:cNvSpPr txBox="1"/>
-          <p:nvPr/>
-        </p:nvSpPr>
-        <p:spPr>
-          <a:xfrm>
-            <a:off x="868680" y="3483864"/>
-            <a:ext cx="2542032" cy="347472"/>
+              <a:t>0.3584</a:t>
+            </a:r>
+          </a:p>
+        </p:txBody>
+      </p:sp>
+      <p:sp>
+        <p:nvSpPr>
+          <p:cNvPr id="17" name="TextBox 16"/>
+          <p:cNvSpPr txBox="1"/>
+          <p:nvPr/>
+        </p:nvSpPr>
+        <p:spPr>
+          <a:xfrm>
+            <a:off x="822960" y="3328416"/>
+            <a:ext cx="2633472" cy="347472"/>
           </a:xfrm>
           <a:prstGeom prst="rect">
             <a:avLst/>
@@ -6931,31 +7011,31 @@
               </a:defRPr>
             </a:pPr>
             <a:r>
-              <a:t>V4 + ML</a:t>
-            </a:r>
-          </a:p>
-        </p:txBody>
-      </p:sp>
-      <p:sp>
-        <p:nvSpPr>
-          <p:cNvPr id="17" name="Rectangle 16"/>
+              <a:t>SVM + revision</a:t>
+            </a:r>
+          </a:p>
+        </p:txBody>
+      </p:sp>
+      <p:sp>
+        <p:nvSpPr>
+          <p:cNvPr id="18" name="Rectangle 17"/>
           <p:cNvSpPr/>
           <p:nvPr/>
         </p:nvSpPr>
         <p:spPr>
           <a:xfrm>
-            <a:off x="3520439" y="3520440"/>
-            <a:ext cx="3438782" cy="310896"/>
+            <a:off x="3566160" y="3364992"/>
+            <a:ext cx="3715344" cy="310896"/>
           </a:xfrm>
           <a:prstGeom prst="rect">
             <a:avLst/>
           </a:prstGeom>
           <a:solidFill>
-            <a:srgbClr val="7099BF"/>
+            <a:srgbClr val="76B9B3"/>
           </a:solidFill>
           <a:ln>
             <a:solidFill>
-              <a:srgbClr val="7099BF"/>
+              <a:srgbClr val="76B9B3"/>
             </a:solidFill>
           </a:ln>
         </p:spPr>
@@ -6983,13 +7063,13 @@
       </p:sp>
       <p:sp>
         <p:nvSpPr>
-          <p:cNvPr id="18" name="TextBox 17"/>
-          <p:cNvSpPr txBox="1"/>
-          <p:nvPr/>
-        </p:nvSpPr>
-        <p:spPr>
-          <a:xfrm>
-            <a:off x="7041518" y="3493008"/>
+          <p:cNvPr id="19" name="TextBox 18"/>
+          <p:cNvSpPr txBox="1"/>
+          <p:nvPr/>
+        </p:nvSpPr>
+        <p:spPr>
+          <a:xfrm>
+            <a:off x="7363800" y="3337560"/>
             <a:ext cx="566928" cy="320040"/>
           </a:xfrm>
           <a:prstGeom prst="rect">
@@ -7015,21 +7095,21 @@
               </a:defRPr>
             </a:pPr>
             <a:r>
-              <a:t>0.4582</a:t>
-            </a:r>
-          </a:p>
-        </p:txBody>
-      </p:sp>
-      <p:sp>
-        <p:nvSpPr>
-          <p:cNvPr id="19" name="TextBox 18"/>
-          <p:cNvSpPr txBox="1"/>
-          <p:nvPr/>
-        </p:nvSpPr>
-        <p:spPr>
-          <a:xfrm>
-            <a:off x="868680" y="4023359"/>
-            <a:ext cx="2542032" cy="347472"/>
+              <a:t>0.3572</a:t>
+            </a:r>
+          </a:p>
+        </p:txBody>
+      </p:sp>
+      <p:sp>
+        <p:nvSpPr>
+          <p:cNvPr id="20" name="TextBox 19"/>
+          <p:cNvSpPr txBox="1"/>
+          <p:nvPr/>
+        </p:nvSpPr>
+        <p:spPr>
+          <a:xfrm>
+            <a:off x="822960" y="3831336"/>
+            <a:ext cx="2633472" cy="347472"/>
           </a:xfrm>
           <a:prstGeom prst="rect">
             <a:avLst/>
@@ -7046,7 +7126,7 @@
               <a:spcAft>
                 <a:spcPts val="500"/>
               </a:spcAft>
-              <a:defRPr sz="1400" b="1">
+              <a:defRPr sz="1400" b="0">
                 <a:solidFill>
                   <a:srgbClr val="26313B"/>
                 </a:solidFill>
@@ -7054,21 +7134,21 @@
               </a:defRPr>
             </a:pPr>
             <a:r>
-              <a:t>V4 + DeBERTa + ML</a:t>
-            </a:r>
-          </a:p>
-        </p:txBody>
-      </p:sp>
-      <p:sp>
-        <p:nvSpPr>
-          <p:cNvPr id="20" name="Rectangle 19"/>
+              <a:t>Random forest baseline</a:t>
+            </a:r>
+          </a:p>
+        </p:txBody>
+      </p:sp>
+      <p:sp>
+        <p:nvSpPr>
+          <p:cNvPr id="21" name="Rectangle 20"/>
           <p:cNvSpPr/>
           <p:nvPr/>
         </p:nvSpPr>
         <p:spPr>
           <a:xfrm>
-            <a:off x="3520439" y="4059935"/>
-            <a:ext cx="3466550" cy="310896"/>
+            <a:off x="3566160" y="3867912"/>
+            <a:ext cx="3497957" cy="310896"/>
           </a:xfrm>
           <a:prstGeom prst="rect">
             <a:avLst/>
@@ -7106,13 +7186,13 @@
       </p:sp>
       <p:sp>
         <p:nvSpPr>
-          <p:cNvPr id="21" name="TextBox 20"/>
-          <p:cNvSpPr txBox="1"/>
-          <p:nvPr/>
-        </p:nvSpPr>
-        <p:spPr>
-          <a:xfrm>
-            <a:off x="7069286" y="4032503"/>
+          <p:cNvPr id="22" name="TextBox 21"/>
+          <p:cNvSpPr txBox="1"/>
+          <p:nvPr/>
+        </p:nvSpPr>
+        <p:spPr>
+          <a:xfrm>
+            <a:off x="7146413" y="3840480"/>
             <a:ext cx="566928" cy="320040"/>
           </a:xfrm>
           <a:prstGeom prst="rect">
@@ -7138,21 +7218,144 @@
               </a:defRPr>
             </a:pPr>
             <a:r>
-              <a:t>0.4619</a:t>
-            </a:r>
-          </a:p>
-        </p:txBody>
-      </p:sp>
-      <p:sp>
-        <p:nvSpPr>
-          <p:cNvPr id="22" name="Rounded Rectangle 21"/>
+              <a:t>0.3363</a:t>
+            </a:r>
+          </a:p>
+        </p:txBody>
+      </p:sp>
+      <p:sp>
+        <p:nvSpPr>
+          <p:cNvPr id="23" name="TextBox 22"/>
+          <p:cNvSpPr txBox="1"/>
+          <p:nvPr/>
+        </p:nvSpPr>
+        <p:spPr>
+          <a:xfrm>
+            <a:off x="822960" y="4334256"/>
+            <a:ext cx="2633472" cy="347472"/>
+          </a:xfrm>
+          <a:prstGeom prst="rect">
+            <a:avLst/>
+          </a:prstGeom>
+          <a:noFill/>
+        </p:spPr>
+        <p:txBody>
+          <a:bodyPr wrap="square" lIns="36576" rIns="36576" tIns="36576" bIns="36576" anchor="t">
+            <a:spAutoFit/>
+          </a:bodyPr>
+          <a:lstStyle/>
+          <a:p>
+            <a:pPr algn="l">
+              <a:spcAft>
+                <a:spcPts val="500"/>
+              </a:spcAft>
+              <a:defRPr sz="1400" b="0">
+                <a:solidFill>
+                  <a:srgbClr val="26313B"/>
+                </a:solidFill>
+                <a:latin typeface="Aptos"/>
+              </a:defRPr>
+            </a:pPr>
+            <a:r>
+              <a:t>Random forest + revision</a:t>
+            </a:r>
+          </a:p>
+        </p:txBody>
+      </p:sp>
+      <p:sp>
+        <p:nvSpPr>
+          <p:cNvPr id="24" name="Rectangle 23"/>
           <p:cNvSpPr/>
           <p:nvPr/>
         </p:nvSpPr>
         <p:spPr>
           <a:xfrm>
-            <a:off x="8321040" y="1828800"/>
-            <a:ext cx="2926080" cy="2542032"/>
+            <a:off x="3566160" y="4370832"/>
+            <a:ext cx="3482355" cy="310896"/>
+          </a:xfrm>
+          <a:prstGeom prst="rect">
+            <a:avLst/>
+          </a:prstGeom>
+          <a:solidFill>
+            <a:srgbClr val="667D94"/>
+          </a:solidFill>
+          <a:ln>
+            <a:solidFill>
+              <a:srgbClr val="667D94"/>
+            </a:solidFill>
+          </a:ln>
+        </p:spPr>
+        <p:style>
+          <a:lnRef idx="1">
+            <a:schemeClr val="accent1"/>
+          </a:lnRef>
+          <a:fillRef idx="3">
+            <a:schemeClr val="accent1"/>
+          </a:fillRef>
+          <a:effectRef idx="2">
+            <a:schemeClr val="accent1"/>
+          </a:effectRef>
+          <a:fontRef idx="minor">
+            <a:schemeClr val="lt1"/>
+          </a:fontRef>
+        </p:style>
+        <p:txBody>
+          <a:bodyPr rtlCol="0" anchor="ctr"/>
+          <a:lstStyle/>
+          <a:p>
+            <a:pPr algn="ctr"/>
+          </a:p>
+        </p:txBody>
+      </p:sp>
+      <p:sp>
+        <p:nvSpPr>
+          <p:cNvPr id="25" name="TextBox 24"/>
+          <p:cNvSpPr txBox="1"/>
+          <p:nvPr/>
+        </p:nvSpPr>
+        <p:spPr>
+          <a:xfrm>
+            <a:off x="7130811" y="4343400"/>
+            <a:ext cx="566928" cy="320040"/>
+          </a:xfrm>
+          <a:prstGeom prst="rect">
+            <a:avLst/>
+          </a:prstGeom>
+          <a:noFill/>
+        </p:spPr>
+        <p:txBody>
+          <a:bodyPr wrap="square" lIns="36576" rIns="36576" tIns="36576" bIns="36576" anchor="t">
+            <a:spAutoFit/>
+          </a:bodyPr>
+          <a:lstStyle/>
+          <a:p>
+            <a:pPr algn="l">
+              <a:spcAft>
+                <a:spcPts val="500"/>
+              </a:spcAft>
+              <a:defRPr sz="1200" b="1">
+                <a:solidFill>
+                  <a:srgbClr val="26313B"/>
+                </a:solidFill>
+                <a:latin typeface="Aptos"/>
+              </a:defRPr>
+            </a:pPr>
+            <a:r>
+              <a:t>0.3348</a:t>
+            </a:r>
+          </a:p>
+        </p:txBody>
+      </p:sp>
+      <p:sp>
+        <p:nvSpPr>
+          <p:cNvPr id="26" name="Rounded Rectangle 25"/>
+          <p:cNvSpPr/>
+          <p:nvPr/>
+        </p:nvSpPr>
+        <p:spPr>
+          <a:xfrm>
+            <a:off x="8549640" y="1700784"/>
+            <a:ext cx="2697480" cy="3090672"/>
           </a:xfrm>
           <a:prstGeom prst="roundRect">
             <a:avLst/>
@@ -7190,14 +7393,14 @@
       </p:sp>
       <p:sp>
         <p:nvSpPr>
-          <p:cNvPr id="23" name="TextBox 22"/>
-          <p:cNvSpPr txBox="1"/>
-          <p:nvPr/>
-        </p:nvSpPr>
-        <p:spPr>
-          <a:xfrm>
-            <a:off x="8549640" y="2103120"/>
-            <a:ext cx="2468880" cy="502920"/>
+          <p:cNvPr id="27" name="TextBox 26"/>
+          <p:cNvSpPr txBox="1"/>
+          <p:nvPr/>
+        </p:nvSpPr>
+        <p:spPr>
+          <a:xfrm>
+            <a:off x="8796528" y="1947672"/>
+            <a:ext cx="2212848" cy="365760"/>
           </a:xfrm>
           <a:prstGeom prst="rect">
             <a:avLst/>
@@ -7214,29 +7417,29 @@
               <a:spcAft>
                 <a:spcPts val="500"/>
               </a:spcAft>
-              <a:defRPr sz="2700" b="1">
-                <a:solidFill>
-                  <a:srgbClr val="DA8B35"/>
-                </a:solidFill>
-                <a:latin typeface="Aptos"/>
-              </a:defRPr>
-            </a:pPr>
-            <a:r>
-              <a:t>+0.0052 AP</a:t>
-            </a:r>
-          </a:p>
-        </p:txBody>
-      </p:sp>
-      <p:sp>
-        <p:nvSpPr>
-          <p:cNvPr id="24" name="TextBox 23"/>
-          <p:cNvSpPr txBox="1"/>
-          <p:nvPr/>
-        </p:nvSpPr>
-        <p:spPr>
-          <a:xfrm>
-            <a:off x="8595360" y="2724912"/>
-            <a:ext cx="2377440" cy="1005840"/>
+              <a:defRPr sz="1800" b="1">
+                <a:solidFill>
+                  <a:srgbClr val="183452"/>
+                </a:solidFill>
+                <a:latin typeface="Aptos"/>
+              </a:defRPr>
+            </a:pPr>
+            <a:r>
+              <a:t>AP deltas</a:t>
+            </a:r>
+          </a:p>
+        </p:txBody>
+      </p:sp>
+      <p:sp>
+        <p:nvSpPr>
+          <p:cNvPr id="28" name="TextBox 27"/>
+          <p:cNvSpPr txBox="1"/>
+          <p:nvPr/>
+        </p:nvSpPr>
+        <p:spPr>
+          <a:xfrm>
+            <a:off x="8796528" y="2514600"/>
+            <a:ext cx="2212848" cy="1051560"/>
           </a:xfrm>
           <a:prstGeom prst="rect">
             <a:avLst/>
@@ -7253,7 +7456,78 @@
               <a:spcAft>
                 <a:spcPts val="500"/>
               </a:spcAft>
-              <a:defRPr sz="1600" b="0">
+              <a:defRPr sz="1700" b="1">
+                <a:solidFill>
+                  <a:srgbClr val="A6413E"/>
+                </a:solidFill>
+                <a:latin typeface="Aptos"/>
+              </a:defRPr>
+            </a:pPr>
+            <a:r>
+              <a:t>Logistic  -0.0081</a:t>
+            </a:r>
+          </a:p>
+          <a:p>
+            <a:pPr algn="ctr">
+              <a:spcAft>
+                <a:spcPts val="500"/>
+              </a:spcAft>
+              <a:defRPr sz="1700" b="1">
+                <a:solidFill>
+                  <a:srgbClr val="A6413E"/>
+                </a:solidFill>
+                <a:latin typeface="Aptos"/>
+              </a:defRPr>
+            </a:pPr>
+            <a:r>
+              <a:t>SVM       -0.0012</a:t>
+            </a:r>
+          </a:p>
+          <a:p>
+            <a:pPr algn="ctr">
+              <a:spcAft>
+                <a:spcPts val="500"/>
+              </a:spcAft>
+              <a:defRPr sz="1700" b="1">
+                <a:solidFill>
+                  <a:srgbClr val="A6413E"/>
+                </a:solidFill>
+                <a:latin typeface="Aptos"/>
+              </a:defRPr>
+            </a:pPr>
+            <a:r>
+              <a:t>Forest    -0.0015</a:t>
+            </a:r>
+          </a:p>
+        </p:txBody>
+      </p:sp>
+      <p:sp>
+        <p:nvSpPr>
+          <p:cNvPr id="29" name="TextBox 28"/>
+          <p:cNvSpPr txBox="1"/>
+          <p:nvPr/>
+        </p:nvSpPr>
+        <p:spPr>
+          <a:xfrm>
+            <a:off x="8732520" y="3749039"/>
+            <a:ext cx="2340864" cy="658368"/>
+          </a:xfrm>
+          <a:prstGeom prst="rect">
+            <a:avLst/>
+          </a:prstGeom>
+          <a:noFill/>
+        </p:spPr>
+        <p:txBody>
+          <a:bodyPr wrap="square" lIns="36576" rIns="36576" tIns="36576" bIns="36576" anchor="t">
+            <a:spAutoFit/>
+          </a:bodyPr>
+          <a:lstStyle/>
+          <a:p>
+            <a:pPr algn="ctr">
+              <a:spcAft>
+                <a:spcPts val="500"/>
+              </a:spcAft>
+              <a:defRPr sz="1300" b="0">
                 <a:solidFill>
                   <a:srgbClr val="26313B"/>
                 </a:solidFill>
@@ -7261,21 +7535,21 @@
               </a:defRPr>
             </a:pPr>
             <a:r>
-              <a:t>vs. ML alone on this subset. A modest exploratory difference—not evidence of a reliable gain.</a:t>
-            </a:r>
-          </a:p>
-        </p:txBody>
-      </p:sp>
-      <p:sp>
-        <p:nvSpPr>
-          <p:cNvPr id="25" name="TextBox 24"/>
-          <p:cNvSpPr txBox="1"/>
-          <p:nvPr/>
-        </p:nvSpPr>
-        <p:spPr>
-          <a:xfrm>
-            <a:off x="932688" y="4892040"/>
-            <a:ext cx="10195560" cy="713232"/>
+              <a:t>F2: unchanged for logistic; small gains for SVM and forest.</a:t>
+            </a:r>
+          </a:p>
+        </p:txBody>
+      </p:sp>
+      <p:sp>
+        <p:nvSpPr>
+          <p:cNvPr id="30" name="TextBox 29"/>
+          <p:cNvSpPr txBox="1"/>
+          <p:nvPr/>
+        </p:nvSpPr>
+        <p:spPr>
+          <a:xfrm>
+            <a:off x="914400" y="5230368"/>
+            <a:ext cx="10287000" cy="640080"/>
           </a:xfrm>
           <a:prstGeom prst="rect">
             <a:avLst/>
@@ -7292,7 +7566,7 @@
               <a:spcAft>
                 <a:spcPts val="500"/>
               </a:spcAft>
-              <a:defRPr sz="1500" b="1">
+              <a:defRPr sz="1600" b="1">
                 <a:solidFill>
                   <a:srgbClr val="A6413E"/>
                 </a:solidFill>
@@ -7300,14 +7574,14 @@
               </a:defRPr>
             </a:pPr>
             <a:r>
-              <a:t>Caveat: the ML artifact used earlier labels (17 rows missing; 28 conflicts excluded). V4/hybrid design were developed on this cohort.</a:t>
-            </a:r>
-          </a:p>
-        </p:txBody>
-      </p:sp>
-      <p:sp>
-        <p:nvSpPr>
-          <p:cNvPr id="26" name="TextBox 25"/>
+              <a:t>RQ2 is only partly answered: cross-reference features were not isolated and no calibration metrics were recorded.</a:t>
+            </a:r>
+          </a:p>
+        </p:txBody>
+      </p:sp>
+      <p:sp>
+        <p:nvSpPr>
+          <p:cNvPr id="31" name="TextBox 30"/>
           <p:cNvSpPr txBox="1"/>
           <p:nvPr/>
         </p:nvSpPr>
@@ -7339,14 +7613,14 @@
               </a:defRPr>
             </a:pPr>
             <a:r>
-              <a:t>Source: README.md and models/hybrid/README.md. Not independent-test results.</a:t>
-            </a:r>
-          </a:p>
-        </p:txBody>
-      </p:sp>
-      <p:sp>
-        <p:nvSpPr>
-          <p:cNvPr id="27" name="TextBox 26"/>
+              <a:t>Source: paper/main.tex, Revision-Feature Implementation and Feature Comparisons.</a:t>
+            </a:r>
+          </a:p>
+        </p:txBody>
+      </p:sp>
+      <p:sp>
+        <p:nvSpPr>
+          <p:cNvPr id="32" name="TextBox 31"/>
           <p:cNvSpPr txBox="1"/>
           <p:nvPr/>
         </p:nvSpPr>
@@ -7443,7 +7717,7 @@
               </a:defRPr>
             </a:pPr>
             <a:r>
-              <a:t>What can we responsibly conclude from the model studies?</a:t>
+              <a:t>The report answers some questions and leaves two open</a:t>
             </a:r>
           </a:p>
         </p:txBody>
@@ -7524,59 +7798,20 @@
       </p:sp>
       <p:sp>
         <p:nvSpPr>
-          <p:cNvPr id="5" name="TextBox 4"/>
-          <p:cNvSpPr txBox="1"/>
-          <p:nvPr/>
-        </p:nvSpPr>
-        <p:spPr>
-          <a:xfrm>
-            <a:off x="10744200" y="6492240"/>
-            <a:ext cx="777240" cy="201168"/>
-          </a:xfrm>
-          <a:prstGeom prst="rect">
-            <a:avLst/>
-          </a:prstGeom>
-          <a:noFill/>
-        </p:spPr>
-        <p:txBody>
-          <a:bodyPr wrap="square" lIns="36576" rIns="36576" tIns="36576" bIns="36576" anchor="t">
-            <a:spAutoFit/>
-          </a:bodyPr>
-          <a:lstStyle/>
-          <a:p>
-            <a:pPr algn="r">
-              <a:spcAft>
-                <a:spcPts val="500"/>
-              </a:spcAft>
-              <a:defRPr sz="900" b="0">
-                <a:solidFill>
-                  <a:srgbClr val="5B6974"/>
-                </a:solidFill>
-                <a:latin typeface="Aptos"/>
-              </a:defRPr>
-            </a:pPr>
-            <a:r>
-              <a:t>13  |  18</a:t>
-            </a:r>
-          </a:p>
-        </p:txBody>
-      </p:sp>
-      <p:sp>
-        <p:nvSpPr>
-          <p:cNvPr id="6" name="Rounded Rectangle 5"/>
+          <p:cNvPr id="5" name="Rounded Rectangle 4"/>
           <p:cNvSpPr/>
           <p:nvPr/>
         </p:nvSpPr>
         <p:spPr>
           <a:xfrm>
-            <a:off x="804672" y="1417320"/>
-            <a:ext cx="3474720" cy="3246120"/>
+            <a:off x="868680" y="1188720"/>
+            <a:ext cx="10424160" cy="658368"/>
           </a:xfrm>
           <a:prstGeom prst="roundRect">
             <a:avLst/>
           </a:prstGeom>
           <a:solidFill>
-            <a:srgbClr val="E7F0F7"/>
+            <a:srgbClr val="F2F7FA"/>
           </a:solidFill>
           <a:ln w="13970">
             <a:solidFill>
@@ -7608,143 +7843,137 @@
       </p:sp>
       <p:sp>
         <p:nvSpPr>
-          <p:cNvPr id="7" name="Rectangle 6"/>
+          <p:cNvPr id="6" name="TextBox 5"/>
+          <p:cNvSpPr txBox="1"/>
+          <p:nvPr/>
+        </p:nvSpPr>
+        <p:spPr>
+          <a:xfrm>
+            <a:off x="1078992" y="1344168"/>
+            <a:ext cx="658368" cy="292608"/>
+          </a:xfrm>
+          <a:prstGeom prst="rect">
+            <a:avLst/>
+          </a:prstGeom>
+          <a:noFill/>
+        </p:spPr>
+        <p:txBody>
+          <a:bodyPr wrap="square" lIns="36576" rIns="36576" tIns="36576" bIns="36576" anchor="t">
+            <a:spAutoFit/>
+          </a:bodyPr>
+          <a:lstStyle/>
+          <a:p>
+            <a:pPr algn="l">
+              <a:spcAft>
+                <a:spcPts val="500"/>
+              </a:spcAft>
+              <a:defRPr sz="1600" b="1">
+                <a:solidFill>
+                  <a:srgbClr val="1C8585"/>
+                </a:solidFill>
+                <a:latin typeface="Aptos"/>
+              </a:defRPr>
+            </a:pPr>
+            <a:r>
+              <a:t>RQ1</a:t>
+            </a:r>
+          </a:p>
+        </p:txBody>
+      </p:sp>
+      <p:sp>
+        <p:nvSpPr>
+          <p:cNvPr id="7" name="TextBox 6"/>
+          <p:cNvSpPr txBox="1"/>
+          <p:nvPr/>
+        </p:nvSpPr>
+        <p:spPr>
+          <a:xfrm>
+            <a:off x="1847088" y="1325880"/>
+            <a:ext cx="3657600" cy="329184"/>
+          </a:xfrm>
+          <a:prstGeom prst="rect">
+            <a:avLst/>
+          </a:prstGeom>
+          <a:noFill/>
+        </p:spPr>
+        <p:txBody>
+          <a:bodyPr wrap="square" lIns="36576" rIns="36576" tIns="36576" bIns="36576" anchor="t">
+            <a:spAutoFit/>
+          </a:bodyPr>
+          <a:lstStyle/>
+          <a:p>
+            <a:pPr algn="l">
+              <a:spcAft>
+                <a:spcPts val="500"/>
+              </a:spcAft>
+              <a:defRPr sz="1500" b="1">
+                <a:solidFill>
+                  <a:srgbClr val="183452"/>
+                </a:solidFill>
+                <a:latin typeface="Aptos"/>
+              </a:defRPr>
+            </a:pPr>
+            <a:r>
+              <a:t>Development feasibility</a:t>
+            </a:r>
+          </a:p>
+        </p:txBody>
+      </p:sp>
+      <p:sp>
+        <p:nvSpPr>
+          <p:cNvPr id="8" name="TextBox 7"/>
+          <p:cNvSpPr txBox="1"/>
+          <p:nvPr/>
+        </p:nvSpPr>
+        <p:spPr>
+          <a:xfrm>
+            <a:off x="5669280" y="1325880"/>
+            <a:ext cx="5212080" cy="329184"/>
+          </a:xfrm>
+          <a:prstGeom prst="rect">
+            <a:avLst/>
+          </a:prstGeom>
+          <a:noFill/>
+        </p:spPr>
+        <p:txBody>
+          <a:bodyPr wrap="square" lIns="36576" rIns="36576" tIns="36576" bIns="36576" anchor="t">
+            <a:spAutoFit/>
+          </a:bodyPr>
+          <a:lstStyle/>
+          <a:p>
+            <a:pPr algn="l">
+              <a:spcAft>
+                <a:spcPts val="500"/>
+              </a:spcAft>
+              <a:defRPr sz="1450" b="0">
+                <a:solidFill>
+                  <a:srgbClr val="26313B"/>
+                </a:solidFill>
+                <a:latin typeface="Aptos"/>
+              </a:defRPr>
+            </a:pPr>
+            <a:r>
+              <a:t>Supported with qualifications</a:t>
+            </a:r>
+          </a:p>
+        </p:txBody>
+      </p:sp>
+      <p:sp>
+        <p:nvSpPr>
+          <p:cNvPr id="9" name="Rounded Rectangle 8"/>
           <p:cNvSpPr/>
           <p:nvPr/>
         </p:nvSpPr>
         <p:spPr>
           <a:xfrm>
-            <a:off x="804672" y="1417320"/>
-            <a:ext cx="82296" cy="3246120"/>
-          </a:xfrm>
-          <a:prstGeom prst="rect">
+            <a:off x="868680" y="2020824"/>
+            <a:ext cx="10424160" cy="658368"/>
+          </a:xfrm>
+          <a:prstGeom prst="roundRect">
             <a:avLst/>
           </a:prstGeom>
           <a:solidFill>
-            <a:srgbClr val="2D6596"/>
-          </a:solidFill>
-          <a:ln>
-            <a:solidFill>
-              <a:srgbClr val="2D6596"/>
-            </a:solidFill>
-          </a:ln>
-        </p:spPr>
-        <p:style>
-          <a:lnRef idx="1">
-            <a:schemeClr val="accent1"/>
-          </a:lnRef>
-          <a:fillRef idx="3">
-            <a:schemeClr val="accent1"/>
-          </a:fillRef>
-          <a:effectRef idx="2">
-            <a:schemeClr val="accent1"/>
-          </a:effectRef>
-          <a:fontRef idx="minor">
-            <a:schemeClr val="lt1"/>
-          </a:fontRef>
-        </p:style>
-        <p:txBody>
-          <a:bodyPr rtlCol="0" anchor="ctr"/>
-          <a:lstStyle/>
-          <a:p>
-            <a:pPr algn="ctr"/>
-          </a:p>
-        </p:txBody>
-      </p:sp>
-      <p:sp>
-        <p:nvSpPr>
-          <p:cNvPr id="8" name="TextBox 7"/>
-          <p:cNvSpPr txBox="1"/>
-          <p:nvPr/>
-        </p:nvSpPr>
-        <p:spPr>
-          <a:xfrm>
-            <a:off x="1024128" y="1600200"/>
-            <a:ext cx="3081527" cy="347472"/>
-          </a:xfrm>
-          <a:prstGeom prst="rect">
-            <a:avLst/>
-          </a:prstGeom>
-          <a:noFill/>
-        </p:spPr>
-        <p:txBody>
-          <a:bodyPr wrap="square" lIns="36576" rIns="36576" tIns="36576" bIns="36576" anchor="t">
-            <a:spAutoFit/>
-          </a:bodyPr>
-          <a:lstStyle/>
-          <a:p>
-            <a:pPr algn="l">
-              <a:spcAft>
-                <a:spcPts val="500"/>
-              </a:spcAft>
-              <a:defRPr sz="1800" b="1">
-                <a:solidFill>
-                  <a:srgbClr val="183452"/>
-                </a:solidFill>
-                <a:latin typeface="Aptos"/>
-              </a:defRPr>
-            </a:pPr>
-            <a:r>
-              <a:t>1  There is ranking signal</a:t>
-            </a:r>
-          </a:p>
-        </p:txBody>
-      </p:sp>
-      <p:sp>
-        <p:nvSpPr>
-          <p:cNvPr id="9" name="TextBox 8"/>
-          <p:cNvSpPr txBox="1"/>
-          <p:nvPr/>
-        </p:nvSpPr>
-        <p:spPr>
-          <a:xfrm>
-            <a:off x="1024128" y="2029968"/>
-            <a:ext cx="3063239" cy="2496312"/>
-          </a:xfrm>
-          <a:prstGeom prst="rect">
-            <a:avLst/>
-          </a:prstGeom>
-          <a:noFill/>
-        </p:spPr>
-        <p:txBody>
-          <a:bodyPr wrap="square" lIns="36576" rIns="36576" tIns="36576" bIns="36576" anchor="t">
-            <a:spAutoFit/>
-          </a:bodyPr>
-          <a:lstStyle/>
-          <a:p>
-            <a:pPr algn="l">
-              <a:spcAft>
-                <a:spcPts val="500"/>
-              </a:spcAft>
-              <a:defRPr sz="1700" b="0">
-                <a:solidFill>
-                  <a:srgbClr val="26313B"/>
-                </a:solidFill>
-                <a:latin typeface="Aptos"/>
-              </a:defRPr>
-            </a:pPr>
-            <a:r>
-              <a:t>Text and engineered features can prioritize some operationally labeled clauses above prevalence.</a:t>
-            </a:r>
-          </a:p>
-        </p:txBody>
-      </p:sp>
-      <p:sp>
-        <p:nvSpPr>
-          <p:cNvPr id="10" name="Rounded Rectangle 9"/>
-          <p:cNvSpPr/>
-          <p:nvPr/>
-        </p:nvSpPr>
-        <p:spPr>
-          <a:xfrm>
-            <a:off x="4370832" y="1417320"/>
-            <a:ext cx="3474720" cy="3246120"/>
-          </a:xfrm>
-          <a:prstGeom prst="roundRect">
-            <a:avLst/>
-          </a:prstGeom>
-          <a:solidFill>
-            <a:srgbClr val="E7F5F3"/>
+            <a:srgbClr val="FFFFFF"/>
           </a:solidFill>
           <a:ln w="13970">
             <a:solidFill>
@@ -7776,143 +8005,137 @@
       </p:sp>
       <p:sp>
         <p:nvSpPr>
-          <p:cNvPr id="11" name="Rectangle 10"/>
+          <p:cNvPr id="10" name="TextBox 9"/>
+          <p:cNvSpPr txBox="1"/>
+          <p:nvPr/>
+        </p:nvSpPr>
+        <p:spPr>
+          <a:xfrm>
+            <a:off x="1078992" y="2176272"/>
+            <a:ext cx="658368" cy="292608"/>
+          </a:xfrm>
+          <a:prstGeom prst="rect">
+            <a:avLst/>
+          </a:prstGeom>
+          <a:noFill/>
+        </p:spPr>
+        <p:txBody>
+          <a:bodyPr wrap="square" lIns="36576" rIns="36576" tIns="36576" bIns="36576" anchor="t">
+            <a:spAutoFit/>
+          </a:bodyPr>
+          <a:lstStyle/>
+          <a:p>
+            <a:pPr algn="l">
+              <a:spcAft>
+                <a:spcPts val="500"/>
+              </a:spcAft>
+              <a:defRPr sz="1600" b="1">
+                <a:solidFill>
+                  <a:srgbClr val="DA8B35"/>
+                </a:solidFill>
+                <a:latin typeface="Aptos"/>
+              </a:defRPr>
+            </a:pPr>
+            <a:r>
+              <a:t>RQ2</a:t>
+            </a:r>
+          </a:p>
+        </p:txBody>
+      </p:sp>
+      <p:sp>
+        <p:nvSpPr>
+          <p:cNvPr id="11" name="TextBox 10"/>
+          <p:cNvSpPr txBox="1"/>
+          <p:nvPr/>
+        </p:nvSpPr>
+        <p:spPr>
+          <a:xfrm>
+            <a:off x="1847088" y="2157984"/>
+            <a:ext cx="3657600" cy="329184"/>
+          </a:xfrm>
+          <a:prstGeom prst="rect">
+            <a:avLst/>
+          </a:prstGeom>
+          <a:noFill/>
+        </p:spPr>
+        <p:txBody>
+          <a:bodyPr wrap="square" lIns="36576" rIns="36576" tIns="36576" bIns="36576" anchor="t">
+            <a:spAutoFit/>
+          </a:bodyPr>
+          <a:lstStyle/>
+          <a:p>
+            <a:pPr algn="l">
+              <a:spcAft>
+                <a:spcPts val="500"/>
+              </a:spcAft>
+              <a:defRPr sz="1500" b="1">
+                <a:solidFill>
+                  <a:srgbClr val="183452"/>
+                </a:solidFill>
+                <a:latin typeface="Aptos"/>
+              </a:defRPr>
+            </a:pPr>
+            <a:r>
+              <a:t>Revision / cross-reference / calibration</a:t>
+            </a:r>
+          </a:p>
+        </p:txBody>
+      </p:sp>
+      <p:sp>
+        <p:nvSpPr>
+          <p:cNvPr id="12" name="TextBox 11"/>
+          <p:cNvSpPr txBox="1"/>
+          <p:nvPr/>
+        </p:nvSpPr>
+        <p:spPr>
+          <a:xfrm>
+            <a:off x="5669280" y="2157984"/>
+            <a:ext cx="5212080" cy="329184"/>
+          </a:xfrm>
+          <a:prstGeom prst="rect">
+            <a:avLst/>
+          </a:prstGeom>
+          <a:noFill/>
+        </p:spPr>
+        <p:txBody>
+          <a:bodyPr wrap="square" lIns="36576" rIns="36576" tIns="36576" bIns="36576" anchor="t">
+            <a:spAutoFit/>
+          </a:bodyPr>
+          <a:lstStyle/>
+          <a:p>
+            <a:pPr algn="l">
+              <a:spcAft>
+                <a:spcPts val="500"/>
+              </a:spcAft>
+              <a:defRPr sz="1450" b="0">
+                <a:solidFill>
+                  <a:srgbClr val="26313B"/>
+                </a:solidFill>
+                <a:latin typeface="Aptos"/>
+              </a:defRPr>
+            </a:pPr>
+            <a:r>
+              <a:t>Partly answered; AP hypothesis not supported</a:t>
+            </a:r>
+          </a:p>
+        </p:txBody>
+      </p:sp>
+      <p:sp>
+        <p:nvSpPr>
+          <p:cNvPr id="13" name="Rounded Rectangle 12"/>
           <p:cNvSpPr/>
           <p:nvPr/>
         </p:nvSpPr>
         <p:spPr>
           <a:xfrm>
-            <a:off x="4370832" y="1417320"/>
-            <a:ext cx="82296" cy="3246120"/>
-          </a:xfrm>
-          <a:prstGeom prst="rect">
+            <a:off x="868680" y="2852928"/>
+            <a:ext cx="10424160" cy="658368"/>
+          </a:xfrm>
+          <a:prstGeom prst="roundRect">
             <a:avLst/>
           </a:prstGeom>
           <a:solidFill>
-            <a:srgbClr val="1C8585"/>
-          </a:solidFill>
-          <a:ln>
-            <a:solidFill>
-              <a:srgbClr val="1C8585"/>
-            </a:solidFill>
-          </a:ln>
-        </p:spPr>
-        <p:style>
-          <a:lnRef idx="1">
-            <a:schemeClr val="accent1"/>
-          </a:lnRef>
-          <a:fillRef idx="3">
-            <a:schemeClr val="accent1"/>
-          </a:fillRef>
-          <a:effectRef idx="2">
-            <a:schemeClr val="accent1"/>
-          </a:effectRef>
-          <a:fontRef idx="minor">
-            <a:schemeClr val="lt1"/>
-          </a:fontRef>
-        </p:style>
-        <p:txBody>
-          <a:bodyPr rtlCol="0" anchor="ctr"/>
-          <a:lstStyle/>
-          <a:p>
-            <a:pPr algn="ctr"/>
-          </a:p>
-        </p:txBody>
-      </p:sp>
-      <p:sp>
-        <p:nvSpPr>
-          <p:cNvPr id="12" name="TextBox 11"/>
-          <p:cNvSpPr txBox="1"/>
-          <p:nvPr/>
-        </p:nvSpPr>
-        <p:spPr>
-          <a:xfrm>
-            <a:off x="4590288" y="1600200"/>
-            <a:ext cx="3081527" cy="347472"/>
-          </a:xfrm>
-          <a:prstGeom prst="rect">
-            <a:avLst/>
-          </a:prstGeom>
-          <a:noFill/>
-        </p:spPr>
-        <p:txBody>
-          <a:bodyPr wrap="square" lIns="36576" rIns="36576" tIns="36576" bIns="36576" anchor="t">
-            <a:spAutoFit/>
-          </a:bodyPr>
-          <a:lstStyle/>
-          <a:p>
-            <a:pPr algn="l">
-              <a:spcAft>
-                <a:spcPts val="500"/>
-              </a:spcAft>
-              <a:defRPr sz="1800" b="1">
-                <a:solidFill>
-                  <a:srgbClr val="183452"/>
-                </a:solidFill>
-                <a:latin typeface="Aptos"/>
-              </a:defRPr>
-            </a:pPr>
-            <a:r>
-              <a:t>2  Complexity is not a guarantee</a:t>
-            </a:r>
-          </a:p>
-        </p:txBody>
-      </p:sp>
-      <p:sp>
-        <p:nvSpPr>
-          <p:cNvPr id="13" name="TextBox 12"/>
-          <p:cNvSpPr txBox="1"/>
-          <p:nvPr/>
-        </p:nvSpPr>
-        <p:spPr>
-          <a:xfrm>
-            <a:off x="4590288" y="2029968"/>
-            <a:ext cx="3063239" cy="2496312"/>
-          </a:xfrm>
-          <a:prstGeom prst="rect">
-            <a:avLst/>
-          </a:prstGeom>
-          <a:noFill/>
-        </p:spPr>
-        <p:txBody>
-          <a:bodyPr wrap="square" lIns="36576" rIns="36576" tIns="36576" bIns="36576" anchor="t">
-            <a:spAutoFit/>
-          </a:bodyPr>
-          <a:lstStyle/>
-          <a:p>
-            <a:pPr algn="l">
-              <a:spcAft>
-                <a:spcPts val="500"/>
-              </a:spcAft>
-              <a:defRPr sz="1700" b="0">
-                <a:solidFill>
-                  <a:srgbClr val="26313B"/>
-                </a:solidFill>
-                <a:latin typeface="Aptos"/>
-              </a:defRPr>
-            </a:pPr>
-            <a:r>
-              <a:t>The tested embeddings and revision-only features were not consistently stronger; hybrid gains are small.</a:t>
-            </a:r>
-          </a:p>
-        </p:txBody>
-      </p:sp>
-      <p:sp>
-        <p:nvSpPr>
-          <p:cNvPr id="14" name="Rounded Rectangle 13"/>
-          <p:cNvSpPr/>
-          <p:nvPr/>
-        </p:nvSpPr>
-        <p:spPr>
-          <a:xfrm>
-            <a:off x="7936992" y="1417320"/>
-            <a:ext cx="3474720" cy="3246120"/>
-          </a:xfrm>
-          <a:prstGeom prst="roundRect">
-            <a:avLst/>
-          </a:prstGeom>
-          <a:solidFill>
-            <a:srgbClr val="FBF2E3"/>
+            <a:srgbClr val="F2F7FA"/>
           </a:solidFill>
           <a:ln w="13970">
             <a:solidFill>
@@ -7944,24 +8167,141 @@
       </p:sp>
       <p:sp>
         <p:nvSpPr>
-          <p:cNvPr id="15" name="Rectangle 14"/>
+          <p:cNvPr id="14" name="TextBox 13"/>
+          <p:cNvSpPr txBox="1"/>
+          <p:nvPr/>
+        </p:nvSpPr>
+        <p:spPr>
+          <a:xfrm>
+            <a:off x="1078992" y="3008376"/>
+            <a:ext cx="658368" cy="292608"/>
+          </a:xfrm>
+          <a:prstGeom prst="rect">
+            <a:avLst/>
+          </a:prstGeom>
+          <a:noFill/>
+        </p:spPr>
+        <p:txBody>
+          <a:bodyPr wrap="square" lIns="36576" rIns="36576" tIns="36576" bIns="36576" anchor="t">
+            <a:spAutoFit/>
+          </a:bodyPr>
+          <a:lstStyle/>
+          <a:p>
+            <a:pPr algn="l">
+              <a:spcAft>
+                <a:spcPts val="500"/>
+              </a:spcAft>
+              <a:defRPr sz="1600" b="1">
+                <a:solidFill>
+                  <a:srgbClr val="2D6596"/>
+                </a:solidFill>
+                <a:latin typeface="Aptos"/>
+              </a:defRPr>
+            </a:pPr>
+            <a:r>
+              <a:t>RQ3</a:t>
+            </a:r>
+          </a:p>
+        </p:txBody>
+      </p:sp>
+      <p:sp>
+        <p:nvSpPr>
+          <p:cNvPr id="15" name="TextBox 14"/>
+          <p:cNvSpPr txBox="1"/>
+          <p:nvPr/>
+        </p:nvSpPr>
+        <p:spPr>
+          <a:xfrm>
+            <a:off x="1847088" y="2990088"/>
+            <a:ext cx="3657600" cy="329184"/>
+          </a:xfrm>
+          <a:prstGeom prst="rect">
+            <a:avLst/>
+          </a:prstGeom>
+          <a:noFill/>
+        </p:spPr>
+        <p:txBody>
+          <a:bodyPr wrap="square" lIns="36576" rIns="36576" tIns="36576" bIns="36576" anchor="t">
+            <a:spAutoFit/>
+          </a:bodyPr>
+          <a:lstStyle/>
+          <a:p>
+            <a:pPr algn="l">
+              <a:spcAft>
+                <a:spcPts val="500"/>
+              </a:spcAft>
+              <a:defRPr sz="1500" b="1">
+                <a:solidFill>
+                  <a:srgbClr val="183452"/>
+                </a:solidFill>
+                <a:latin typeface="Aptos"/>
+              </a:defRPr>
+            </a:pPr>
+            <a:r>
+              <a:t>Model-family comparison</a:t>
+            </a:r>
+          </a:p>
+        </p:txBody>
+      </p:sp>
+      <p:sp>
+        <p:nvSpPr>
+          <p:cNvPr id="16" name="TextBox 15"/>
+          <p:cNvSpPr txBox="1"/>
+          <p:nvPr/>
+        </p:nvSpPr>
+        <p:spPr>
+          <a:xfrm>
+            <a:off x="5669280" y="2990088"/>
+            <a:ext cx="5212080" cy="329184"/>
+          </a:xfrm>
+          <a:prstGeom prst="rect">
+            <a:avLst/>
+          </a:prstGeom>
+          <a:noFill/>
+        </p:spPr>
+        <p:txBody>
+          <a:bodyPr wrap="square" lIns="36576" rIns="36576" tIns="36576" bIns="36576" anchor="t">
+            <a:spAutoFit/>
+          </a:bodyPr>
+          <a:lstStyle/>
+          <a:p>
+            <a:pPr algn="l">
+              <a:spcAft>
+                <a:spcPts val="500"/>
+              </a:spcAft>
+              <a:defRPr sz="1450" b="0">
+                <a:solidFill>
+                  <a:srgbClr val="26313B"/>
+                </a:solidFill>
+                <a:latin typeface="Aptos"/>
+              </a:defRPr>
+            </a:pPr>
+            <a:r>
+              <a:t>Effectiveness/workload only; separate protocols</a:t>
+            </a:r>
+          </a:p>
+        </p:txBody>
+      </p:sp>
+      <p:sp>
+        <p:nvSpPr>
+          <p:cNvPr id="17" name="Rounded Rectangle 16"/>
           <p:cNvSpPr/>
           <p:nvPr/>
         </p:nvSpPr>
         <p:spPr>
           <a:xfrm>
-            <a:off x="7936992" y="1417320"/>
-            <a:ext cx="82296" cy="3246120"/>
-          </a:xfrm>
-          <a:prstGeom prst="rect">
+            <a:off x="868680" y="3685032"/>
+            <a:ext cx="10424160" cy="658368"/>
+          </a:xfrm>
+          <a:prstGeom prst="roundRect">
             <a:avLst/>
           </a:prstGeom>
           <a:solidFill>
-            <a:srgbClr val="DA8B35"/>
+            <a:srgbClr val="FFFFFF"/>
           </a:solidFill>
-          <a:ln>
+          <a:ln w="13970">
             <a:solidFill>
-              <a:srgbClr val="DA8B35"/>
+              <a:srgbClr val="D6E0E7"/>
             </a:solidFill>
           </a:ln>
         </p:spPr>
@@ -7989,14 +8329,14 @@
       </p:sp>
       <p:sp>
         <p:nvSpPr>
-          <p:cNvPr id="16" name="TextBox 15"/>
-          <p:cNvSpPr txBox="1"/>
-          <p:nvPr/>
-        </p:nvSpPr>
-        <p:spPr>
-          <a:xfrm>
-            <a:off x="8156448" y="1600200"/>
-            <a:ext cx="3081527" cy="347472"/>
+          <p:cNvPr id="18" name="TextBox 17"/>
+          <p:cNvSpPr txBox="1"/>
+          <p:nvPr/>
+        </p:nvSpPr>
+        <p:spPr>
+          <a:xfrm>
+            <a:off x="1078992" y="3840480"/>
+            <a:ext cx="658368" cy="292608"/>
           </a:xfrm>
           <a:prstGeom prst="rect">
             <a:avLst/>
@@ -8013,7 +8353,46 @@
               <a:spcAft>
                 <a:spcPts val="500"/>
               </a:spcAft>
-              <a:defRPr sz="1800" b="1">
+              <a:defRPr sz="1600" b="1">
+                <a:solidFill>
+                  <a:srgbClr val="A6413E"/>
+                </a:solidFill>
+                <a:latin typeface="Aptos"/>
+              </a:defRPr>
+            </a:pPr>
+            <a:r>
+              <a:t>RQ4</a:t>
+            </a:r>
+          </a:p>
+        </p:txBody>
+      </p:sp>
+      <p:sp>
+        <p:nvSpPr>
+          <p:cNvPr id="19" name="TextBox 18"/>
+          <p:cNvSpPr txBox="1"/>
+          <p:nvPr/>
+        </p:nvSpPr>
+        <p:spPr>
+          <a:xfrm>
+            <a:off x="1847088" y="3822192"/>
+            <a:ext cx="3657600" cy="329184"/>
+          </a:xfrm>
+          <a:prstGeom prst="rect">
+            <a:avLst/>
+          </a:prstGeom>
+          <a:noFill/>
+        </p:spPr>
+        <p:txBody>
+          <a:bodyPr wrap="square" lIns="36576" rIns="36576" tIns="36576" bIns="36576" anchor="t">
+            <a:spAutoFit/>
+          </a:bodyPr>
+          <a:lstStyle/>
+          <a:p>
+            <a:pPr algn="l">
+              <a:spcAft>
+                <a:spcPts val="500"/>
+              </a:spcAft>
+              <a:defRPr sz="1500" b="1">
                 <a:solidFill>
                   <a:srgbClr val="183452"/>
                 </a:solidFill>
@@ -8021,21 +8400,21 @@
               </a:defRPr>
             </a:pPr>
             <a:r>
-              <a:t>3  Cohorts matter</a:t>
-            </a:r>
-          </a:p>
-        </p:txBody>
-      </p:sp>
-      <p:sp>
-        <p:nvSpPr>
-          <p:cNvPr id="17" name="TextBox 16"/>
-          <p:cNvSpPr txBox="1"/>
-          <p:nvPr/>
-        </p:nvSpPr>
-        <p:spPr>
-          <a:xfrm>
-            <a:off x="8156448" y="2029968"/>
-            <a:ext cx="3063239" cy="2496312"/>
+              <a:t>Conditional LLM routing</a:t>
+            </a:r>
+          </a:p>
+        </p:txBody>
+      </p:sp>
+      <p:sp>
+        <p:nvSpPr>
+          <p:cNvPr id="20" name="TextBox 19"/>
+          <p:cNvSpPr txBox="1"/>
+          <p:nvPr/>
+        </p:nvSpPr>
+        <p:spPr>
+          <a:xfrm>
+            <a:off x="5669280" y="3822192"/>
+            <a:ext cx="5212080" cy="329184"/>
           </a:xfrm>
           <a:prstGeom prst="rect">
             <a:avLst/>
@@ -8052,7 +8431,7 @@
               <a:spcAft>
                 <a:spcPts val="500"/>
               </a:spcAft>
-              <a:defRPr sz="1700" b="0">
+              <a:defRPr sz="1450" b="0">
                 <a:solidFill>
                   <a:srgbClr val="26313B"/>
                 </a:solidFill>
@@ -8060,21 +8439,183 @@
               </a:defRPr>
             </a:pPr>
             <a:r>
-              <a:t>Scores answer different questions when labels, candidate rules, and protocols differ.</a:t>
-            </a:r>
-          </a:p>
-        </p:txBody>
-      </p:sp>
-      <p:sp>
-        <p:nvSpPr>
-          <p:cNvPr id="18" name="TextBox 17"/>
-          <p:cNvSpPr txBox="1"/>
-          <p:nvPr/>
-        </p:nvSpPr>
-        <p:spPr>
-          <a:xfrm>
-            <a:off x="914400" y="5257800"/>
-            <a:ext cx="10332720" cy="566928"/>
+              <a:t>Not tested; calls and cost were not reduced</a:t>
+            </a:r>
+          </a:p>
+        </p:txBody>
+      </p:sp>
+      <p:sp>
+        <p:nvSpPr>
+          <p:cNvPr id="21" name="Rounded Rectangle 20"/>
+          <p:cNvSpPr/>
+          <p:nvPr/>
+        </p:nvSpPr>
+        <p:spPr>
+          <a:xfrm>
+            <a:off x="868680" y="4517136"/>
+            <a:ext cx="10424160" cy="658368"/>
+          </a:xfrm>
+          <a:prstGeom prst="roundRect">
+            <a:avLst/>
+          </a:prstGeom>
+          <a:solidFill>
+            <a:srgbClr val="F2F7FA"/>
+          </a:solidFill>
+          <a:ln w="13970">
+            <a:solidFill>
+              <a:srgbClr val="D6E0E7"/>
+            </a:solidFill>
+          </a:ln>
+        </p:spPr>
+        <p:style>
+          <a:lnRef idx="1">
+            <a:schemeClr val="accent1"/>
+          </a:lnRef>
+          <a:fillRef idx="3">
+            <a:schemeClr val="accent1"/>
+          </a:fillRef>
+          <a:effectRef idx="2">
+            <a:schemeClr val="accent1"/>
+          </a:effectRef>
+          <a:fontRef idx="minor">
+            <a:schemeClr val="lt1"/>
+          </a:fontRef>
+        </p:style>
+        <p:txBody>
+          <a:bodyPr rtlCol="0" anchor="ctr"/>
+          <a:lstStyle/>
+          <a:p>
+            <a:pPr algn="ctr"/>
+          </a:p>
+        </p:txBody>
+      </p:sp>
+      <p:sp>
+        <p:nvSpPr>
+          <p:cNvPr id="22" name="TextBox 21"/>
+          <p:cNvSpPr txBox="1"/>
+          <p:nvPr/>
+        </p:nvSpPr>
+        <p:spPr>
+          <a:xfrm>
+            <a:off x="1078992" y="4672584"/>
+            <a:ext cx="658368" cy="292608"/>
+          </a:xfrm>
+          <a:prstGeom prst="rect">
+            <a:avLst/>
+          </a:prstGeom>
+          <a:noFill/>
+        </p:spPr>
+        <p:txBody>
+          <a:bodyPr wrap="square" lIns="36576" rIns="36576" tIns="36576" bIns="36576" anchor="t">
+            <a:spAutoFit/>
+          </a:bodyPr>
+          <a:lstStyle/>
+          <a:p>
+            <a:pPr algn="l">
+              <a:spcAft>
+                <a:spcPts val="500"/>
+              </a:spcAft>
+              <a:defRPr sz="1600" b="1">
+                <a:solidFill>
+                  <a:srgbClr val="A6413E"/>
+                </a:solidFill>
+                <a:latin typeface="Aptos"/>
+              </a:defRPr>
+            </a:pPr>
+            <a:r>
+              <a:t>RQ5</a:t>
+            </a:r>
+          </a:p>
+        </p:txBody>
+      </p:sp>
+      <p:sp>
+        <p:nvSpPr>
+          <p:cNvPr id="23" name="TextBox 22"/>
+          <p:cNvSpPr txBox="1"/>
+          <p:nvPr/>
+        </p:nvSpPr>
+        <p:spPr>
+          <a:xfrm>
+            <a:off x="1847088" y="4654296"/>
+            <a:ext cx="3657600" cy="329184"/>
+          </a:xfrm>
+          <a:prstGeom prst="rect">
+            <a:avLst/>
+          </a:prstGeom>
+          <a:noFill/>
+        </p:spPr>
+        <p:txBody>
+          <a:bodyPr wrap="square" lIns="36576" rIns="36576" tIns="36576" bIns="36576" anchor="t">
+            <a:spAutoFit/>
+          </a:bodyPr>
+          <a:lstStyle/>
+          <a:p>
+            <a:pPr algn="l">
+              <a:spcAft>
+                <a:spcPts val="500"/>
+              </a:spcAft>
+              <a:defRPr sz="1500" b="1">
+                <a:solidFill>
+                  <a:srgbClr val="183452"/>
+                </a:solidFill>
+                <a:latin typeface="Aptos"/>
+              </a:defRPr>
+            </a:pPr>
+            <a:r>
+              <a:t>Explanation quality</a:t>
+            </a:r>
+          </a:p>
+        </p:txBody>
+      </p:sp>
+      <p:sp>
+        <p:nvSpPr>
+          <p:cNvPr id="24" name="TextBox 23"/>
+          <p:cNvSpPr txBox="1"/>
+          <p:nvPr/>
+        </p:nvSpPr>
+        <p:spPr>
+          <a:xfrm>
+            <a:off x="5669280" y="4654296"/>
+            <a:ext cx="5212080" cy="329184"/>
+          </a:xfrm>
+          <a:prstGeom prst="rect">
+            <a:avLst/>
+          </a:prstGeom>
+          <a:noFill/>
+        </p:spPr>
+        <p:txBody>
+          <a:bodyPr wrap="square" lIns="36576" rIns="36576" tIns="36576" bIns="36576" anchor="t">
+            <a:spAutoFit/>
+          </a:bodyPr>
+          <a:lstStyle/>
+          <a:p>
+            <a:pPr algn="l">
+              <a:spcAft>
+                <a:spcPts val="500"/>
+              </a:spcAft>
+              <a:defRPr sz="1450" b="0">
+                <a:solidFill>
+                  <a:srgbClr val="26313B"/>
+                </a:solidFill>
+                <a:latin typeface="Aptos"/>
+              </a:defRPr>
+            </a:pPr>
+            <a:r>
+              <a:t>Not tested with expert faithfulness review</a:t>
+            </a:r>
+          </a:p>
+        </p:txBody>
+      </p:sp>
+      <p:sp>
+        <p:nvSpPr>
+          <p:cNvPr id="25" name="TextBox 24"/>
+          <p:cNvSpPr txBox="1"/>
+          <p:nvPr/>
+        </p:nvSpPr>
+        <p:spPr>
+          <a:xfrm>
+            <a:off x="960120" y="5532120"/>
+            <a:ext cx="10195560" cy="429768"/>
           </a:xfrm>
           <a:prstGeom prst="rect">
             <a:avLst/>
@@ -8091,22 +8632,22 @@
               <a:spcAft>
                 <a:spcPts val="500"/>
               </a:spcAft>
-              <a:defRPr sz="2000" b="1">
-                <a:solidFill>
-                  <a:srgbClr val="183452"/>
-                </a:solidFill>
-                <a:latin typeface="Aptos"/>
-              </a:defRPr>
-            </a:pPr>
-            <a:r>
-              <a:t>A useful result is a disciplined shortlist—not a claim that ambiguity has been solved.</a:t>
-            </a:r>
-          </a:p>
-        </p:txBody>
-      </p:sp>
-      <p:sp>
-        <p:nvSpPr>
-          <p:cNvPr id="19" name="TextBox 18"/>
+              <a:defRPr sz="1500" b="1">
+                <a:solidFill>
+                  <a:srgbClr val="5B6974"/>
+                </a:solidFill>
+                <a:latin typeface="Aptos"/>
+              </a:defRPr>
+            </a:pPr>
+            <a:r>
+              <a:t>Qwen 8-shot AP 0.1960; fitted Qwen/TF–IDF/MiniLM V4 AP 0.3252 on their own 2,142-row cohort.</a:t>
+            </a:r>
+          </a:p>
+        </p:txBody>
+      </p:sp>
+      <p:sp>
+        <p:nvSpPr>
+          <p:cNvPr id="26" name="TextBox 25"/>
           <p:cNvSpPr txBox="1"/>
           <p:nvPr/>
         </p:nvSpPr>
@@ -8138,14 +8679,14 @@
               </a:defRPr>
             </a:pPr>
             <a:r>
-              <a:t>Source: results/final_summary/conclusions.md; project studies remain cohort-specific.</a:t>
-            </a:r>
-          </a:p>
-        </p:txBody>
-      </p:sp>
-      <p:sp>
-        <p:nvSpPr>
-          <p:cNvPr id="20" name="TextBox 19"/>
+              <a:t>Source: paper/main.tex, Answers to the Proposal Research Questions.</a:t>
+            </a:r>
+          </a:p>
+        </p:txBody>
+      </p:sp>
+      <p:sp>
+        <p:nvSpPr>
+          <p:cNvPr id="27" name="TextBox 26"/>
           <p:cNvSpPr txBox="1"/>
           <p:nvPr/>
         </p:nvSpPr>
@@ -8323,46 +8864,7 @@
       </p:sp>
       <p:sp>
         <p:nvSpPr>
-          <p:cNvPr id="5" name="TextBox 4"/>
-          <p:cNvSpPr txBox="1"/>
-          <p:nvPr/>
-        </p:nvSpPr>
-        <p:spPr>
-          <a:xfrm>
-            <a:off x="10744200" y="6492240"/>
-            <a:ext cx="777240" cy="201168"/>
-          </a:xfrm>
-          <a:prstGeom prst="rect">
-            <a:avLst/>
-          </a:prstGeom>
-          <a:noFill/>
-        </p:spPr>
-        <p:txBody>
-          <a:bodyPr wrap="square" lIns="36576" rIns="36576" tIns="36576" bIns="36576" anchor="t">
-            <a:spAutoFit/>
-          </a:bodyPr>
-          <a:lstStyle/>
-          <a:p>
-            <a:pPr algn="r">
-              <a:spcAft>
-                <a:spcPts val="500"/>
-              </a:spcAft>
-              <a:defRPr sz="900" b="0">
-                <a:solidFill>
-                  <a:srgbClr val="5B6974"/>
-                </a:solidFill>
-                <a:latin typeface="Aptos"/>
-              </a:defRPr>
-            </a:pPr>
-            <a:r>
-              <a:t>14  |  18</a:t>
-            </a:r>
-          </a:p>
-        </p:txBody>
-      </p:sp>
-      <p:sp>
-        <p:nvSpPr>
-          <p:cNvPr id="6" name="Rounded Rectangle 5"/>
+          <p:cNvPr id="5" name="Rounded Rectangle 4"/>
           <p:cNvSpPr/>
           <p:nvPr/>
         </p:nvSpPr>
@@ -8407,7 +8909,7 @@
       </p:sp>
       <p:sp>
         <p:nvSpPr>
-          <p:cNvPr id="7" name="TextBox 6"/>
+          <p:cNvPr id="6" name="TextBox 5"/>
           <p:cNvSpPr txBox="1"/>
           <p:nvPr/>
         </p:nvSpPr>
@@ -8446,7 +8948,7 @@
       </p:sp>
       <p:sp>
         <p:nvSpPr>
-          <p:cNvPr id="8" name="TextBox 7"/>
+          <p:cNvPr id="7" name="TextBox 6"/>
           <p:cNvSpPr txBox="1"/>
           <p:nvPr/>
         </p:nvSpPr>
@@ -8478,14 +8980,14 @@
               </a:defRPr>
             </a:pPr>
             <a:r>
-              <a:t>AI-assisted labels; no independent adjudicated expert gold.</a:t>
-            </a:r>
-          </a:p>
-        </p:txBody>
-      </p:sp>
-      <p:sp>
-        <p:nvSpPr>
-          <p:cNvPr id="9" name="Rounded Rectangle 8"/>
+              <a:t>Low-agreement AI-assisted labels; no adjudicated expert gold.</a:t>
+            </a:r>
+          </a:p>
+        </p:txBody>
+      </p:sp>
+      <p:sp>
+        <p:nvSpPr>
+          <p:cNvPr id="8" name="Rounded Rectangle 7"/>
           <p:cNvSpPr/>
           <p:nvPr/>
         </p:nvSpPr>
@@ -8530,7 +9032,7 @@
       </p:sp>
       <p:sp>
         <p:nvSpPr>
-          <p:cNvPr id="10" name="TextBox 9"/>
+          <p:cNvPr id="9" name="TextBox 8"/>
           <p:cNvSpPr txBox="1"/>
           <p:nvPr/>
         </p:nvSpPr>
@@ -8569,7 +9071,7 @@
       </p:sp>
       <p:sp>
         <p:nvSpPr>
-          <p:cNvPr id="11" name="TextBox 10"/>
+          <p:cNvPr id="10" name="TextBox 9"/>
           <p:cNvSpPr txBox="1"/>
           <p:nvPr/>
         </p:nvSpPr>
@@ -8608,7 +9110,7 @@
       </p:sp>
       <p:sp>
         <p:nvSpPr>
-          <p:cNvPr id="12" name="Rounded Rectangle 11"/>
+          <p:cNvPr id="11" name="Rounded Rectangle 10"/>
           <p:cNvSpPr/>
           <p:nvPr/>
         </p:nvSpPr>
@@ -8653,7 +9155,7 @@
       </p:sp>
       <p:sp>
         <p:nvSpPr>
-          <p:cNvPr id="13" name="TextBox 12"/>
+          <p:cNvPr id="12" name="TextBox 11"/>
           <p:cNvSpPr txBox="1"/>
           <p:nvPr/>
         </p:nvSpPr>
@@ -8692,7 +9194,7 @@
       </p:sp>
       <p:sp>
         <p:nvSpPr>
-          <p:cNvPr id="14" name="TextBox 13"/>
+          <p:cNvPr id="13" name="TextBox 12"/>
           <p:cNvSpPr txBox="1"/>
           <p:nvPr/>
         </p:nvSpPr>
@@ -8731,7 +9233,7 @@
       </p:sp>
       <p:sp>
         <p:nvSpPr>
-          <p:cNvPr id="15" name="Rounded Rectangle 14"/>
+          <p:cNvPr id="14" name="Rounded Rectangle 13"/>
           <p:cNvSpPr/>
           <p:nvPr/>
         </p:nvSpPr>
@@ -8776,7 +9278,7 @@
       </p:sp>
       <p:sp>
         <p:nvSpPr>
-          <p:cNvPr id="16" name="TextBox 15"/>
+          <p:cNvPr id="15" name="TextBox 14"/>
           <p:cNvSpPr txBox="1"/>
           <p:nvPr/>
         </p:nvSpPr>
@@ -8815,7 +9317,7 @@
       </p:sp>
       <p:sp>
         <p:nvSpPr>
-          <p:cNvPr id="17" name="TextBox 16"/>
+          <p:cNvPr id="16" name="TextBox 15"/>
           <p:cNvSpPr txBox="1"/>
           <p:nvPr/>
         </p:nvSpPr>
@@ -8854,7 +9356,7 @@
       </p:sp>
       <p:sp>
         <p:nvSpPr>
-          <p:cNvPr id="18" name="Rounded Rectangle 17"/>
+          <p:cNvPr id="17" name="Rounded Rectangle 16"/>
           <p:cNvSpPr/>
           <p:nvPr/>
         </p:nvSpPr>
@@ -8899,7 +9401,7 @@
       </p:sp>
       <p:sp>
         <p:nvSpPr>
-          <p:cNvPr id="19" name="TextBox 18"/>
+          <p:cNvPr id="18" name="TextBox 17"/>
           <p:cNvSpPr txBox="1"/>
           <p:nvPr/>
         </p:nvSpPr>
@@ -8938,7 +9440,7 @@
       </p:sp>
       <p:sp>
         <p:nvSpPr>
-          <p:cNvPr id="20" name="TextBox 19"/>
+          <p:cNvPr id="19" name="TextBox 18"/>
           <p:cNvSpPr txBox="1"/>
           <p:nvPr/>
         </p:nvSpPr>
@@ -8970,14 +9472,14 @@
               </a:defRPr>
             </a:pPr>
             <a:r>
-              <a:t>Reserved TCP and sealed DNS have not been evaluated.</a:t>
-            </a:r>
-          </a:p>
-        </p:txBody>
-      </p:sp>
-      <p:sp>
-        <p:nvSpPr>
-          <p:cNvPr id="21" name="TextBox 20"/>
+              <a:t>TCP and DNS entered the latest classical rerun; no untouched project holdout remains.</a:t>
+            </a:r>
+          </a:p>
+        </p:txBody>
+      </p:sp>
+      <p:sp>
+        <p:nvSpPr>
+          <p:cNvPr id="20" name="TextBox 19"/>
           <p:cNvSpPr txBox="1"/>
           <p:nvPr/>
         </p:nvSpPr>
@@ -9016,7 +9518,7 @@
       </p:sp>
       <p:sp>
         <p:nvSpPr>
-          <p:cNvPr id="22" name="TextBox 21"/>
+          <p:cNvPr id="21" name="TextBox 20"/>
           <p:cNvSpPr txBox="1"/>
           <p:nvPr/>
         </p:nvSpPr>
@@ -9055,7 +9557,7 @@
       </p:sp>
       <p:sp>
         <p:nvSpPr>
-          <p:cNvPr id="23" name="TextBox 22"/>
+          <p:cNvPr id="22" name="TextBox 21"/>
           <p:cNvSpPr txBox="1"/>
           <p:nvPr/>
         </p:nvSpPr>
@@ -9239,45 +9741,6 @@
         </p:nvSpPr>
         <p:spPr>
           <a:xfrm>
-            <a:off x="10744200" y="6492240"/>
-            <a:ext cx="777240" cy="201168"/>
-          </a:xfrm>
-          <a:prstGeom prst="rect">
-            <a:avLst/>
-          </a:prstGeom>
-          <a:noFill/>
-        </p:spPr>
-        <p:txBody>
-          <a:bodyPr wrap="square" lIns="36576" rIns="36576" tIns="36576" bIns="36576" anchor="t">
-            <a:spAutoFit/>
-          </a:bodyPr>
-          <a:lstStyle/>
-          <a:p>
-            <a:pPr algn="r">
-              <a:spcAft>
-                <a:spcPts val="500"/>
-              </a:spcAft>
-              <a:defRPr sz="900" b="0">
-                <a:solidFill>
-                  <a:srgbClr val="5B6974"/>
-                </a:solidFill>
-                <a:latin typeface="Aptos"/>
-              </a:defRPr>
-            </a:pPr>
-            <a:r>
-              <a:t>15  |  18</a:t>
-            </a:r>
-          </a:p>
-        </p:txBody>
-      </p:sp>
-      <p:sp>
-        <p:nvSpPr>
-          <p:cNvPr id="6" name="TextBox 5"/>
-          <p:cNvSpPr txBox="1"/>
-          <p:nvPr/>
-        </p:nvSpPr>
-        <p:spPr>
-          <a:xfrm>
             <a:off x="822960" y="1234440"/>
             <a:ext cx="5303520" cy="347472"/>
           </a:xfrm>
@@ -9311,7 +9774,7 @@
       </p:sp>
       <p:sp>
         <p:nvSpPr>
-          <p:cNvPr id="7" name="Rounded Rectangle 6"/>
+          <p:cNvPr id="6" name="Rounded Rectangle 5"/>
           <p:cNvSpPr/>
           <p:nvPr/>
         </p:nvSpPr>
@@ -9356,7 +9819,7 @@
       </p:sp>
       <p:sp>
         <p:nvSpPr>
-          <p:cNvPr id="8" name="TextBox 7"/>
+          <p:cNvPr id="7" name="TextBox 6"/>
           <p:cNvSpPr txBox="1"/>
           <p:nvPr/>
         </p:nvSpPr>
@@ -9395,7 +9858,7 @@
       </p:sp>
       <p:sp>
         <p:nvSpPr>
-          <p:cNvPr id="9" name="TextBox 8"/>
+          <p:cNvPr id="8" name="TextBox 7"/>
           <p:cNvSpPr txBox="1"/>
           <p:nvPr/>
         </p:nvSpPr>
@@ -9450,7 +9913,7 @@
       </p:sp>
       <p:sp>
         <p:nvSpPr>
-          <p:cNvPr id="10" name="Rounded Rectangle 9"/>
+          <p:cNvPr id="9" name="Rounded Rectangle 8"/>
           <p:cNvSpPr/>
           <p:nvPr/>
         </p:nvSpPr>
@@ -9495,7 +9958,7 @@
       </p:sp>
       <p:sp>
         <p:nvSpPr>
-          <p:cNvPr id="11" name="TextBox 10"/>
+          <p:cNvPr id="10" name="TextBox 9"/>
           <p:cNvSpPr txBox="1"/>
           <p:nvPr/>
         </p:nvSpPr>
@@ -9534,7 +9997,7 @@
       </p:sp>
       <p:sp>
         <p:nvSpPr>
-          <p:cNvPr id="12" name="TextBox 11"/>
+          <p:cNvPr id="11" name="TextBox 10"/>
           <p:cNvSpPr txBox="1"/>
           <p:nvPr/>
         </p:nvSpPr>
@@ -9589,7 +10052,7 @@
       </p:sp>
       <p:sp>
         <p:nvSpPr>
-          <p:cNvPr id="13" name="Rounded Rectangle 12"/>
+          <p:cNvPr id="12" name="Rounded Rectangle 11"/>
           <p:cNvSpPr/>
           <p:nvPr/>
         </p:nvSpPr>
@@ -9634,7 +10097,7 @@
       </p:sp>
       <p:sp>
         <p:nvSpPr>
-          <p:cNvPr id="14" name="TextBox 13"/>
+          <p:cNvPr id="13" name="TextBox 12"/>
           <p:cNvSpPr txBox="1"/>
           <p:nvPr/>
         </p:nvSpPr>
@@ -9673,7 +10136,7 @@
       </p:sp>
       <p:sp>
         <p:nvSpPr>
-          <p:cNvPr id="15" name="TextBox 14"/>
+          <p:cNvPr id="14" name="TextBox 13"/>
           <p:cNvSpPr txBox="1"/>
           <p:nvPr/>
         </p:nvSpPr>
@@ -9728,7 +10191,7 @@
       </p:sp>
       <p:sp>
         <p:nvSpPr>
-          <p:cNvPr id="16" name="Rounded Rectangle 15"/>
+          <p:cNvPr id="15" name="Rounded Rectangle 14"/>
           <p:cNvSpPr/>
           <p:nvPr/>
         </p:nvSpPr>
@@ -9773,7 +10236,7 @@
       </p:sp>
       <p:sp>
         <p:nvSpPr>
-          <p:cNvPr id="17" name="Rectangle 16"/>
+          <p:cNvPr id="16" name="Rectangle 15"/>
           <p:cNvSpPr/>
           <p:nvPr/>
         </p:nvSpPr>
@@ -9818,7 +10281,7 @@
       </p:sp>
       <p:sp>
         <p:nvSpPr>
-          <p:cNvPr id="18" name="TextBox 17"/>
+          <p:cNvPr id="17" name="TextBox 16"/>
           <p:cNvSpPr txBox="1"/>
           <p:nvPr/>
         </p:nvSpPr>
@@ -9857,7 +10320,7 @@
       </p:sp>
       <p:sp>
         <p:nvSpPr>
-          <p:cNvPr id="19" name="TextBox 18"/>
+          <p:cNvPr id="18" name="TextBox 17"/>
           <p:cNvSpPr txBox="1"/>
           <p:nvPr/>
         </p:nvSpPr>
@@ -9912,7 +10375,7 @@
       </p:sp>
       <p:sp>
         <p:nvSpPr>
-          <p:cNvPr id="20" name="Rounded Rectangle 19"/>
+          <p:cNvPr id="19" name="Rounded Rectangle 18"/>
           <p:cNvSpPr/>
           <p:nvPr/>
         </p:nvSpPr>
@@ -9957,7 +10420,7 @@
       </p:sp>
       <p:sp>
         <p:nvSpPr>
-          <p:cNvPr id="21" name="TextBox 20"/>
+          <p:cNvPr id="20" name="TextBox 19"/>
           <p:cNvSpPr txBox="1"/>
           <p:nvPr/>
         </p:nvSpPr>
@@ -9996,7 +10459,7 @@
       </p:sp>
       <p:sp>
         <p:nvSpPr>
-          <p:cNvPr id="22" name="TextBox 21"/>
+          <p:cNvPr id="21" name="TextBox 20"/>
           <p:cNvSpPr txBox="1"/>
           <p:nvPr/>
         </p:nvSpPr>
@@ -10035,7 +10498,7 @@
       </p:sp>
       <p:pic>
         <p:nvPicPr>
-          <p:cNvPr id="23" name="Picture 22" descr="gui_rfc9000_overview.png"/>
+          <p:cNvPr id="22" name="Picture 21" descr="gui_rfc9000_overview.png"/>
           <p:cNvPicPr>
             <a:picLocks noChangeAspect="1"/>
           </p:cNvPicPr>
@@ -10059,7 +10522,7 @@
       </p:pic>
       <p:sp>
         <p:nvSpPr>
-          <p:cNvPr id="24" name="TextBox 23"/>
+          <p:cNvPr id="23" name="TextBox 22"/>
           <p:cNvSpPr txBox="1"/>
           <p:nvPr/>
         </p:nvSpPr>
@@ -10098,7 +10561,7 @@
       </p:sp>
       <p:pic>
         <p:nvPicPr>
-          <p:cNvPr id="25" name="Picture 24" descr="gui_rfc9000_filtered_results.png"/>
+          <p:cNvPr id="24" name="Picture 23" descr="gui_rfc9000_filtered_results.png"/>
           <p:cNvPicPr>
             <a:picLocks noChangeAspect="1"/>
           </p:cNvPicPr>
@@ -10122,7 +10585,7 @@
       </p:pic>
       <p:sp>
         <p:nvSpPr>
-          <p:cNvPr id="26" name="TextBox 25"/>
+          <p:cNvPr id="25" name="TextBox 24"/>
           <p:cNvSpPr txBox="1"/>
           <p:nvPr/>
         </p:nvSpPr>
@@ -10161,7 +10624,7 @@
       </p:sp>
       <p:sp>
         <p:nvSpPr>
-          <p:cNvPr id="27" name="TextBox 26"/>
+          <p:cNvPr id="26" name="TextBox 25"/>
           <p:cNvSpPr txBox="1"/>
           <p:nvPr/>
         </p:nvSpPr>
@@ -10339,46 +10802,7 @@
       </p:sp>
       <p:sp>
         <p:nvSpPr>
-          <p:cNvPr id="5" name="TextBox 4"/>
-          <p:cNvSpPr txBox="1"/>
-          <p:nvPr/>
-        </p:nvSpPr>
-        <p:spPr>
-          <a:xfrm>
-            <a:off x="10744200" y="6492240"/>
-            <a:ext cx="777240" cy="201168"/>
-          </a:xfrm>
-          <a:prstGeom prst="rect">
-            <a:avLst/>
-          </a:prstGeom>
-          <a:noFill/>
-        </p:spPr>
-        <p:txBody>
-          <a:bodyPr wrap="square" lIns="36576" rIns="36576" tIns="36576" bIns="36576" anchor="t">
-            <a:spAutoFit/>
-          </a:bodyPr>
-          <a:lstStyle/>
-          <a:p>
-            <a:pPr algn="r">
-              <a:spcAft>
-                <a:spcPts val="500"/>
-              </a:spcAft>
-              <a:defRPr sz="900" b="0">
-                <a:solidFill>
-                  <a:srgbClr val="5B6974"/>
-                </a:solidFill>
-                <a:latin typeface="Aptos"/>
-              </a:defRPr>
-            </a:pPr>
-            <a:r>
-              <a:t>16  |  18</a:t>
-            </a:r>
-          </a:p>
-        </p:txBody>
-      </p:sp>
-      <p:sp>
-        <p:nvSpPr>
-          <p:cNvPr id="6" name="Rounded Rectangle 5"/>
+          <p:cNvPr id="5" name="Rounded Rectangle 4"/>
           <p:cNvSpPr/>
           <p:nvPr/>
         </p:nvSpPr>
@@ -10423,7 +10847,7 @@
       </p:sp>
       <p:sp>
         <p:nvSpPr>
-          <p:cNvPr id="7" name="Oval 6"/>
+          <p:cNvPr id="6" name="Oval 5"/>
           <p:cNvSpPr/>
           <p:nvPr/>
         </p:nvSpPr>
@@ -10466,7 +10890,7 @@
       </p:sp>
       <p:sp>
         <p:nvSpPr>
-          <p:cNvPr id="8" name="TextBox 7"/>
+          <p:cNvPr id="7" name="TextBox 6"/>
           <p:cNvSpPr txBox="1"/>
           <p:nvPr/>
         </p:nvSpPr>
@@ -10505,7 +10929,7 @@
       </p:sp>
       <p:sp>
         <p:nvSpPr>
-          <p:cNvPr id="9" name="TextBox 8"/>
+          <p:cNvPr id="8" name="TextBox 7"/>
           <p:cNvSpPr txBox="1"/>
           <p:nvPr/>
         </p:nvSpPr>
@@ -10544,7 +10968,7 @@
       </p:sp>
       <p:sp>
         <p:nvSpPr>
-          <p:cNvPr id="10" name="TextBox 9"/>
+          <p:cNvPr id="9" name="TextBox 8"/>
           <p:cNvSpPr txBox="1"/>
           <p:nvPr/>
         </p:nvSpPr>
@@ -10583,7 +11007,7 @@
       </p:sp>
       <p:sp>
         <p:nvSpPr>
-          <p:cNvPr id="11" name="Rounded Rectangle 10"/>
+          <p:cNvPr id="10" name="Rounded Rectangle 9"/>
           <p:cNvSpPr/>
           <p:nvPr/>
         </p:nvSpPr>
@@ -10628,7 +11052,7 @@
       </p:sp>
       <p:sp>
         <p:nvSpPr>
-          <p:cNvPr id="12" name="Oval 11"/>
+          <p:cNvPr id="11" name="Oval 10"/>
           <p:cNvSpPr/>
           <p:nvPr/>
         </p:nvSpPr>
@@ -10671,7 +11095,7 @@
       </p:sp>
       <p:sp>
         <p:nvSpPr>
-          <p:cNvPr id="13" name="TextBox 12"/>
+          <p:cNvPr id="12" name="TextBox 11"/>
           <p:cNvSpPr txBox="1"/>
           <p:nvPr/>
         </p:nvSpPr>
@@ -10710,7 +11134,7 @@
       </p:sp>
       <p:sp>
         <p:nvSpPr>
-          <p:cNvPr id="14" name="TextBox 13"/>
+          <p:cNvPr id="13" name="TextBox 12"/>
           <p:cNvSpPr txBox="1"/>
           <p:nvPr/>
         </p:nvSpPr>
@@ -10742,14 +11166,14 @@
               </a:defRPr>
             </a:pPr>
             <a:r>
-              <a:t>Freeze the comparison</a:t>
-            </a:r>
-          </a:p>
-        </p:txBody>
-      </p:sp>
-      <p:sp>
-        <p:nvSpPr>
-          <p:cNvPr id="15" name="TextBox 14"/>
+              <a:t>Stabilize estimates</a:t>
+            </a:r>
+          </a:p>
+        </p:txBody>
+      </p:sp>
+      <p:sp>
+        <p:nvSpPr>
+          <p:cNvPr id="14" name="TextBox 13"/>
           <p:cNvSpPr txBox="1"/>
           <p:nvPr/>
         </p:nvSpPr>
@@ -10781,14 +11205,14 @@
               </a:defRPr>
             </a:pPr>
             <a:r>
-              <a:t>Retrain classical and Qwen/hybrid on common labels and folds; repeat finalists across seeds.</a:t>
-            </a:r>
-          </a:p>
-        </p:txBody>
-      </p:sp>
-      <p:sp>
-        <p:nvSpPr>
-          <p:cNvPr id="16" name="Rounded Rectangle 15"/>
+              <a:t>Repeat selected transformers across seeds; compare common labels and folds.</a:t>
+            </a:r>
+          </a:p>
+        </p:txBody>
+      </p:sp>
+      <p:sp>
+        <p:nvSpPr>
+          <p:cNvPr id="15" name="Rounded Rectangle 14"/>
           <p:cNvSpPr/>
           <p:nvPr/>
         </p:nvSpPr>
@@ -10833,7 +11257,7 @@
       </p:sp>
       <p:sp>
         <p:nvSpPr>
-          <p:cNvPr id="17" name="Oval 16"/>
+          <p:cNvPr id="16" name="Oval 15"/>
           <p:cNvSpPr/>
           <p:nvPr/>
         </p:nvSpPr>
@@ -10876,7 +11300,7 @@
       </p:sp>
       <p:sp>
         <p:nvSpPr>
-          <p:cNvPr id="18" name="TextBox 17"/>
+          <p:cNvPr id="17" name="TextBox 16"/>
           <p:cNvSpPr txBox="1"/>
           <p:nvPr/>
         </p:nvSpPr>
@@ -10915,7 +11339,7 @@
       </p:sp>
       <p:sp>
         <p:nvSpPr>
-          <p:cNvPr id="19" name="TextBox 18"/>
+          <p:cNvPr id="18" name="TextBox 17"/>
           <p:cNvSpPr txBox="1"/>
           <p:nvPr/>
         </p:nvSpPr>
@@ -10947,14 +11371,14 @@
               </a:defRPr>
             </a:pPr>
             <a:r>
-              <a:t>Lock the protocol</a:t>
-            </a:r>
-          </a:p>
-        </p:txBody>
-      </p:sp>
-      <p:sp>
-        <p:nvSpPr>
-          <p:cNvPr id="20" name="TextBox 19"/>
+              <a:t>Finish open RQs</a:t>
+            </a:r>
+          </a:p>
+        </p:txBody>
+      </p:sp>
+      <p:sp>
+        <p:nvSpPr>
+          <p:cNvPr id="19" name="TextBox 18"/>
           <p:cNvSpPr txBox="1"/>
           <p:nvPr/>
         </p:nvSpPr>
@@ -10986,14 +11410,14 @@
               </a:defRPr>
             </a:pPr>
             <a:r>
-              <a:t>Pre-specify model, threshold, code snapshot, and analysis plan.</a:t>
-            </a:r>
-          </a:p>
-        </p:txBody>
-      </p:sp>
-      <p:sp>
-        <p:nvSpPr>
-          <p:cNvPr id="21" name="Rounded Rectangle 20"/>
+              <a:t>Implement conditional LLM routing; measure calls, latency, cost, calibration, and explanations.</a:t>
+            </a:r>
+          </a:p>
+        </p:txBody>
+      </p:sp>
+      <p:sp>
+        <p:nvSpPr>
+          <p:cNvPr id="20" name="Rounded Rectangle 19"/>
           <p:cNvSpPr/>
           <p:nvPr/>
         </p:nvSpPr>
@@ -11038,7 +11462,7 @@
       </p:sp>
       <p:sp>
         <p:nvSpPr>
-          <p:cNvPr id="22" name="Oval 21"/>
+          <p:cNvPr id="21" name="Oval 20"/>
           <p:cNvSpPr/>
           <p:nvPr/>
         </p:nvSpPr>
@@ -11081,7 +11505,7 @@
       </p:sp>
       <p:sp>
         <p:nvSpPr>
-          <p:cNvPr id="23" name="TextBox 22"/>
+          <p:cNvPr id="22" name="TextBox 21"/>
           <p:cNvSpPr txBox="1"/>
           <p:nvPr/>
         </p:nvSpPr>
@@ -11120,7 +11544,7 @@
       </p:sp>
       <p:sp>
         <p:nvSpPr>
-          <p:cNvPr id="24" name="TextBox 23"/>
+          <p:cNvPr id="23" name="TextBox 22"/>
           <p:cNvSpPr txBox="1"/>
           <p:nvPr/>
         </p:nvSpPr>
@@ -11152,14 +11576,14 @@
               </a:defRPr>
             </a:pPr>
             <a:r>
-              <a:t>Test transfer once</a:t>
-            </a:r>
-          </a:p>
-        </p:txBody>
-      </p:sp>
-      <p:sp>
-        <p:nvSpPr>
-          <p:cNvPr id="25" name="TextBox 24"/>
+              <a:t>Create a new holdout</a:t>
+            </a:r>
+          </a:p>
+        </p:txBody>
+      </p:sp>
+      <p:sp>
+        <p:nvSpPr>
+          <p:cNvPr id="24" name="TextBox 23"/>
           <p:cNvSpPr txBox="1"/>
           <p:nvPr/>
         </p:nvSpPr>
@@ -11191,14 +11615,14 @@
               </a:defRPr>
             </a:pPr>
             <a:r>
-              <a:t>Evaluate reserved TCP; then open DNS only after the decision rule is fixed.</a:t>
-            </a:r>
-          </a:p>
-        </p:txBody>
-      </p:sp>
-      <p:sp>
-        <p:nvSpPr>
-          <p:cNvPr id="26" name="TextBox 25"/>
+              <a:t>Pre-register unseen families or later time-sliced revisions for one final test.</a:t>
+            </a:r>
+          </a:p>
+        </p:txBody>
+      </p:sp>
+      <p:sp>
+        <p:nvSpPr>
+          <p:cNvPr id="25" name="TextBox 24"/>
           <p:cNvSpPr txBox="1"/>
           <p:nvPr/>
         </p:nvSpPr>
@@ -11230,14 +11654,14 @@
               </a:defRPr>
             </a:pPr>
             <a:r>
-              <a:t>Do not spend the sealed test set to tune the system. Keep it a final transfer check.</a:t>
-            </a:r>
-          </a:p>
-        </p:txBody>
-      </p:sp>
-      <p:sp>
-        <p:nvSpPr>
-          <p:cNvPr id="27" name="TextBox 26"/>
+              <a:t>The next evaluation must be genuinely untouched and used once after the model and analysis plan are frozen.</a:t>
+            </a:r>
+          </a:p>
+        </p:txBody>
+      </p:sp>
+      <p:sp>
+        <p:nvSpPr>
+          <p:cNvPr id="26" name="TextBox 25"/>
           <p:cNvSpPr txBox="1"/>
           <p:nvPr/>
         </p:nvSpPr>
@@ -11276,7 +11700,7 @@
       </p:sp>
       <p:sp>
         <p:nvSpPr>
-          <p:cNvPr id="28" name="TextBox 27"/>
+          <p:cNvPr id="27" name="TextBox 26"/>
           <p:cNvSpPr txBox="1"/>
           <p:nvPr/>
         </p:nvSpPr>
@@ -11454,46 +11878,7 @@
       </p:sp>
       <p:sp>
         <p:nvSpPr>
-          <p:cNvPr id="5" name="TextBox 4"/>
-          <p:cNvSpPr txBox="1"/>
-          <p:nvPr/>
-        </p:nvSpPr>
-        <p:spPr>
-          <a:xfrm>
-            <a:off x="10744200" y="6492240"/>
-            <a:ext cx="777240" cy="201168"/>
-          </a:xfrm>
-          <a:prstGeom prst="rect">
-            <a:avLst/>
-          </a:prstGeom>
-          <a:noFill/>
-        </p:spPr>
-        <p:txBody>
-          <a:bodyPr wrap="square" lIns="36576" rIns="36576" tIns="36576" bIns="36576" anchor="t">
-            <a:spAutoFit/>
-          </a:bodyPr>
-          <a:lstStyle/>
-          <a:p>
-            <a:pPr algn="r">
-              <a:spcAft>
-                <a:spcPts val="500"/>
-              </a:spcAft>
-              <a:defRPr sz="900" b="0">
-                <a:solidFill>
-                  <a:srgbClr val="5B6974"/>
-                </a:solidFill>
-                <a:latin typeface="Aptos"/>
-              </a:defRPr>
-            </a:pPr>
-            <a:r>
-              <a:t>17  |  18</a:t>
-            </a:r>
-          </a:p>
-        </p:txBody>
-      </p:sp>
-      <p:sp>
-        <p:nvSpPr>
-          <p:cNvPr id="6" name="Rounded Rectangle 5"/>
+          <p:cNvPr id="5" name="Rounded Rectangle 4"/>
           <p:cNvSpPr/>
           <p:nvPr/>
         </p:nvSpPr>
@@ -11538,7 +11923,7 @@
       </p:sp>
       <p:sp>
         <p:nvSpPr>
-          <p:cNvPr id="7" name="TextBox 6"/>
+          <p:cNvPr id="6" name="TextBox 5"/>
           <p:cNvSpPr txBox="1"/>
           <p:nvPr/>
         </p:nvSpPr>
@@ -11577,7 +11962,7 @@
       </p:sp>
       <p:sp>
         <p:nvSpPr>
-          <p:cNvPr id="8" name="Oval 7"/>
+          <p:cNvPr id="7" name="Oval 6"/>
           <p:cNvSpPr/>
           <p:nvPr/>
         </p:nvSpPr>
@@ -11620,7 +12005,7 @@
       </p:sp>
       <p:sp>
         <p:nvSpPr>
-          <p:cNvPr id="9" name="TextBox 8"/>
+          <p:cNvPr id="8" name="TextBox 7"/>
           <p:cNvSpPr txBox="1"/>
           <p:nvPr/>
         </p:nvSpPr>
@@ -11656,7 +12041,7 @@
       </p:sp>
       <p:sp>
         <p:nvSpPr>
-          <p:cNvPr id="10" name="TextBox 9"/>
+          <p:cNvPr id="9" name="TextBox 8"/>
           <p:cNvSpPr txBox="1"/>
           <p:nvPr/>
         </p:nvSpPr>
@@ -11695,7 +12080,7 @@
       </p:sp>
       <p:sp>
         <p:nvSpPr>
-          <p:cNvPr id="11" name="Oval 10"/>
+          <p:cNvPr id="10" name="Oval 9"/>
           <p:cNvSpPr/>
           <p:nvPr/>
         </p:nvSpPr>
@@ -11738,7 +12123,7 @@
       </p:sp>
       <p:sp>
         <p:nvSpPr>
-          <p:cNvPr id="12" name="TextBox 11"/>
+          <p:cNvPr id="11" name="TextBox 10"/>
           <p:cNvSpPr txBox="1"/>
           <p:nvPr/>
         </p:nvSpPr>
@@ -11774,7 +12159,7 @@
       </p:sp>
       <p:sp>
         <p:nvSpPr>
-          <p:cNvPr id="13" name="TextBox 12"/>
+          <p:cNvPr id="12" name="TextBox 11"/>
           <p:cNvSpPr txBox="1"/>
           <p:nvPr/>
         </p:nvSpPr>
@@ -11813,7 +12198,7 @@
       </p:sp>
       <p:sp>
         <p:nvSpPr>
-          <p:cNvPr id="14" name="Oval 13"/>
+          <p:cNvPr id="13" name="Oval 12"/>
           <p:cNvSpPr/>
           <p:nvPr/>
         </p:nvSpPr>
@@ -11856,7 +12241,7 @@
       </p:sp>
       <p:sp>
         <p:nvSpPr>
-          <p:cNvPr id="15" name="TextBox 14"/>
+          <p:cNvPr id="14" name="TextBox 13"/>
           <p:cNvSpPr txBox="1"/>
           <p:nvPr/>
         </p:nvSpPr>
@@ -11892,7 +12277,7 @@
       </p:sp>
       <p:sp>
         <p:nvSpPr>
-          <p:cNvPr id="16" name="TextBox 15"/>
+          <p:cNvPr id="15" name="TextBox 14"/>
           <p:cNvSpPr txBox="1"/>
           <p:nvPr/>
         </p:nvSpPr>
@@ -11924,14 +12309,14 @@
               </a:defRPr>
             </a:pPr>
             <a:r>
-              <a:t>Honest reporting of uncertainty, label limits, and unopened external tests</a:t>
-            </a:r>
-          </a:p>
-        </p:txBody>
-      </p:sp>
-      <p:sp>
-        <p:nvSpPr>
-          <p:cNvPr id="17" name="TextBox 16"/>
+              <a:t>Honest reporting of uncertainty, label limits, and the consumed project holdouts</a:t>
+            </a:r>
+          </a:p>
+        </p:txBody>
+      </p:sp>
+      <p:sp>
+        <p:nvSpPr>
+          <p:cNvPr id="16" name="TextBox 15"/>
           <p:cNvSpPr txBox="1"/>
           <p:nvPr/>
         </p:nvSpPr>
@@ -11970,7 +12355,7 @@
       </p:sp>
       <p:sp>
         <p:nvSpPr>
-          <p:cNvPr id="18" name="TextBox 17"/>
+          <p:cNvPr id="17" name="TextBox 16"/>
           <p:cNvSpPr txBox="1"/>
           <p:nvPr/>
         </p:nvSpPr>
@@ -12009,7 +12394,7 @@
       </p:sp>
       <p:sp>
         <p:nvSpPr>
-          <p:cNvPr id="19" name="TextBox 18"/>
+          <p:cNvPr id="18" name="TextBox 17"/>
           <p:cNvSpPr txBox="1"/>
           <p:nvPr/>
         </p:nvSpPr>
@@ -12193,45 +12578,6 @@
         </p:nvSpPr>
         <p:spPr>
           <a:xfrm>
-            <a:off x="10744200" y="6492240"/>
-            <a:ext cx="777240" cy="201168"/>
-          </a:xfrm>
-          <a:prstGeom prst="rect">
-            <a:avLst/>
-          </a:prstGeom>
-          <a:noFill/>
-        </p:spPr>
-        <p:txBody>
-          <a:bodyPr wrap="square" lIns="36576" rIns="36576" tIns="36576" bIns="36576" anchor="t">
-            <a:spAutoFit/>
-          </a:bodyPr>
-          <a:lstStyle/>
-          <a:p>
-            <a:pPr algn="r">
-              <a:spcAft>
-                <a:spcPts val="500"/>
-              </a:spcAft>
-              <a:defRPr sz="900" b="0">
-                <a:solidFill>
-                  <a:srgbClr val="5B6974"/>
-                </a:solidFill>
-                <a:latin typeface="Aptos"/>
-              </a:defRPr>
-            </a:pPr>
-            <a:r>
-              <a:t>18  |  18</a:t>
-            </a:r>
-          </a:p>
-        </p:txBody>
-      </p:sp>
-      <p:sp>
-        <p:nvSpPr>
-          <p:cNvPr id="6" name="TextBox 5"/>
-          <p:cNvSpPr txBox="1"/>
-          <p:nvPr/>
-        </p:nvSpPr>
-        <p:spPr>
-          <a:xfrm>
             <a:off x="868680" y="1261872"/>
             <a:ext cx="5760720" cy="987552"/>
           </a:xfrm>
@@ -12265,7 +12611,7 @@
       </p:sp>
       <p:sp>
         <p:nvSpPr>
-          <p:cNvPr id="7" name="TextBox 6"/>
+          <p:cNvPr id="6" name="TextBox 5"/>
           <p:cNvSpPr txBox="1"/>
           <p:nvPr/>
         </p:nvSpPr>
@@ -12304,7 +12650,7 @@
       </p:sp>
       <p:sp>
         <p:nvSpPr>
-          <p:cNvPr id="8" name="Rounded Rectangle 7"/>
+          <p:cNvPr id="7" name="Rounded Rectangle 6"/>
           <p:cNvSpPr/>
           <p:nvPr/>
         </p:nvSpPr>
@@ -12349,7 +12695,7 @@
       </p:sp>
       <p:sp>
         <p:nvSpPr>
-          <p:cNvPr id="9" name="TextBox 8"/>
+          <p:cNvPr id="8" name="TextBox 7"/>
           <p:cNvSpPr txBox="1"/>
           <p:nvPr/>
         </p:nvSpPr>
@@ -12388,7 +12734,7 @@
       </p:sp>
       <p:sp>
         <p:nvSpPr>
-          <p:cNvPr id="10" name="Oval 9"/>
+          <p:cNvPr id="9" name="Oval 8"/>
           <p:cNvSpPr/>
           <p:nvPr/>
         </p:nvSpPr>
@@ -12431,7 +12777,7 @@
       </p:sp>
       <p:sp>
         <p:nvSpPr>
-          <p:cNvPr id="11" name="TextBox 10"/>
+          <p:cNvPr id="10" name="TextBox 9"/>
           <p:cNvSpPr txBox="1"/>
           <p:nvPr/>
         </p:nvSpPr>
@@ -12467,7 +12813,7 @@
       </p:sp>
       <p:sp>
         <p:nvSpPr>
-          <p:cNvPr id="12" name="TextBox 11"/>
+          <p:cNvPr id="11" name="TextBox 10"/>
           <p:cNvSpPr txBox="1"/>
           <p:nvPr/>
         </p:nvSpPr>
@@ -12506,7 +12852,7 @@
       </p:sp>
       <p:sp>
         <p:nvSpPr>
-          <p:cNvPr id="13" name="Oval 12"/>
+          <p:cNvPr id="12" name="Oval 11"/>
           <p:cNvSpPr/>
           <p:nvPr/>
         </p:nvSpPr>
@@ -12549,7 +12895,7 @@
       </p:sp>
       <p:sp>
         <p:nvSpPr>
-          <p:cNvPr id="14" name="TextBox 13"/>
+          <p:cNvPr id="13" name="TextBox 12"/>
           <p:cNvSpPr txBox="1"/>
           <p:nvPr/>
         </p:nvSpPr>
@@ -12585,7 +12931,7 @@
       </p:sp>
       <p:sp>
         <p:nvSpPr>
-          <p:cNvPr id="15" name="TextBox 14"/>
+          <p:cNvPr id="14" name="TextBox 13"/>
           <p:cNvSpPr txBox="1"/>
           <p:nvPr/>
         </p:nvSpPr>
@@ -12624,7 +12970,7 @@
       </p:sp>
       <p:sp>
         <p:nvSpPr>
-          <p:cNvPr id="16" name="Oval 15"/>
+          <p:cNvPr id="15" name="Oval 14"/>
           <p:cNvSpPr/>
           <p:nvPr/>
         </p:nvSpPr>
@@ -12667,7 +13013,7 @@
       </p:sp>
       <p:sp>
         <p:nvSpPr>
-          <p:cNvPr id="17" name="TextBox 16"/>
+          <p:cNvPr id="16" name="TextBox 15"/>
           <p:cNvSpPr txBox="1"/>
           <p:nvPr/>
         </p:nvSpPr>
@@ -12703,7 +13049,7 @@
       </p:sp>
       <p:sp>
         <p:nvSpPr>
-          <p:cNvPr id="18" name="TextBox 17"/>
+          <p:cNvPr id="17" name="TextBox 16"/>
           <p:cNvSpPr txBox="1"/>
           <p:nvPr/>
         </p:nvSpPr>
@@ -12742,7 +13088,7 @@
       </p:sp>
       <p:sp>
         <p:nvSpPr>
-          <p:cNvPr id="19" name="Oval 18"/>
+          <p:cNvPr id="18" name="Oval 17"/>
           <p:cNvSpPr/>
           <p:nvPr/>
         </p:nvSpPr>
@@ -12785,7 +13131,7 @@
       </p:sp>
       <p:sp>
         <p:nvSpPr>
-          <p:cNvPr id="20" name="TextBox 19"/>
+          <p:cNvPr id="19" name="TextBox 18"/>
           <p:cNvSpPr txBox="1"/>
           <p:nvPr/>
         </p:nvSpPr>
@@ -12821,7 +13167,7 @@
       </p:sp>
       <p:sp>
         <p:nvSpPr>
-          <p:cNvPr id="21" name="TextBox 20"/>
+          <p:cNvPr id="20" name="TextBox 19"/>
           <p:cNvSpPr txBox="1"/>
           <p:nvPr/>
         </p:nvSpPr>
@@ -12860,7 +13206,7 @@
       </p:sp>
       <p:sp>
         <p:nvSpPr>
-          <p:cNvPr id="22" name="TextBox 21"/>
+          <p:cNvPr id="21" name="TextBox 20"/>
           <p:cNvSpPr txBox="1"/>
           <p:nvPr/>
         </p:nvSpPr>
@@ -12899,7 +13245,7 @@
       </p:sp>
       <p:sp>
         <p:nvSpPr>
-          <p:cNvPr id="23" name="TextBox 22"/>
+          <p:cNvPr id="22" name="TextBox 21"/>
           <p:cNvSpPr txBox="1"/>
           <p:nvPr/>
         </p:nvSpPr>
@@ -12938,7 +13284,7 @@
       </p:sp>
       <p:sp>
         <p:nvSpPr>
-          <p:cNvPr id="24" name="TextBox 23"/>
+          <p:cNvPr id="23" name="TextBox 22"/>
           <p:cNvSpPr txBox="1"/>
           <p:nvPr/>
         </p:nvSpPr>
@@ -13122,45 +13468,6 @@
         </p:nvSpPr>
         <p:spPr>
           <a:xfrm>
-            <a:off x="10744200" y="6492240"/>
-            <a:ext cx="777240" cy="201168"/>
-          </a:xfrm>
-          <a:prstGeom prst="rect">
-            <a:avLst/>
-          </a:prstGeom>
-          <a:noFill/>
-        </p:spPr>
-        <p:txBody>
-          <a:bodyPr wrap="square" lIns="36576" rIns="36576" tIns="36576" bIns="36576" anchor="t">
-            <a:spAutoFit/>
-          </a:bodyPr>
-          <a:lstStyle/>
-          <a:p>
-            <a:pPr algn="r">
-              <a:spcAft>
-                <a:spcPts val="500"/>
-              </a:spcAft>
-              <a:defRPr sz="900" b="0">
-                <a:solidFill>
-                  <a:srgbClr val="5B6974"/>
-                </a:solidFill>
-                <a:latin typeface="Aptos"/>
-              </a:defRPr>
-            </a:pPr>
-            <a:r>
-              <a:t>02  |  18</a:t>
-            </a:r>
-          </a:p>
-        </p:txBody>
-      </p:sp>
-      <p:sp>
-        <p:nvSpPr>
-          <p:cNvPr id="6" name="TextBox 5"/>
-          <p:cNvSpPr txBox="1"/>
-          <p:nvPr/>
-        </p:nvSpPr>
-        <p:spPr>
-          <a:xfrm>
             <a:off x="822960" y="1170432"/>
             <a:ext cx="10515600" cy="502920"/>
           </a:xfrm>
@@ -13194,7 +13501,7 @@
       </p:sp>
       <p:sp>
         <p:nvSpPr>
-          <p:cNvPr id="7" name="Rounded Rectangle 6"/>
+          <p:cNvPr id="6" name="Rounded Rectangle 5"/>
           <p:cNvSpPr/>
           <p:nvPr/>
         </p:nvSpPr>
@@ -13239,7 +13546,7 @@
       </p:sp>
       <p:sp>
         <p:nvSpPr>
-          <p:cNvPr id="8" name="TextBox 7"/>
+          <p:cNvPr id="7" name="TextBox 6"/>
           <p:cNvSpPr txBox="1"/>
           <p:nvPr/>
         </p:nvSpPr>
@@ -13276,6 +13583,41 @@
           </a:p>
         </p:txBody>
       </p:sp>
+      <p:cxnSp>
+        <p:nvCxnSpPr>
+          <p:cNvPr id="8" name="Connector 7"/>
+          <p:cNvCxnSpPr/>
+          <p:nvPr/>
+        </p:nvCxnSpPr>
+        <p:spPr>
+          <a:xfrm>
+            <a:off x="6080760" y="2926080"/>
+            <a:ext cx="0" cy="320040"/>
+          </a:xfrm>
+          <a:prstGeom prst="line">
+            <a:avLst/>
+          </a:prstGeom>
+          <a:ln w="19050">
+            <a:solidFill>
+              <a:srgbClr val="2D6596"/>
+            </a:solidFill>
+          </a:ln>
+        </p:spPr>
+        <p:style>
+          <a:lnRef idx="2">
+            <a:schemeClr val="accent1"/>
+          </a:lnRef>
+          <a:fillRef idx="0">
+            <a:schemeClr val="accent1"/>
+          </a:fillRef>
+          <a:effectRef idx="1">
+            <a:schemeClr val="accent1"/>
+          </a:effectRef>
+          <a:fontRef idx="minor">
+            <a:schemeClr val="tx1"/>
+          </a:fontRef>
+        </p:style>
+      </p:cxnSp>
       <p:cxnSp>
         <p:nvCxnSpPr>
           <p:cNvPr id="9" name="Connector 8"/>
@@ -13284,8 +13626,8 @@
         </p:nvCxnSpPr>
         <p:spPr>
           <a:xfrm>
-            <a:off x="6080760" y="2926080"/>
-            <a:ext cx="0" cy="320040"/>
+            <a:off x="2514600" y="3246120"/>
+            <a:ext cx="7132320" cy="0"/>
           </a:xfrm>
           <a:prstGeom prst="line">
             <a:avLst/>
@@ -13320,12 +13662,12 @@
         <p:spPr>
           <a:xfrm>
             <a:off x="2514600" y="3246120"/>
-            <a:ext cx="7132320" cy="0"/>
+            <a:ext cx="0" cy="301752"/>
           </a:xfrm>
           <a:prstGeom prst="line">
             <a:avLst/>
           </a:prstGeom>
-          <a:ln w="19050">
+          <a:ln w="16510">
             <a:solidFill>
               <a:srgbClr val="2D6596"/>
             </a:solidFill>
@@ -13346,44 +13688,9 @@
           </a:fontRef>
         </p:style>
       </p:cxnSp>
-      <p:cxnSp>
-        <p:nvCxnSpPr>
-          <p:cNvPr id="11" name="Connector 10"/>
-          <p:cNvCxnSpPr/>
-          <p:nvPr/>
-        </p:nvCxnSpPr>
-        <p:spPr>
-          <a:xfrm>
-            <a:off x="2514600" y="3246120"/>
-            <a:ext cx="0" cy="301752"/>
-          </a:xfrm>
-          <a:prstGeom prst="line">
-            <a:avLst/>
-          </a:prstGeom>
-          <a:ln w="16510">
-            <a:solidFill>
-              <a:srgbClr val="2D6596"/>
-            </a:solidFill>
-          </a:ln>
-        </p:spPr>
-        <p:style>
-          <a:lnRef idx="2">
-            <a:schemeClr val="accent1"/>
-          </a:lnRef>
-          <a:fillRef idx="0">
-            <a:schemeClr val="accent1"/>
-          </a:fillRef>
-          <a:effectRef idx="1">
-            <a:schemeClr val="accent1"/>
-          </a:effectRef>
-          <a:fontRef idx="minor">
-            <a:schemeClr val="tx1"/>
-          </a:fontRef>
-        </p:style>
-      </p:cxnSp>
-      <p:sp>
-        <p:nvSpPr>
-          <p:cNvPr id="12" name="Rounded Rectangle 11"/>
+      <p:sp>
+        <p:nvSpPr>
+          <p:cNvPr id="11" name="Rounded Rectangle 10"/>
           <p:cNvSpPr/>
           <p:nvPr/>
         </p:nvSpPr>
@@ -13428,7 +13735,7 @@
       </p:sp>
       <p:sp>
         <p:nvSpPr>
-          <p:cNvPr id="13" name="TextBox 12"/>
+          <p:cNvPr id="12" name="TextBox 11"/>
           <p:cNvSpPr txBox="1"/>
           <p:nvPr/>
         </p:nvSpPr>
@@ -13467,7 +13774,7 @@
       </p:sp>
       <p:sp>
         <p:nvSpPr>
-          <p:cNvPr id="14" name="TextBox 13"/>
+          <p:cNvPr id="13" name="TextBox 12"/>
           <p:cNvSpPr txBox="1"/>
           <p:nvPr/>
         </p:nvSpPr>
@@ -13522,7 +13829,7 @@
       </p:sp>
       <p:cxnSp>
         <p:nvCxnSpPr>
-          <p:cNvPr id="15" name="Connector 14"/>
+          <p:cNvPr id="14" name="Connector 13"/>
           <p:cNvCxnSpPr/>
           <p:nvPr/>
         </p:nvCxnSpPr>
@@ -13557,7 +13864,7 @@
       </p:cxnSp>
       <p:sp>
         <p:nvSpPr>
-          <p:cNvPr id="16" name="Rounded Rectangle 15"/>
+          <p:cNvPr id="15" name="Rounded Rectangle 14"/>
           <p:cNvSpPr/>
           <p:nvPr/>
         </p:nvSpPr>
@@ -13602,7 +13909,7 @@
       </p:sp>
       <p:sp>
         <p:nvSpPr>
-          <p:cNvPr id="17" name="TextBox 16"/>
+          <p:cNvPr id="16" name="TextBox 15"/>
           <p:cNvSpPr txBox="1"/>
           <p:nvPr/>
         </p:nvSpPr>
@@ -13641,7 +13948,7 @@
       </p:sp>
       <p:sp>
         <p:nvSpPr>
-          <p:cNvPr id="18" name="TextBox 17"/>
+          <p:cNvPr id="17" name="TextBox 16"/>
           <p:cNvSpPr txBox="1"/>
           <p:nvPr/>
         </p:nvSpPr>
@@ -13696,7 +14003,7 @@
       </p:sp>
       <p:cxnSp>
         <p:nvCxnSpPr>
-          <p:cNvPr id="19" name="Connector 18"/>
+          <p:cNvPr id="18" name="Connector 17"/>
           <p:cNvCxnSpPr/>
           <p:nvPr/>
         </p:nvCxnSpPr>
@@ -13731,7 +14038,7 @@
       </p:cxnSp>
       <p:sp>
         <p:nvSpPr>
-          <p:cNvPr id="20" name="Rounded Rectangle 19"/>
+          <p:cNvPr id="19" name="Rounded Rectangle 18"/>
           <p:cNvSpPr/>
           <p:nvPr/>
         </p:nvSpPr>
@@ -13776,7 +14083,7 @@
       </p:sp>
       <p:sp>
         <p:nvSpPr>
-          <p:cNvPr id="21" name="TextBox 20"/>
+          <p:cNvPr id="20" name="TextBox 19"/>
           <p:cNvSpPr txBox="1"/>
           <p:nvPr/>
         </p:nvSpPr>
@@ -13815,7 +14122,7 @@
       </p:sp>
       <p:sp>
         <p:nvSpPr>
-          <p:cNvPr id="22" name="TextBox 21"/>
+          <p:cNvPr id="21" name="TextBox 20"/>
           <p:cNvSpPr txBox="1"/>
           <p:nvPr/>
         </p:nvSpPr>
@@ -13870,7 +14177,7 @@
       </p:sp>
       <p:sp>
         <p:nvSpPr>
-          <p:cNvPr id="23" name="TextBox 22"/>
+          <p:cNvPr id="22" name="TextBox 21"/>
           <p:cNvSpPr txBox="1"/>
           <p:nvPr/>
         </p:nvSpPr>
@@ -13909,7 +14216,7 @@
       </p:sp>
       <p:sp>
         <p:nvSpPr>
-          <p:cNvPr id="24" name="TextBox 23"/>
+          <p:cNvPr id="23" name="TextBox 22"/>
           <p:cNvSpPr txBox="1"/>
           <p:nvPr/>
         </p:nvSpPr>
@@ -13948,7 +14255,7 @@
       </p:sp>
       <p:sp>
         <p:nvSpPr>
-          <p:cNvPr id="25" name="TextBox 24"/>
+          <p:cNvPr id="24" name="TextBox 23"/>
           <p:cNvSpPr txBox="1"/>
           <p:nvPr/>
         </p:nvSpPr>
@@ -14126,46 +14433,7 @@
       </p:sp>
       <p:sp>
         <p:nvSpPr>
-          <p:cNvPr id="5" name="TextBox 4"/>
-          <p:cNvSpPr txBox="1"/>
-          <p:nvPr/>
-        </p:nvSpPr>
-        <p:spPr>
-          <a:xfrm>
-            <a:off x="10744200" y="6492240"/>
-            <a:ext cx="777240" cy="201168"/>
-          </a:xfrm>
-          <a:prstGeom prst="rect">
-            <a:avLst/>
-          </a:prstGeom>
-          <a:noFill/>
-        </p:spPr>
-        <p:txBody>
-          <a:bodyPr wrap="square" lIns="36576" rIns="36576" tIns="36576" bIns="36576" anchor="t">
-            <a:spAutoFit/>
-          </a:bodyPr>
-          <a:lstStyle/>
-          <a:p>
-            <a:pPr algn="r">
-              <a:spcAft>
-                <a:spcPts val="500"/>
-              </a:spcAft>
-              <a:defRPr sz="900" b="0">
-                <a:solidFill>
-                  <a:srgbClr val="5B6974"/>
-                </a:solidFill>
-                <a:latin typeface="Aptos"/>
-              </a:defRPr>
-            </a:pPr>
-            <a:r>
-              <a:t>03  |  18</a:t>
-            </a:r>
-          </a:p>
-        </p:txBody>
-      </p:sp>
-      <p:sp>
-        <p:nvSpPr>
-          <p:cNvPr id="6" name="Rounded Rectangle 5"/>
+          <p:cNvPr id="5" name="Rounded Rectangle 4"/>
           <p:cNvSpPr/>
           <p:nvPr/>
         </p:nvSpPr>
@@ -14210,7 +14478,7 @@
       </p:sp>
       <p:sp>
         <p:nvSpPr>
-          <p:cNvPr id="7" name="TextBox 6"/>
+          <p:cNvPr id="6" name="TextBox 5"/>
           <p:cNvSpPr txBox="1"/>
           <p:nvPr/>
         </p:nvSpPr>
@@ -14249,7 +14517,7 @@
       </p:sp>
       <p:sp>
         <p:nvSpPr>
-          <p:cNvPr id="8" name="Rounded Rectangle 7"/>
+          <p:cNvPr id="7" name="Rounded Rectangle 6"/>
           <p:cNvSpPr/>
           <p:nvPr/>
         </p:nvSpPr>
@@ -14294,7 +14562,7 @@
       </p:sp>
       <p:sp>
         <p:nvSpPr>
-          <p:cNvPr id="9" name="Rectangle 8"/>
+          <p:cNvPr id="8" name="Rectangle 7"/>
           <p:cNvSpPr/>
           <p:nvPr/>
         </p:nvSpPr>
@@ -14339,7 +14607,7 @@
       </p:sp>
       <p:sp>
         <p:nvSpPr>
-          <p:cNvPr id="10" name="TextBox 9"/>
+          <p:cNvPr id="9" name="TextBox 8"/>
           <p:cNvSpPr txBox="1"/>
           <p:nvPr/>
         </p:nvSpPr>
@@ -14378,7 +14646,7 @@
       </p:sp>
       <p:sp>
         <p:nvSpPr>
-          <p:cNvPr id="11" name="TextBox 10"/>
+          <p:cNvPr id="10" name="TextBox 9"/>
           <p:cNvSpPr txBox="1"/>
           <p:nvPr/>
         </p:nvSpPr>
@@ -14417,7 +14685,7 @@
       </p:sp>
       <p:sp>
         <p:nvSpPr>
-          <p:cNvPr id="12" name="Rounded Rectangle 11"/>
+          <p:cNvPr id="11" name="Rounded Rectangle 10"/>
           <p:cNvSpPr/>
           <p:nvPr/>
         </p:nvSpPr>
@@ -14462,7 +14730,7 @@
       </p:sp>
       <p:sp>
         <p:nvSpPr>
-          <p:cNvPr id="13" name="Rectangle 12"/>
+          <p:cNvPr id="12" name="Rectangle 11"/>
           <p:cNvSpPr/>
           <p:nvPr/>
         </p:nvSpPr>
@@ -14507,7 +14775,7 @@
       </p:sp>
       <p:sp>
         <p:nvSpPr>
-          <p:cNvPr id="14" name="TextBox 13"/>
+          <p:cNvPr id="13" name="TextBox 12"/>
           <p:cNvSpPr txBox="1"/>
           <p:nvPr/>
         </p:nvSpPr>
@@ -14546,7 +14814,7 @@
       </p:sp>
       <p:sp>
         <p:nvSpPr>
-          <p:cNvPr id="15" name="TextBox 14"/>
+          <p:cNvPr id="14" name="TextBox 13"/>
           <p:cNvSpPr txBox="1"/>
           <p:nvPr/>
         </p:nvSpPr>
@@ -14585,7 +14853,7 @@
       </p:sp>
       <p:sp>
         <p:nvSpPr>
-          <p:cNvPr id="16" name="Rounded Rectangle 15"/>
+          <p:cNvPr id="15" name="Rounded Rectangle 14"/>
           <p:cNvSpPr/>
           <p:nvPr/>
         </p:nvSpPr>
@@ -14630,7 +14898,7 @@
       </p:sp>
       <p:sp>
         <p:nvSpPr>
-          <p:cNvPr id="17" name="Rectangle 16"/>
+          <p:cNvPr id="16" name="Rectangle 15"/>
           <p:cNvSpPr/>
           <p:nvPr/>
         </p:nvSpPr>
@@ -14675,7 +14943,7 @@
       </p:sp>
       <p:sp>
         <p:nvSpPr>
-          <p:cNvPr id="18" name="TextBox 17"/>
+          <p:cNvPr id="17" name="TextBox 16"/>
           <p:cNvSpPr txBox="1"/>
           <p:nvPr/>
         </p:nvSpPr>
@@ -14714,7 +14982,7 @@
       </p:sp>
       <p:sp>
         <p:nvSpPr>
-          <p:cNvPr id="19" name="TextBox 18"/>
+          <p:cNvPr id="18" name="TextBox 17"/>
           <p:cNvSpPr txBox="1"/>
           <p:nvPr/>
         </p:nvSpPr>
@@ -14753,7 +15021,7 @@
       </p:sp>
       <p:sp>
         <p:nvSpPr>
-          <p:cNvPr id="20" name="TextBox 19"/>
+          <p:cNvPr id="19" name="TextBox 18"/>
           <p:cNvSpPr txBox="1"/>
           <p:nvPr/>
         </p:nvSpPr>
@@ -14792,7 +15060,7 @@
       </p:sp>
       <p:sp>
         <p:nvSpPr>
-          <p:cNvPr id="21" name="TextBox 20"/>
+          <p:cNvPr id="20" name="TextBox 19"/>
           <p:cNvSpPr txBox="1"/>
           <p:nvPr/>
         </p:nvSpPr>
@@ -14831,7 +15099,7 @@
       </p:sp>
       <p:sp>
         <p:nvSpPr>
-          <p:cNvPr id="22" name="TextBox 21"/>
+          <p:cNvPr id="21" name="TextBox 20"/>
           <p:cNvSpPr txBox="1"/>
           <p:nvPr/>
         </p:nvSpPr>
@@ -15009,46 +15277,7 @@
       </p:sp>
       <p:sp>
         <p:nvSpPr>
-          <p:cNvPr id="5" name="TextBox 4"/>
-          <p:cNvSpPr txBox="1"/>
-          <p:nvPr/>
-        </p:nvSpPr>
-        <p:spPr>
-          <a:xfrm>
-            <a:off x="10744200" y="6492240"/>
-            <a:ext cx="777240" cy="201168"/>
-          </a:xfrm>
-          <a:prstGeom prst="rect">
-            <a:avLst/>
-          </a:prstGeom>
-          <a:noFill/>
-        </p:spPr>
-        <p:txBody>
-          <a:bodyPr wrap="square" lIns="36576" rIns="36576" tIns="36576" bIns="36576" anchor="t">
-            <a:spAutoFit/>
-          </a:bodyPr>
-          <a:lstStyle/>
-          <a:p>
-            <a:pPr algn="r">
-              <a:spcAft>
-                <a:spcPts val="500"/>
-              </a:spcAft>
-              <a:defRPr sz="900" b="0">
-                <a:solidFill>
-                  <a:srgbClr val="5B6974"/>
-                </a:solidFill>
-                <a:latin typeface="Aptos"/>
-              </a:defRPr>
-            </a:pPr>
-            <a:r>
-              <a:t>04  |  18</a:t>
-            </a:r>
-          </a:p>
-        </p:txBody>
-      </p:sp>
-      <p:sp>
-        <p:nvSpPr>
-          <p:cNvPr id="6" name="Rounded Rectangle 5"/>
+          <p:cNvPr id="5" name="Rounded Rectangle 4"/>
           <p:cNvSpPr/>
           <p:nvPr/>
         </p:nvSpPr>
@@ -15093,7 +15322,7 @@
       </p:sp>
       <p:sp>
         <p:nvSpPr>
-          <p:cNvPr id="7" name="Rectangle 6"/>
+          <p:cNvPr id="6" name="Rectangle 5"/>
           <p:cNvSpPr/>
           <p:nvPr/>
         </p:nvSpPr>
@@ -15138,7 +15367,7 @@
       </p:sp>
       <p:sp>
         <p:nvSpPr>
-          <p:cNvPr id="8" name="TextBox 7"/>
+          <p:cNvPr id="7" name="TextBox 6"/>
           <p:cNvSpPr txBox="1"/>
           <p:nvPr/>
         </p:nvSpPr>
@@ -15177,7 +15406,7 @@
       </p:sp>
       <p:sp>
         <p:nvSpPr>
-          <p:cNvPr id="9" name="TextBox 8"/>
+          <p:cNvPr id="8" name="TextBox 7"/>
           <p:cNvSpPr txBox="1"/>
           <p:nvPr/>
         </p:nvSpPr>
@@ -15216,7 +15445,7 @@
       </p:sp>
       <p:sp>
         <p:nvSpPr>
-          <p:cNvPr id="10" name="Rounded Rectangle 9"/>
+          <p:cNvPr id="9" name="Rounded Rectangle 8"/>
           <p:cNvSpPr/>
           <p:nvPr/>
         </p:nvSpPr>
@@ -15261,7 +15490,7 @@
       </p:sp>
       <p:sp>
         <p:nvSpPr>
-          <p:cNvPr id="11" name="Rectangle 10"/>
+          <p:cNvPr id="10" name="Rectangle 9"/>
           <p:cNvSpPr/>
           <p:nvPr/>
         </p:nvSpPr>
@@ -15306,7 +15535,7 @@
       </p:sp>
       <p:sp>
         <p:nvSpPr>
-          <p:cNvPr id="12" name="TextBox 11"/>
+          <p:cNvPr id="11" name="TextBox 10"/>
           <p:cNvSpPr txBox="1"/>
           <p:nvPr/>
         </p:nvSpPr>
@@ -15345,7 +15574,7 @@
       </p:sp>
       <p:sp>
         <p:nvSpPr>
-          <p:cNvPr id="13" name="TextBox 12"/>
+          <p:cNvPr id="12" name="TextBox 11"/>
           <p:cNvSpPr txBox="1"/>
           <p:nvPr/>
         </p:nvSpPr>
@@ -15384,7 +15613,7 @@
       </p:sp>
       <p:sp>
         <p:nvSpPr>
-          <p:cNvPr id="14" name="Rounded Rectangle 13"/>
+          <p:cNvPr id="13" name="Rounded Rectangle 12"/>
           <p:cNvSpPr/>
           <p:nvPr/>
         </p:nvSpPr>
@@ -15429,7 +15658,7 @@
       </p:sp>
       <p:sp>
         <p:nvSpPr>
-          <p:cNvPr id="15" name="Rectangle 14"/>
+          <p:cNvPr id="14" name="Rectangle 13"/>
           <p:cNvSpPr/>
           <p:nvPr/>
         </p:nvSpPr>
@@ -15474,7 +15703,7 @@
       </p:sp>
       <p:sp>
         <p:nvSpPr>
-          <p:cNvPr id="16" name="TextBox 15"/>
+          <p:cNvPr id="15" name="TextBox 14"/>
           <p:cNvSpPr txBox="1"/>
           <p:nvPr/>
         </p:nvSpPr>
@@ -15513,7 +15742,7 @@
       </p:sp>
       <p:sp>
         <p:nvSpPr>
-          <p:cNvPr id="17" name="TextBox 16"/>
+          <p:cNvPr id="16" name="TextBox 15"/>
           <p:cNvSpPr txBox="1"/>
           <p:nvPr/>
         </p:nvSpPr>
@@ -15552,7 +15781,7 @@
       </p:sp>
       <p:sp>
         <p:nvSpPr>
-          <p:cNvPr id="18" name="TextBox 17"/>
+          <p:cNvPr id="17" name="TextBox 16"/>
           <p:cNvSpPr txBox="1"/>
           <p:nvPr/>
         </p:nvSpPr>
@@ -15591,7 +15820,7 @@
       </p:sp>
       <p:sp>
         <p:nvSpPr>
-          <p:cNvPr id="19" name="TextBox 18"/>
+          <p:cNvPr id="18" name="TextBox 17"/>
           <p:cNvSpPr txBox="1"/>
           <p:nvPr/>
         </p:nvSpPr>
@@ -15630,7 +15859,7 @@
       </p:sp>
       <p:sp>
         <p:nvSpPr>
-          <p:cNvPr id="20" name="TextBox 19"/>
+          <p:cNvPr id="19" name="TextBox 18"/>
           <p:cNvSpPr txBox="1"/>
           <p:nvPr/>
         </p:nvSpPr>
@@ -15808,46 +16037,7 @@
       </p:sp>
       <p:sp>
         <p:nvSpPr>
-          <p:cNvPr id="5" name="TextBox 4"/>
-          <p:cNvSpPr txBox="1"/>
-          <p:nvPr/>
-        </p:nvSpPr>
-        <p:spPr>
-          <a:xfrm>
-            <a:off x="10744200" y="6492240"/>
-            <a:ext cx="777240" cy="201168"/>
-          </a:xfrm>
-          <a:prstGeom prst="rect">
-            <a:avLst/>
-          </a:prstGeom>
-          <a:noFill/>
-        </p:spPr>
-        <p:txBody>
-          <a:bodyPr wrap="square" lIns="36576" rIns="36576" tIns="36576" bIns="36576" anchor="t">
-            <a:spAutoFit/>
-          </a:bodyPr>
-          <a:lstStyle/>
-          <a:p>
-            <a:pPr algn="r">
-              <a:spcAft>
-                <a:spcPts val="500"/>
-              </a:spcAft>
-              <a:defRPr sz="900" b="0">
-                <a:solidFill>
-                  <a:srgbClr val="5B6974"/>
-                </a:solidFill>
-                <a:latin typeface="Aptos"/>
-              </a:defRPr>
-            </a:pPr>
-            <a:r>
-              <a:t>05  |  18</a:t>
-            </a:r>
-          </a:p>
-        </p:txBody>
-      </p:sp>
-      <p:sp>
-        <p:nvSpPr>
-          <p:cNvPr id="6" name="Rounded Rectangle 5"/>
+          <p:cNvPr id="5" name="Rounded Rectangle 4"/>
           <p:cNvSpPr/>
           <p:nvPr/>
         </p:nvSpPr>
@@ -15892,7 +16082,7 @@
       </p:sp>
       <p:sp>
         <p:nvSpPr>
-          <p:cNvPr id="7" name="TextBox 6"/>
+          <p:cNvPr id="6" name="TextBox 5"/>
           <p:cNvSpPr txBox="1"/>
           <p:nvPr/>
         </p:nvSpPr>
@@ -15931,7 +16121,7 @@
       </p:sp>
       <p:sp>
         <p:nvSpPr>
-          <p:cNvPr id="8" name="TextBox 7"/>
+          <p:cNvPr id="7" name="TextBox 6"/>
           <p:cNvSpPr txBox="1"/>
           <p:nvPr/>
         </p:nvSpPr>
@@ -15970,7 +16160,7 @@
       </p:sp>
       <p:sp>
         <p:nvSpPr>
-          <p:cNvPr id="9" name="Rounded Rectangle 8"/>
+          <p:cNvPr id="8" name="Rounded Rectangle 7"/>
           <p:cNvSpPr/>
           <p:nvPr/>
         </p:nvSpPr>
@@ -16015,7 +16205,7 @@
       </p:sp>
       <p:sp>
         <p:nvSpPr>
-          <p:cNvPr id="10" name="TextBox 9"/>
+          <p:cNvPr id="9" name="TextBox 8"/>
           <p:cNvSpPr txBox="1"/>
           <p:nvPr/>
         </p:nvSpPr>
@@ -16054,7 +16244,7 @@
       </p:sp>
       <p:sp>
         <p:nvSpPr>
-          <p:cNvPr id="11" name="TextBox 10"/>
+          <p:cNvPr id="10" name="TextBox 9"/>
           <p:cNvSpPr txBox="1"/>
           <p:nvPr/>
         </p:nvSpPr>
@@ -16093,7 +16283,7 @@
       </p:sp>
       <p:sp>
         <p:nvSpPr>
-          <p:cNvPr id="12" name="Rounded Rectangle 11"/>
+          <p:cNvPr id="11" name="Rounded Rectangle 10"/>
           <p:cNvSpPr/>
           <p:nvPr/>
         </p:nvSpPr>
@@ -16138,7 +16328,7 @@
       </p:sp>
       <p:sp>
         <p:nvSpPr>
-          <p:cNvPr id="13" name="TextBox 12"/>
+          <p:cNvPr id="12" name="TextBox 11"/>
           <p:cNvSpPr txBox="1"/>
           <p:nvPr/>
         </p:nvSpPr>
@@ -16177,7 +16367,7 @@
       </p:sp>
       <p:sp>
         <p:nvSpPr>
-          <p:cNvPr id="14" name="TextBox 13"/>
+          <p:cNvPr id="13" name="TextBox 12"/>
           <p:cNvSpPr txBox="1"/>
           <p:nvPr/>
         </p:nvSpPr>
@@ -16216,7 +16406,7 @@
       </p:sp>
       <p:sp>
         <p:nvSpPr>
-          <p:cNvPr id="15" name="Rounded Rectangle 14"/>
+          <p:cNvPr id="14" name="Rounded Rectangle 13"/>
           <p:cNvSpPr/>
           <p:nvPr/>
         </p:nvSpPr>
@@ -16261,7 +16451,7 @@
       </p:sp>
       <p:sp>
         <p:nvSpPr>
-          <p:cNvPr id="16" name="TextBox 15"/>
+          <p:cNvPr id="15" name="TextBox 14"/>
           <p:cNvSpPr txBox="1"/>
           <p:nvPr/>
         </p:nvSpPr>
@@ -16300,7 +16490,7 @@
       </p:sp>
       <p:sp>
         <p:nvSpPr>
-          <p:cNvPr id="17" name="TextBox 16"/>
+          <p:cNvPr id="16" name="TextBox 15"/>
           <p:cNvSpPr txBox="1"/>
           <p:nvPr/>
         </p:nvSpPr>
@@ -16332,14 +16522,14 @@
               </a:defRPr>
             </a:pPr>
             <a:r>
-              <a:t>2,406 clauses · 11 families</a:t>
-            </a:r>
-          </a:p>
-        </p:txBody>
-      </p:sp>
-      <p:sp>
-        <p:nvSpPr>
-          <p:cNvPr id="18" name="TextBox 17"/>
+              <a:t>2,425 clauses · 11 families</a:t>
+            </a:r>
+          </a:p>
+        </p:txBody>
+      </p:sp>
+      <p:sp>
+        <p:nvSpPr>
+          <p:cNvPr id="17" name="TextBox 16"/>
           <p:cNvSpPr txBox="1"/>
           <p:nvPr/>
         </p:nvSpPr>
@@ -16371,14 +16561,14 @@
               </a:defRPr>
             </a:pPr>
             <a:r>
-              <a:t>158 positives · prevalence 6.57%</a:t>
-            </a:r>
-          </a:p>
-        </p:txBody>
-      </p:sp>
-      <p:sp>
-        <p:nvSpPr>
-          <p:cNvPr id="19" name="Rounded Rectangle 18"/>
+              <a:t>160 positives · prevalence 6.60%</a:t>
+            </a:r>
+          </a:p>
+        </p:txBody>
+      </p:sp>
+      <p:sp>
+        <p:nvSpPr>
+          <p:cNvPr id="18" name="Rounded Rectangle 17"/>
           <p:cNvSpPr/>
           <p:nvPr/>
         </p:nvSpPr>
@@ -16423,7 +16613,7 @@
       </p:sp>
       <p:sp>
         <p:nvSpPr>
-          <p:cNvPr id="20" name="TextBox 19"/>
+          <p:cNvPr id="19" name="TextBox 18"/>
           <p:cNvSpPr txBox="1"/>
           <p:nvPr/>
         </p:nvSpPr>
@@ -16462,7 +16652,7 @@
       </p:sp>
       <p:sp>
         <p:nvSpPr>
-          <p:cNvPr id="21" name="TextBox 20"/>
+          <p:cNvPr id="20" name="TextBox 19"/>
           <p:cNvSpPr txBox="1"/>
           <p:nvPr/>
         </p:nvSpPr>
@@ -16501,7 +16691,7 @@
       </p:sp>
       <p:sp>
         <p:nvSpPr>
-          <p:cNvPr id="22" name="TextBox 21"/>
+          <p:cNvPr id="21" name="TextBox 20"/>
           <p:cNvSpPr txBox="1"/>
           <p:nvPr/>
         </p:nvSpPr>
@@ -16540,7 +16730,7 @@
       </p:sp>
       <p:sp>
         <p:nvSpPr>
-          <p:cNvPr id="23" name="Rounded Rectangle 22"/>
+          <p:cNvPr id="22" name="Rounded Rectangle 21"/>
           <p:cNvSpPr/>
           <p:nvPr/>
         </p:nvSpPr>
@@ -16585,7 +16775,7 @@
       </p:sp>
       <p:sp>
         <p:nvSpPr>
-          <p:cNvPr id="24" name="TextBox 23"/>
+          <p:cNvPr id="23" name="TextBox 22"/>
           <p:cNvSpPr txBox="1"/>
           <p:nvPr/>
         </p:nvSpPr>
@@ -16624,7 +16814,7 @@
       </p:sp>
       <p:sp>
         <p:nvSpPr>
-          <p:cNvPr id="25" name="TextBox 24"/>
+          <p:cNvPr id="24" name="TextBox 23"/>
           <p:cNvSpPr txBox="1"/>
           <p:nvPr/>
         </p:nvSpPr>
@@ -16663,7 +16853,7 @@
       </p:sp>
       <p:sp>
         <p:nvSpPr>
-          <p:cNvPr id="26" name="TextBox 25"/>
+          <p:cNvPr id="25" name="TextBox 24"/>
           <p:cNvSpPr txBox="1"/>
           <p:nvPr/>
         </p:nvSpPr>
@@ -16702,7 +16892,7 @@
       </p:sp>
       <p:sp>
         <p:nvSpPr>
-          <p:cNvPr id="27" name="TextBox 26"/>
+          <p:cNvPr id="26" name="TextBox 25"/>
           <p:cNvSpPr txBox="1"/>
           <p:nvPr/>
         </p:nvSpPr>
@@ -16734,14 +16924,14 @@
               </a:defRPr>
             </a:pPr>
             <a:r>
-              <a:t>Different label snapshots and eligibility rules: only the three latest DeBERTa methods share one cohort.</a:t>
-            </a:r>
-          </a:p>
-        </p:txBody>
-      </p:sp>
-      <p:sp>
-        <p:nvSpPr>
-          <p:cNvPr id="28" name="TextBox 27"/>
+              <a:t>Different label snapshots and protocols: scores across these rows are not a common leaderboard.</a:t>
+            </a:r>
+          </a:p>
+        </p:txBody>
+      </p:sp>
+      <p:sp>
+        <p:nvSpPr>
+          <p:cNvPr id="27" name="TextBox 26"/>
           <p:cNvSpPr txBox="1"/>
           <p:nvPr/>
         </p:nvSpPr>
@@ -16780,7 +16970,7 @@
       </p:sp>
       <p:sp>
         <p:nvSpPr>
-          <p:cNvPr id="29" name="TextBox 28"/>
+          <p:cNvPr id="28" name="TextBox 27"/>
           <p:cNvSpPr txBox="1"/>
           <p:nvPr/>
         </p:nvSpPr>
@@ -16958,46 +17148,7 @@
       </p:sp>
       <p:sp>
         <p:nvSpPr>
-          <p:cNvPr id="5" name="TextBox 4"/>
-          <p:cNvSpPr txBox="1"/>
-          <p:nvPr/>
-        </p:nvSpPr>
-        <p:spPr>
-          <a:xfrm>
-            <a:off x="10744200" y="6492240"/>
-            <a:ext cx="777240" cy="201168"/>
-          </a:xfrm>
-          <a:prstGeom prst="rect">
-            <a:avLst/>
-          </a:prstGeom>
-          <a:noFill/>
-        </p:spPr>
-        <p:txBody>
-          <a:bodyPr wrap="square" lIns="36576" rIns="36576" tIns="36576" bIns="36576" anchor="t">
-            <a:spAutoFit/>
-          </a:bodyPr>
-          <a:lstStyle/>
-          <a:p>
-            <a:pPr algn="r">
-              <a:spcAft>
-                <a:spcPts val="500"/>
-              </a:spcAft>
-              <a:defRPr sz="900" b="0">
-                <a:solidFill>
-                  <a:srgbClr val="5B6974"/>
-                </a:solidFill>
-                <a:latin typeface="Aptos"/>
-              </a:defRPr>
-            </a:pPr>
-            <a:r>
-              <a:t>06  |  18</a:t>
-            </a:r>
-          </a:p>
-        </p:txBody>
-      </p:sp>
-      <p:sp>
-        <p:nvSpPr>
-          <p:cNvPr id="6" name="Rounded Rectangle 5"/>
+          <p:cNvPr id="5" name="Rounded Rectangle 4"/>
           <p:cNvSpPr/>
           <p:nvPr/>
         </p:nvSpPr>
@@ -17042,7 +17193,7 @@
       </p:sp>
       <p:sp>
         <p:nvSpPr>
-          <p:cNvPr id="7" name="Oval 6"/>
+          <p:cNvPr id="6" name="Oval 5"/>
           <p:cNvSpPr/>
           <p:nvPr/>
         </p:nvSpPr>
@@ -17085,7 +17236,7 @@
       </p:sp>
       <p:sp>
         <p:nvSpPr>
-          <p:cNvPr id="8" name="TextBox 7"/>
+          <p:cNvPr id="7" name="TextBox 6"/>
           <p:cNvSpPr txBox="1"/>
           <p:nvPr/>
         </p:nvSpPr>
@@ -17124,7 +17275,7 @@
       </p:sp>
       <p:sp>
         <p:nvSpPr>
-          <p:cNvPr id="9" name="TextBox 8"/>
+          <p:cNvPr id="8" name="TextBox 7"/>
           <p:cNvSpPr txBox="1"/>
           <p:nvPr/>
         </p:nvSpPr>
@@ -17163,7 +17314,7 @@
       </p:sp>
       <p:sp>
         <p:nvSpPr>
-          <p:cNvPr id="10" name="TextBox 9"/>
+          <p:cNvPr id="9" name="TextBox 8"/>
           <p:cNvSpPr txBox="1"/>
           <p:nvPr/>
         </p:nvSpPr>
@@ -17218,7 +17369,7 @@
       </p:sp>
       <p:sp>
         <p:nvSpPr>
-          <p:cNvPr id="11" name="TextBox 10"/>
+          <p:cNvPr id="10" name="TextBox 9"/>
           <p:cNvSpPr txBox="1"/>
           <p:nvPr/>
         </p:nvSpPr>
@@ -17257,7 +17408,7 @@
       </p:sp>
       <p:sp>
         <p:nvSpPr>
-          <p:cNvPr id="12" name="Rounded Rectangle 11"/>
+          <p:cNvPr id="11" name="Rounded Rectangle 10"/>
           <p:cNvSpPr/>
           <p:nvPr/>
         </p:nvSpPr>
@@ -17302,7 +17453,7 @@
       </p:sp>
       <p:sp>
         <p:nvSpPr>
-          <p:cNvPr id="13" name="Oval 12"/>
+          <p:cNvPr id="12" name="Oval 11"/>
           <p:cNvSpPr/>
           <p:nvPr/>
         </p:nvSpPr>
@@ -17345,7 +17496,7 @@
       </p:sp>
       <p:sp>
         <p:nvSpPr>
-          <p:cNvPr id="14" name="TextBox 13"/>
+          <p:cNvPr id="13" name="TextBox 12"/>
           <p:cNvSpPr txBox="1"/>
           <p:nvPr/>
         </p:nvSpPr>
@@ -17384,7 +17535,7 @@
       </p:sp>
       <p:sp>
         <p:nvSpPr>
-          <p:cNvPr id="15" name="TextBox 14"/>
+          <p:cNvPr id="14" name="TextBox 13"/>
           <p:cNvSpPr txBox="1"/>
           <p:nvPr/>
         </p:nvSpPr>
@@ -17423,7 +17574,7 @@
       </p:sp>
       <p:sp>
         <p:nvSpPr>
-          <p:cNvPr id="16" name="TextBox 15"/>
+          <p:cNvPr id="15" name="TextBox 14"/>
           <p:cNvSpPr txBox="1"/>
           <p:nvPr/>
         </p:nvSpPr>
@@ -17478,7 +17629,7 @@
       </p:sp>
       <p:sp>
         <p:nvSpPr>
-          <p:cNvPr id="17" name="TextBox 16"/>
+          <p:cNvPr id="16" name="TextBox 15"/>
           <p:cNvSpPr txBox="1"/>
           <p:nvPr/>
         </p:nvSpPr>
@@ -17517,7 +17668,7 @@
       </p:sp>
       <p:sp>
         <p:nvSpPr>
-          <p:cNvPr id="18" name="Rounded Rectangle 17"/>
+          <p:cNvPr id="17" name="Rounded Rectangle 16"/>
           <p:cNvSpPr/>
           <p:nvPr/>
         </p:nvSpPr>
@@ -17562,7 +17713,7 @@
       </p:sp>
       <p:sp>
         <p:nvSpPr>
-          <p:cNvPr id="19" name="Oval 18"/>
+          <p:cNvPr id="18" name="Oval 17"/>
           <p:cNvSpPr/>
           <p:nvPr/>
         </p:nvSpPr>
@@ -17605,7 +17756,7 @@
       </p:sp>
       <p:sp>
         <p:nvSpPr>
-          <p:cNvPr id="20" name="TextBox 19"/>
+          <p:cNvPr id="19" name="TextBox 18"/>
           <p:cNvSpPr txBox="1"/>
           <p:nvPr/>
         </p:nvSpPr>
@@ -17644,7 +17795,7 @@
       </p:sp>
       <p:sp>
         <p:nvSpPr>
-          <p:cNvPr id="21" name="TextBox 20"/>
+          <p:cNvPr id="20" name="TextBox 19"/>
           <p:cNvSpPr txBox="1"/>
           <p:nvPr/>
         </p:nvSpPr>
@@ -17683,7 +17834,7 @@
       </p:sp>
       <p:sp>
         <p:nvSpPr>
-          <p:cNvPr id="22" name="TextBox 21"/>
+          <p:cNvPr id="21" name="TextBox 20"/>
           <p:cNvSpPr txBox="1"/>
           <p:nvPr/>
         </p:nvSpPr>
@@ -17738,7 +17889,7 @@
       </p:sp>
       <p:sp>
         <p:nvSpPr>
-          <p:cNvPr id="23" name="TextBox 22"/>
+          <p:cNvPr id="22" name="TextBox 21"/>
           <p:cNvSpPr txBox="1"/>
           <p:nvPr/>
         </p:nvSpPr>
@@ -17777,7 +17928,7 @@
       </p:sp>
       <p:sp>
         <p:nvSpPr>
-          <p:cNvPr id="24" name="Rounded Rectangle 23"/>
+          <p:cNvPr id="23" name="Rounded Rectangle 22"/>
           <p:cNvSpPr/>
           <p:nvPr/>
         </p:nvSpPr>
@@ -17822,7 +17973,7 @@
       </p:sp>
       <p:sp>
         <p:nvSpPr>
-          <p:cNvPr id="25" name="Oval 24"/>
+          <p:cNvPr id="24" name="Oval 23"/>
           <p:cNvSpPr/>
           <p:nvPr/>
         </p:nvSpPr>
@@ -17865,7 +18016,7 @@
       </p:sp>
       <p:sp>
         <p:nvSpPr>
-          <p:cNvPr id="26" name="TextBox 25"/>
+          <p:cNvPr id="25" name="TextBox 24"/>
           <p:cNvSpPr txBox="1"/>
           <p:nvPr/>
         </p:nvSpPr>
@@ -17904,7 +18055,7 @@
       </p:sp>
       <p:sp>
         <p:nvSpPr>
-          <p:cNvPr id="27" name="TextBox 26"/>
+          <p:cNvPr id="26" name="TextBox 25"/>
           <p:cNvSpPr txBox="1"/>
           <p:nvPr/>
         </p:nvSpPr>
@@ -17943,7 +18094,7 @@
       </p:sp>
       <p:sp>
         <p:nvSpPr>
-          <p:cNvPr id="28" name="TextBox 27"/>
+          <p:cNvPr id="27" name="TextBox 26"/>
           <p:cNvSpPr txBox="1"/>
           <p:nvPr/>
         </p:nvSpPr>
@@ -17998,7 +18149,7 @@
       </p:sp>
       <p:sp>
         <p:nvSpPr>
-          <p:cNvPr id="29" name="TextBox 28"/>
+          <p:cNvPr id="28" name="TextBox 27"/>
           <p:cNvSpPr txBox="1"/>
           <p:nvPr/>
         </p:nvSpPr>
@@ -18037,7 +18188,7 @@
       </p:sp>
       <p:sp>
         <p:nvSpPr>
-          <p:cNvPr id="30" name="Rounded Rectangle 29"/>
+          <p:cNvPr id="29" name="Rounded Rectangle 28"/>
           <p:cNvSpPr/>
           <p:nvPr/>
         </p:nvSpPr>
@@ -18082,7 +18233,7 @@
       </p:sp>
       <p:sp>
         <p:nvSpPr>
-          <p:cNvPr id="31" name="Oval 30"/>
+          <p:cNvPr id="30" name="Oval 29"/>
           <p:cNvSpPr/>
           <p:nvPr/>
         </p:nvSpPr>
@@ -18125,7 +18276,7 @@
       </p:sp>
       <p:sp>
         <p:nvSpPr>
-          <p:cNvPr id="32" name="TextBox 31"/>
+          <p:cNvPr id="31" name="TextBox 30"/>
           <p:cNvSpPr txBox="1"/>
           <p:nvPr/>
         </p:nvSpPr>
@@ -18164,7 +18315,7 @@
       </p:sp>
       <p:sp>
         <p:nvSpPr>
-          <p:cNvPr id="33" name="TextBox 32"/>
+          <p:cNvPr id="32" name="TextBox 31"/>
           <p:cNvSpPr txBox="1"/>
           <p:nvPr/>
         </p:nvSpPr>
@@ -18203,7 +18354,7 @@
       </p:sp>
       <p:sp>
         <p:nvSpPr>
-          <p:cNvPr id="34" name="TextBox 33"/>
+          <p:cNvPr id="33" name="TextBox 32"/>
           <p:cNvSpPr txBox="1"/>
           <p:nvPr/>
         </p:nvSpPr>
@@ -18258,7 +18409,7 @@
       </p:sp>
       <p:sp>
         <p:nvSpPr>
-          <p:cNvPr id="35" name="TextBox 34"/>
+          <p:cNvPr id="34" name="TextBox 33"/>
           <p:cNvSpPr txBox="1"/>
           <p:nvPr/>
         </p:nvSpPr>
@@ -18297,7 +18448,7 @@
       </p:sp>
       <p:sp>
         <p:nvSpPr>
-          <p:cNvPr id="36" name="Rounded Rectangle 35"/>
+          <p:cNvPr id="35" name="Rounded Rectangle 34"/>
           <p:cNvSpPr/>
           <p:nvPr/>
         </p:nvSpPr>
@@ -18342,7 +18493,7 @@
       </p:sp>
       <p:sp>
         <p:nvSpPr>
-          <p:cNvPr id="37" name="Oval 36"/>
+          <p:cNvPr id="36" name="Oval 35"/>
           <p:cNvSpPr/>
           <p:nvPr/>
         </p:nvSpPr>
@@ -18385,7 +18536,7 @@
       </p:sp>
       <p:sp>
         <p:nvSpPr>
-          <p:cNvPr id="38" name="TextBox 37"/>
+          <p:cNvPr id="37" name="TextBox 36"/>
           <p:cNvSpPr txBox="1"/>
           <p:nvPr/>
         </p:nvSpPr>
@@ -18424,7 +18575,7 @@
       </p:sp>
       <p:sp>
         <p:nvSpPr>
-          <p:cNvPr id="39" name="TextBox 38"/>
+          <p:cNvPr id="38" name="TextBox 37"/>
           <p:cNvSpPr txBox="1"/>
           <p:nvPr/>
         </p:nvSpPr>
@@ -18463,7 +18614,7 @@
       </p:sp>
       <p:sp>
         <p:nvSpPr>
-          <p:cNvPr id="40" name="TextBox 39"/>
+          <p:cNvPr id="39" name="TextBox 38"/>
           <p:cNvSpPr txBox="1"/>
           <p:nvPr/>
         </p:nvSpPr>
@@ -18518,7 +18669,7 @@
       </p:sp>
       <p:sp>
         <p:nvSpPr>
-          <p:cNvPr id="41" name="TextBox 40"/>
+          <p:cNvPr id="40" name="TextBox 39"/>
           <p:cNvSpPr txBox="1"/>
           <p:nvPr/>
         </p:nvSpPr>
@@ -18557,7 +18708,7 @@
       </p:sp>
       <p:sp>
         <p:nvSpPr>
-          <p:cNvPr id="42" name="Rounded Rectangle 41"/>
+          <p:cNvPr id="41" name="Rounded Rectangle 40"/>
           <p:cNvSpPr/>
           <p:nvPr/>
         </p:nvSpPr>
@@ -18602,7 +18753,7 @@
       </p:sp>
       <p:sp>
         <p:nvSpPr>
-          <p:cNvPr id="43" name="Oval 42"/>
+          <p:cNvPr id="42" name="Oval 41"/>
           <p:cNvSpPr/>
           <p:nvPr/>
         </p:nvSpPr>
@@ -18645,7 +18796,7 @@
       </p:sp>
       <p:sp>
         <p:nvSpPr>
-          <p:cNvPr id="44" name="TextBox 43"/>
+          <p:cNvPr id="43" name="TextBox 42"/>
           <p:cNvSpPr txBox="1"/>
           <p:nvPr/>
         </p:nvSpPr>
@@ -18684,7 +18835,7 @@
       </p:sp>
       <p:sp>
         <p:nvSpPr>
-          <p:cNvPr id="45" name="TextBox 44"/>
+          <p:cNvPr id="44" name="TextBox 43"/>
           <p:cNvSpPr txBox="1"/>
           <p:nvPr/>
         </p:nvSpPr>
@@ -18723,7 +18874,7 @@
       </p:sp>
       <p:sp>
         <p:nvSpPr>
-          <p:cNvPr id="46" name="TextBox 45"/>
+          <p:cNvPr id="45" name="TextBox 44"/>
           <p:cNvSpPr txBox="1"/>
           <p:nvPr/>
         </p:nvSpPr>
@@ -18778,7 +18929,7 @@
       </p:sp>
       <p:sp>
         <p:nvSpPr>
-          <p:cNvPr id="47" name="Rounded Rectangle 46"/>
+          <p:cNvPr id="46" name="Rounded Rectangle 45"/>
           <p:cNvSpPr/>
           <p:nvPr/>
         </p:nvSpPr>
@@ -18823,7 +18974,7 @@
       </p:sp>
       <p:sp>
         <p:nvSpPr>
-          <p:cNvPr id="48" name="TextBox 47"/>
+          <p:cNvPr id="47" name="TextBox 46"/>
           <p:cNvSpPr txBox="1"/>
           <p:nvPr/>
         </p:nvSpPr>
@@ -18862,46 +19013,46 @@
       </p:sp>
       <p:sp>
         <p:nvSpPr>
+          <p:cNvPr id="48" name="TextBox 47"/>
+          <p:cNvSpPr txBox="1"/>
+          <p:nvPr/>
+        </p:nvSpPr>
+        <p:spPr>
+          <a:xfrm>
+            <a:off x="1097280" y="5376672"/>
+            <a:ext cx="9966960" cy="530352"/>
+          </a:xfrm>
+          <a:prstGeom prst="rect">
+            <a:avLst/>
+          </a:prstGeom>
+          <a:noFill/>
+        </p:spPr>
+        <p:txBody>
+          <a:bodyPr wrap="square" lIns="36576" rIns="36576" tIns="36576" bIns="36576" anchor="t">
+            <a:spAutoFit/>
+          </a:bodyPr>
+          <a:lstStyle/>
+          <a:p>
+            <a:pPr algn="ctr">
+              <a:spcAft>
+                <a:spcPts val="500"/>
+              </a:spcAft>
+              <a:defRPr sz="1600" b="1">
+                <a:solidFill>
+                  <a:srgbClr val="183452"/>
+                </a:solidFill>
+                <a:latin typeface="Aptos"/>
+              </a:defRPr>
+            </a:pPr>
+            <a:r>
+              <a:t>The latest all-family classical rerun includes TCP and DNS, so the proposal's project-level holdouts are no longer untouched.</a:t>
+            </a:r>
+          </a:p>
+        </p:txBody>
+      </p:sp>
+      <p:sp>
+        <p:nvSpPr>
           <p:cNvPr id="49" name="TextBox 48"/>
-          <p:cNvSpPr txBox="1"/>
-          <p:nvPr/>
-        </p:nvSpPr>
-        <p:spPr>
-          <a:xfrm>
-            <a:off x="1097280" y="5422392"/>
-            <a:ext cx="9966960" cy="438912"/>
-          </a:xfrm>
-          <a:prstGeom prst="rect">
-            <a:avLst/>
-          </a:prstGeom>
-          <a:noFill/>
-        </p:spPr>
-        <p:txBody>
-          <a:bodyPr wrap="square" lIns="36576" rIns="36576" tIns="36576" bIns="36576" anchor="t">
-            <a:spAutoFit/>
-          </a:bodyPr>
-          <a:lstStyle/>
-          <a:p>
-            <a:pPr algn="ctr">
-              <a:spcAft>
-                <a:spcPts val="500"/>
-              </a:spcAft>
-              <a:defRPr sz="1700" b="1">
-                <a:solidFill>
-                  <a:srgbClr val="183452"/>
-                </a:solidFill>
-                <a:latin typeface="Aptos"/>
-              </a:defRPr>
-            </a:pPr>
-            <a:r>
-              <a:t>Reserved TCP transfer validation and sealed DNS final testing remain unopened.</a:t>
-            </a:r>
-          </a:p>
-        </p:txBody>
-      </p:sp>
-      <p:sp>
-        <p:nvSpPr>
-          <p:cNvPr id="50" name="TextBox 49"/>
           <p:cNvSpPr txBox="1"/>
           <p:nvPr/>
         </p:nvSpPr>
@@ -18940,7 +19091,7 @@
       </p:sp>
       <p:sp>
         <p:nvSpPr>
-          <p:cNvPr id="51" name="TextBox 50"/>
+          <p:cNvPr id="50" name="TextBox 49"/>
           <p:cNvSpPr txBox="1"/>
           <p:nvPr/>
         </p:nvSpPr>
@@ -19118,53 +19269,14 @@
       </p:sp>
       <p:sp>
         <p:nvSpPr>
-          <p:cNvPr id="5" name="TextBox 4"/>
-          <p:cNvSpPr txBox="1"/>
-          <p:nvPr/>
-        </p:nvSpPr>
-        <p:spPr>
-          <a:xfrm>
-            <a:off x="10744200" y="6492240"/>
-            <a:ext cx="777240" cy="201168"/>
-          </a:xfrm>
-          <a:prstGeom prst="rect">
-            <a:avLst/>
-          </a:prstGeom>
-          <a:noFill/>
-        </p:spPr>
-        <p:txBody>
-          <a:bodyPr wrap="square" lIns="36576" rIns="36576" tIns="36576" bIns="36576" anchor="t">
-            <a:spAutoFit/>
-          </a:bodyPr>
-          <a:lstStyle/>
-          <a:p>
-            <a:pPr algn="r">
-              <a:spcAft>
-                <a:spcPts val="500"/>
-              </a:spcAft>
-              <a:defRPr sz="900" b="0">
-                <a:solidFill>
-                  <a:srgbClr val="5B6974"/>
-                </a:solidFill>
-                <a:latin typeface="Aptos"/>
-              </a:defRPr>
-            </a:pPr>
-            <a:r>
-              <a:t>07  |  18</a:t>
-            </a:r>
-          </a:p>
-        </p:txBody>
-      </p:sp>
-      <p:sp>
-        <p:nvSpPr>
-          <p:cNvPr id="6" name="Rounded Rectangle 5"/>
+          <p:cNvPr id="5" name="Rounded Rectangle 4"/>
           <p:cNvSpPr/>
           <p:nvPr/>
         </p:nvSpPr>
         <p:spPr>
           <a:xfrm>
             <a:off x="868680" y="1325880"/>
-            <a:ext cx="4937760" cy="3456432"/>
+            <a:ext cx="3154680" cy="1298448"/>
           </a:xfrm>
           <a:prstGeom prst="roundRect">
             <a:avLst/>
@@ -19202,62 +19314,103 @@
       </p:sp>
       <p:sp>
         <p:nvSpPr>
+          <p:cNvPr id="6" name="TextBox 5"/>
+          <p:cNvSpPr txBox="1"/>
+          <p:nvPr/>
+        </p:nvSpPr>
+        <p:spPr>
+          <a:xfrm>
+            <a:off x="960120" y="1472184"/>
+            <a:ext cx="2971800" cy="530352"/>
+          </a:xfrm>
+          <a:prstGeom prst="rect">
+            <a:avLst/>
+          </a:prstGeom>
+          <a:noFill/>
+        </p:spPr>
+        <p:txBody>
+          <a:bodyPr wrap="square" lIns="36576" rIns="36576" tIns="36576" bIns="36576" anchor="t">
+            <a:spAutoFit/>
+          </a:bodyPr>
+          <a:lstStyle/>
+          <a:p>
+            <a:pPr algn="ctr">
+              <a:spcAft>
+                <a:spcPts val="500"/>
+              </a:spcAft>
+              <a:defRPr sz="3100" b="1">
+                <a:solidFill>
+                  <a:srgbClr val="A6413E"/>
+                </a:solidFill>
+                <a:latin typeface="Aptos"/>
+              </a:defRPr>
+            </a:pPr>
+            <a:r>
+              <a:t>95.6%</a:t>
+            </a:r>
+          </a:p>
+        </p:txBody>
+      </p:sp>
+      <p:sp>
+        <p:nvSpPr>
           <p:cNvPr id="7" name="TextBox 6"/>
           <p:cNvSpPr txBox="1"/>
           <p:nvPr/>
         </p:nvSpPr>
         <p:spPr>
           <a:xfrm>
-            <a:off x="1234440" y="1627632"/>
-            <a:ext cx="4206240" cy="438912"/>
-          </a:xfrm>
-          <a:prstGeom prst="rect">
-            <a:avLst/>
-          </a:prstGeom>
-          <a:noFill/>
-        </p:spPr>
-        <p:txBody>
-          <a:bodyPr wrap="square" lIns="36576" rIns="36576" tIns="36576" bIns="36576" anchor="t">
-            <a:spAutoFit/>
-          </a:bodyPr>
-          <a:lstStyle/>
-          <a:p>
-            <a:pPr algn="l">
-              <a:spcAft>
-                <a:spcPts val="500"/>
-              </a:spcAft>
-              <a:defRPr sz="2100" b="1">
-                <a:solidFill>
-                  <a:srgbClr val="183452"/>
-                </a:solidFill>
-                <a:latin typeface="Aptos"/>
-              </a:defRPr>
-            </a:pPr>
-            <a:r>
-              <a:t>What the project has</a:t>
-            </a:r>
-          </a:p>
-        </p:txBody>
-      </p:sp>
-      <p:sp>
-        <p:nvSpPr>
-          <p:cNvPr id="8" name="Oval 7"/>
+            <a:off x="978407" y="2075688"/>
+            <a:ext cx="2935224" cy="466343"/>
+          </a:xfrm>
+          <a:prstGeom prst="rect">
+            <a:avLst/>
+          </a:prstGeom>
+          <a:noFill/>
+        </p:spPr>
+        <p:txBody>
+          <a:bodyPr wrap="square" lIns="36576" rIns="36576" tIns="36576" bIns="36576" anchor="t">
+            <a:spAutoFit/>
+          </a:bodyPr>
+          <a:lstStyle/>
+          <a:p>
+            <a:pPr algn="ctr">
+              <a:spcAft>
+                <a:spcPts val="500"/>
+              </a:spcAft>
+              <a:defRPr sz="1400" b="0">
+                <a:solidFill>
+                  <a:srgbClr val="26313B"/>
+                </a:solidFill>
+                <a:latin typeface="Aptos"/>
+              </a:defRPr>
+            </a:pPr>
+            <a:r>
+              <a:t>of positive labels were 2-to-1 votes</a:t>
+            </a:r>
+          </a:p>
+        </p:txBody>
+      </p:sp>
+      <p:sp>
+        <p:nvSpPr>
+          <p:cNvPr id="8" name="Rounded Rectangle 7"/>
           <p:cNvSpPr/>
           <p:nvPr/>
         </p:nvSpPr>
         <p:spPr>
           <a:xfrm>
-            <a:off x="1234440" y="2322576"/>
-            <a:ext cx="164592" cy="164592"/>
-          </a:xfrm>
-          <a:prstGeom prst="ellipse">
+            <a:off x="4517136" y="1325880"/>
+            <a:ext cx="3154680" cy="1298448"/>
+          </a:xfrm>
+          <a:prstGeom prst="roundRect">
             <a:avLst/>
           </a:prstGeom>
           <a:solidFill>
-            <a:srgbClr val="1C8585"/>
+            <a:srgbClr val="E7F0F7"/>
           </a:solidFill>
-          <a:ln>
-            <a:noFill/>
+          <a:ln w="13970">
+            <a:solidFill>
+              <a:srgbClr val="E7F0F7"/>
+            </a:solidFill>
           </a:ln>
         </p:spPr>
         <p:style>
@@ -19290,16 +19443,16 @@
         </p:nvSpPr>
         <p:spPr>
           <a:xfrm>
-            <a:off x="1234440" y="2327148"/>
-            <a:ext cx="164592" cy="155448"/>
-          </a:xfrm>
-          <a:prstGeom prst="rect">
-            <a:avLst/>
-          </a:prstGeom>
-          <a:noFill/>
-        </p:spPr>
-        <p:txBody>
-          <a:bodyPr wrap="square" lIns="0" rIns="0" tIns="0" bIns="0" anchor="ctr">
+            <a:off x="4608576" y="1472184"/>
+            <a:ext cx="2971800" cy="530352"/>
+          </a:xfrm>
+          <a:prstGeom prst="rect">
+            <a:avLst/>
+          </a:prstGeom>
+          <a:noFill/>
+        </p:spPr>
+        <p:txBody>
+          <a:bodyPr wrap="square" lIns="36576" rIns="36576" tIns="36576" bIns="36576" anchor="t">
             <a:spAutoFit/>
           </a:bodyPr>
           <a:lstStyle/>
@@ -19308,13 +19461,16 @@
               <a:spcAft>
                 <a:spcPts val="500"/>
               </a:spcAft>
-              <a:defRPr sz="600" b="1">
-                <a:solidFill>
-                  <a:srgbClr val="FFFFFF"/>
-                </a:solidFill>
-                <a:latin typeface="Aptos"/>
-              </a:defRPr>
-            </a:pPr>
+              <a:defRPr sz="3100" b="1">
+                <a:solidFill>
+                  <a:srgbClr val="DA8B35"/>
+                </a:solidFill>
+                <a:latin typeface="Aptos"/>
+              </a:defRPr>
+            </a:pPr>
+            <a:r>
+              <a:t>20 / 455</a:t>
+            </a:r>
           </a:p>
         </p:txBody>
       </p:sp>
@@ -19326,25 +19482,25 @@
         </p:nvSpPr>
         <p:spPr>
           <a:xfrm>
-            <a:off x="1527048" y="2286000"/>
-            <a:ext cx="3867911" cy="603503"/>
-          </a:xfrm>
-          <a:prstGeom prst="rect">
-            <a:avLst/>
-          </a:prstGeom>
-          <a:noFill/>
-        </p:spPr>
-        <p:txBody>
-          <a:bodyPr wrap="square" lIns="36576" rIns="36576" tIns="36576" bIns="36576" anchor="t">
-            <a:spAutoFit/>
-          </a:bodyPr>
-          <a:lstStyle/>
-          <a:p>
-            <a:pPr algn="l">
-              <a:spcAft>
-                <a:spcPts val="500"/>
-              </a:spcAft>
-              <a:defRPr sz="1600" b="0">
+            <a:off x="4626864" y="2075688"/>
+            <a:ext cx="2935224" cy="466343"/>
+          </a:xfrm>
+          <a:prstGeom prst="rect">
+            <a:avLst/>
+          </a:prstGeom>
+          <a:noFill/>
+        </p:spPr>
+        <p:txBody>
+          <a:bodyPr wrap="square" lIns="36576" rIns="36576" tIns="36576" bIns="36576" anchor="t">
+            <a:spAutoFit/>
+          </a:bodyPr>
+          <a:lstStyle/>
+          <a:p>
+            <a:pPr algn="ctr">
+              <a:spcAft>
+                <a:spcPts val="500"/>
+              </a:spcAft>
+              <a:defRPr sz="1400" b="0">
                 <a:solidFill>
                   <a:srgbClr val="26313B"/>
                 </a:solidFill>
@@ -19352,30 +19508,32 @@
               </a:defRPr>
             </a:pPr>
             <a:r>
-              <a:t>A repeatable annotation workflow</a:t>
-            </a:r>
-          </a:p>
-        </p:txBody>
-      </p:sp>
-      <p:sp>
-        <p:nvSpPr>
-          <p:cNvPr id="11" name="Oval 10"/>
+              <a:t>positive labels were unanimous</a:t>
+            </a:r>
+          </a:p>
+        </p:txBody>
+      </p:sp>
+      <p:sp>
+        <p:nvSpPr>
+          <p:cNvPr id="11" name="Rounded Rectangle 10"/>
           <p:cNvSpPr/>
           <p:nvPr/>
         </p:nvSpPr>
         <p:spPr>
           <a:xfrm>
-            <a:off x="1234440" y="2980944"/>
-            <a:ext cx="164592" cy="164592"/>
-          </a:xfrm>
-          <a:prstGeom prst="ellipse">
+            <a:off x="8165592" y="1325880"/>
+            <a:ext cx="3154680" cy="1298448"/>
+          </a:xfrm>
+          <a:prstGeom prst="roundRect">
             <a:avLst/>
           </a:prstGeom>
           <a:solidFill>
-            <a:srgbClr val="1C8585"/>
+            <a:srgbClr val="E7F0F7"/>
           </a:solidFill>
-          <a:ln>
-            <a:noFill/>
+          <a:ln w="13970">
+            <a:solidFill>
+              <a:srgbClr val="E7F0F7"/>
+            </a:solidFill>
           </a:ln>
         </p:spPr>
         <p:style>
@@ -19408,16 +19566,16 @@
         </p:nvSpPr>
         <p:spPr>
           <a:xfrm>
-            <a:off x="1234440" y="2985515"/>
-            <a:ext cx="164592" cy="155448"/>
-          </a:xfrm>
-          <a:prstGeom prst="rect">
-            <a:avLst/>
-          </a:prstGeom>
-          <a:noFill/>
-        </p:spPr>
-        <p:txBody>
-          <a:bodyPr wrap="square" lIns="0" rIns="0" tIns="0" bIns="0" anchor="ctr">
+            <a:off x="8257031" y="1472184"/>
+            <a:ext cx="2971800" cy="530352"/>
+          </a:xfrm>
+          <a:prstGeom prst="rect">
+            <a:avLst/>
+          </a:prstGeom>
+          <a:noFill/>
+        </p:spPr>
+        <p:txBody>
+          <a:bodyPr wrap="square" lIns="36576" rIns="36576" tIns="36576" bIns="36576" anchor="t">
             <a:spAutoFit/>
           </a:bodyPr>
           <a:lstStyle/>
@@ -19426,13 +19584,16 @@
               <a:spcAft>
                 <a:spcPts val="500"/>
               </a:spcAft>
-              <a:defRPr sz="600" b="1">
-                <a:solidFill>
-                  <a:srgbClr val="FFFFFF"/>
-                </a:solidFill>
-                <a:latin typeface="Aptos"/>
-              </a:defRPr>
-            </a:pPr>
+              <a:defRPr sz="3100" b="1">
+                <a:solidFill>
+                  <a:srgbClr val="2D6596"/>
+                </a:solidFill>
+                <a:latin typeface="Aptos"/>
+              </a:defRPr>
+            </a:pPr>
+            <a:r>
+              <a:t>0.017-0.113</a:t>
+            </a:r>
           </a:p>
         </p:txBody>
       </p:sp>
@@ -19444,25 +19605,25 @@
         </p:nvSpPr>
         <p:spPr>
           <a:xfrm>
-            <a:off x="1527048" y="2944368"/>
-            <a:ext cx="3867911" cy="603503"/>
-          </a:xfrm>
-          <a:prstGeom prst="rect">
-            <a:avLst/>
-          </a:prstGeom>
-          <a:noFill/>
-        </p:spPr>
-        <p:txBody>
-          <a:bodyPr wrap="square" lIns="36576" rIns="36576" tIns="36576" bIns="36576" anchor="t">
-            <a:spAutoFit/>
-          </a:bodyPr>
-          <a:lstStyle/>
-          <a:p>
-            <a:pPr algn="l">
-              <a:spcAft>
-                <a:spcPts val="500"/>
-              </a:spcAft>
-              <a:defRPr sz="1600" b="0">
+            <a:off x="8275319" y="2075688"/>
+            <a:ext cx="2935224" cy="466343"/>
+          </a:xfrm>
+          <a:prstGeom prst="rect">
+            <a:avLst/>
+          </a:prstGeom>
+          <a:noFill/>
+        </p:spPr>
+        <p:txBody>
+          <a:bodyPr wrap="square" lIns="36576" rIns="36576" tIns="36576" bIns="36576" anchor="t">
+            <a:spAutoFit/>
+          </a:bodyPr>
+          <a:lstStyle/>
+          <a:p>
+            <a:pPr algn="ctr">
+              <a:spcAft>
+                <a:spcPts val="500"/>
+              </a:spcAft>
+              <a:defRPr sz="1400" b="0">
                 <a:solidFill>
                   <a:srgbClr val="26313B"/>
                 </a:solidFill>
@@ -19470,30 +19631,32 @@
               </a:defRPr>
             </a:pPr>
             <a:r>
-              <a:t>Provenance and consensus rules</a:t>
-            </a:r>
-          </a:p>
-        </p:txBody>
-      </p:sp>
-      <p:sp>
-        <p:nvSpPr>
-          <p:cNvPr id="14" name="Oval 13"/>
+              <a:t>pairwise Cohen's kappa</a:t>
+            </a:r>
+          </a:p>
+        </p:txBody>
+      </p:sp>
+      <p:sp>
+        <p:nvSpPr>
+          <p:cNvPr id="14" name="Rounded Rectangle 13"/>
           <p:cNvSpPr/>
           <p:nvPr/>
         </p:nvSpPr>
         <p:spPr>
           <a:xfrm>
-            <a:off x="1234440" y="3639312"/>
-            <a:ext cx="164592" cy="164592"/>
-          </a:xfrm>
-          <a:prstGeom prst="ellipse">
+            <a:off x="868680" y="3063240"/>
+            <a:ext cx="4983480" cy="1700784"/>
+          </a:xfrm>
+          <a:prstGeom prst="roundRect">
             <a:avLst/>
           </a:prstGeom>
           <a:solidFill>
-            <a:srgbClr val="1C8585"/>
+            <a:srgbClr val="E7F0F7"/>
           </a:solidFill>
-          <a:ln>
-            <a:noFill/>
+          <a:ln w="13970">
+            <a:solidFill>
+              <a:srgbClr val="E7F0F7"/>
+            </a:solidFill>
           </a:ln>
         </p:spPr>
         <p:style>
@@ -19526,31 +19689,34 @@
         </p:nvSpPr>
         <p:spPr>
           <a:xfrm>
-            <a:off x="1234440" y="3643884"/>
-            <a:ext cx="164592" cy="155448"/>
-          </a:xfrm>
-          <a:prstGeom prst="rect">
-            <a:avLst/>
-          </a:prstGeom>
-          <a:noFill/>
-        </p:spPr>
-        <p:txBody>
-          <a:bodyPr wrap="square" lIns="0" rIns="0" tIns="0" bIns="0" anchor="ctr">
-            <a:spAutoFit/>
-          </a:bodyPr>
-          <a:lstStyle/>
-          <a:p>
-            <a:pPr algn="ctr">
-              <a:spcAft>
-                <a:spcPts val="500"/>
-              </a:spcAft>
-              <a:defRPr sz="600" b="1">
-                <a:solidFill>
-                  <a:srgbClr val="FFFFFF"/>
-                </a:solidFill>
-                <a:latin typeface="Aptos"/>
-              </a:defRPr>
-            </a:pPr>
+            <a:off x="1170432" y="3337560"/>
+            <a:ext cx="4389120" cy="365760"/>
+          </a:xfrm>
+          <a:prstGeom prst="rect">
+            <a:avLst/>
+          </a:prstGeom>
+          <a:noFill/>
+        </p:spPr>
+        <p:txBody>
+          <a:bodyPr wrap="square" lIns="36576" rIns="36576" tIns="36576" bIns="36576" anchor="t">
+            <a:spAutoFit/>
+          </a:bodyPr>
+          <a:lstStyle/>
+          <a:p>
+            <a:pPr algn="l">
+              <a:spcAft>
+                <a:spcPts val="500"/>
+              </a:spcAft>
+              <a:defRPr sz="1900" b="1">
+                <a:solidFill>
+                  <a:srgbClr val="183452"/>
+                </a:solidFill>
+                <a:latin typeface="Aptos"/>
+              </a:defRPr>
+            </a:pPr>
+            <a:r>
+              <a:t>What the labels support</a:t>
+            </a:r>
           </a:p>
         </p:txBody>
       </p:sp>
@@ -19562,8 +19728,8 @@
         </p:nvSpPr>
         <p:spPr>
           <a:xfrm>
-            <a:off x="1527048" y="3602736"/>
-            <a:ext cx="3867911" cy="603503"/>
+            <a:off x="1170432" y="3822191"/>
+            <a:ext cx="4343400" cy="658368"/>
           </a:xfrm>
           <a:prstGeom prst="rect">
             <a:avLst/>
@@ -19580,7 +19746,7 @@
               <a:spcAft>
                 <a:spcPts val="500"/>
               </a:spcAft>
-              <a:defRPr sz="1600" b="0">
+              <a:defRPr sz="1500" b="0">
                 <a:solidFill>
                   <a:srgbClr val="26313B"/>
                 </a:solidFill>
@@ -19588,7 +19754,7 @@
               </a:defRPr>
             </a:pPr>
             <a:r>
-              <a:t>AI-assisted reference labels</a:t>
+              <a:t>A repeatable, provenance-recorded operational reference for development experiments.</a:t>
             </a:r>
           </a:p>
         </p:txBody>
@@ -19601,8 +19767,8 @@
         </p:nvSpPr>
         <p:spPr>
           <a:xfrm>
-            <a:off x="6355080" y="1325880"/>
-            <a:ext cx="4937760" cy="3456432"/>
+            <a:off x="6327648" y="3063240"/>
+            <a:ext cx="4983480" cy="1700784"/>
           </a:xfrm>
           <a:prstGeom prst="roundRect">
             <a:avLst/>
@@ -19646,8 +19812,8 @@
         </p:nvSpPr>
         <p:spPr>
           <a:xfrm>
-            <a:off x="6720840" y="1627632"/>
-            <a:ext cx="4206240" cy="438912"/>
+            <a:off x="6629400" y="3337560"/>
+            <a:ext cx="4389120" cy="365760"/>
           </a:xfrm>
           <a:prstGeom prst="rect">
             <a:avLst/>
@@ -19664,7 +19830,7 @@
               <a:spcAft>
                 <a:spcPts val="500"/>
               </a:spcAft>
-              <a:defRPr sz="2100" b="1">
+              <a:defRPr sz="1900" b="1">
                 <a:solidFill>
                   <a:srgbClr val="183452"/>
                 </a:solidFill>
@@ -19672,51 +19838,47 @@
               </a:defRPr>
             </a:pPr>
             <a:r>
-              <a:t>What remains missing</a:t>
-            </a:r>
-          </a:p>
-        </p:txBody>
-      </p:sp>
-      <p:sp>
-        <p:nvSpPr>
-          <p:cNvPr id="19" name="Oval 18"/>
-          <p:cNvSpPr/>
-          <p:nvPr/>
-        </p:nvSpPr>
-        <p:spPr>
-          <a:xfrm>
-            <a:off x="6720840" y="2322576"/>
-            <a:ext cx="164592" cy="164592"/>
-          </a:xfrm>
-          <a:prstGeom prst="ellipse">
-            <a:avLst/>
-          </a:prstGeom>
-          <a:solidFill>
-            <a:srgbClr val="1C8585"/>
-          </a:solidFill>
-          <a:ln>
-            <a:noFill/>
-          </a:ln>
-        </p:spPr>
-        <p:style>
-          <a:lnRef idx="1">
-            <a:schemeClr val="accent1"/>
-          </a:lnRef>
-          <a:fillRef idx="3">
-            <a:schemeClr val="accent1"/>
-          </a:fillRef>
-          <a:effectRef idx="2">
-            <a:schemeClr val="accent1"/>
-          </a:effectRef>
-          <a:fontRef idx="minor">
-            <a:schemeClr val="lt1"/>
-          </a:fontRef>
-        </p:style>
-        <p:txBody>
-          <a:bodyPr rtlCol="0" anchor="ctr"/>
-          <a:lstStyle/>
-          <a:p>
-            <a:pPr algn="ctr"/>
+              <a:t>What they do not establish</a:t>
+            </a:r>
+          </a:p>
+        </p:txBody>
+      </p:sp>
+      <p:sp>
+        <p:nvSpPr>
+          <p:cNvPr id="19" name="TextBox 18"/>
+          <p:cNvSpPr txBox="1"/>
+          <p:nvPr/>
+        </p:nvSpPr>
+        <p:spPr>
+          <a:xfrm>
+            <a:off x="6629400" y="3822191"/>
+            <a:ext cx="4343400" cy="658368"/>
+          </a:xfrm>
+          <a:prstGeom prst="rect">
+            <a:avLst/>
+          </a:prstGeom>
+          <a:noFill/>
+        </p:spPr>
+        <p:txBody>
+          <a:bodyPr wrap="square" lIns="36576" rIns="36576" tIns="36576" bIns="36576" anchor="t">
+            <a:spAutoFit/>
+          </a:bodyPr>
+          <a:lstStyle/>
+          <a:p>
+            <a:pPr algn="l">
+              <a:spcAft>
+                <a:spcPts val="500"/>
+              </a:spcAft>
+              <a:defRPr sz="1500" b="0">
+                <a:solidFill>
+                  <a:srgbClr val="26313B"/>
+                </a:solidFill>
+                <a:latin typeface="Aptos"/>
+              </a:defRPr>
+            </a:pPr>
+            <a:r>
+              <a:t>Independent expert truth, human reliability, or population-level ambiguity accuracy.</a:t>
+            </a:r>
           </a:p>
         </p:txBody>
       </p:sp>
@@ -19728,16 +19890,16 @@
         </p:nvSpPr>
         <p:spPr>
           <a:xfrm>
-            <a:off x="6720840" y="2327148"/>
-            <a:ext cx="164592" cy="155448"/>
-          </a:xfrm>
-          <a:prstGeom prst="rect">
-            <a:avLst/>
-          </a:prstGeom>
-          <a:noFill/>
-        </p:spPr>
-        <p:txBody>
-          <a:bodyPr wrap="square" lIns="0" rIns="0" tIns="0" bIns="0" anchor="ctr">
+            <a:off x="1143000" y="5285232"/>
+            <a:ext cx="9966960" cy="566928"/>
+          </a:xfrm>
+          <a:prstGeom prst="rect">
+            <a:avLst/>
+          </a:prstGeom>
+          <a:noFill/>
+        </p:spPr>
+        <p:txBody>
+          <a:bodyPr wrap="square" lIns="36576" rIns="36576" tIns="36576" bIns="36576" anchor="t">
             <a:spAutoFit/>
           </a:bodyPr>
           <a:lstStyle/>
@@ -19746,333 +19908,22 @@
               <a:spcAft>
                 <a:spcPts val="500"/>
               </a:spcAft>
-              <a:defRPr sz="600" b="1">
-                <a:solidFill>
-                  <a:srgbClr val="FFFFFF"/>
-                </a:solidFill>
-                <a:latin typeface="Aptos"/>
-              </a:defRPr>
-            </a:pPr>
+              <a:defRPr sz="1800" b="1">
+                <a:solidFill>
+                  <a:srgbClr val="A6413E"/>
+                </a:solidFill>
+                <a:latin typeface="Aptos"/>
+              </a:defRPr>
+            </a:pPr>
+            <a:r>
+              <a:t>Scores measure agreement with a noisy, model-dependent reference; they do not identify which annotator is correct.</a:t>
+            </a:r>
           </a:p>
         </p:txBody>
       </p:sp>
       <p:sp>
         <p:nvSpPr>
           <p:cNvPr id="21" name="TextBox 20"/>
-          <p:cNvSpPr txBox="1"/>
-          <p:nvPr/>
-        </p:nvSpPr>
-        <p:spPr>
-          <a:xfrm>
-            <a:off x="7013448" y="2286000"/>
-            <a:ext cx="3867911" cy="603503"/>
-          </a:xfrm>
-          <a:prstGeom prst="rect">
-            <a:avLst/>
-          </a:prstGeom>
-          <a:noFill/>
-        </p:spPr>
-        <p:txBody>
-          <a:bodyPr wrap="square" lIns="36576" rIns="36576" tIns="36576" bIns="36576" anchor="t">
-            <a:spAutoFit/>
-          </a:bodyPr>
-          <a:lstStyle/>
-          <a:p>
-            <a:pPr algn="l">
-              <a:spcAft>
-                <a:spcPts val="500"/>
-              </a:spcAft>
-              <a:defRPr sz="1600" b="0">
-                <a:solidFill>
-                  <a:srgbClr val="26313B"/>
-                </a:solidFill>
-                <a:latin typeface="Aptos"/>
-              </a:defRPr>
-            </a:pPr>
-            <a:r>
-              <a:t>Independent expert double annotation</a:t>
-            </a:r>
-          </a:p>
-        </p:txBody>
-      </p:sp>
-      <p:sp>
-        <p:nvSpPr>
-          <p:cNvPr id="22" name="Oval 21"/>
-          <p:cNvSpPr/>
-          <p:nvPr/>
-        </p:nvSpPr>
-        <p:spPr>
-          <a:xfrm>
-            <a:off x="6720840" y="2980944"/>
-            <a:ext cx="164592" cy="164592"/>
-          </a:xfrm>
-          <a:prstGeom prst="ellipse">
-            <a:avLst/>
-          </a:prstGeom>
-          <a:solidFill>
-            <a:srgbClr val="1C8585"/>
-          </a:solidFill>
-          <a:ln>
-            <a:noFill/>
-          </a:ln>
-        </p:spPr>
-        <p:style>
-          <a:lnRef idx="1">
-            <a:schemeClr val="accent1"/>
-          </a:lnRef>
-          <a:fillRef idx="3">
-            <a:schemeClr val="accent1"/>
-          </a:fillRef>
-          <a:effectRef idx="2">
-            <a:schemeClr val="accent1"/>
-          </a:effectRef>
-          <a:fontRef idx="minor">
-            <a:schemeClr val="lt1"/>
-          </a:fontRef>
-        </p:style>
-        <p:txBody>
-          <a:bodyPr rtlCol="0" anchor="ctr"/>
-          <a:lstStyle/>
-          <a:p>
-            <a:pPr algn="ctr"/>
-          </a:p>
-        </p:txBody>
-      </p:sp>
-      <p:sp>
-        <p:nvSpPr>
-          <p:cNvPr id="23" name="TextBox 22"/>
-          <p:cNvSpPr txBox="1"/>
-          <p:nvPr/>
-        </p:nvSpPr>
-        <p:spPr>
-          <a:xfrm>
-            <a:off x="6720840" y="2985515"/>
-            <a:ext cx="164592" cy="155448"/>
-          </a:xfrm>
-          <a:prstGeom prst="rect">
-            <a:avLst/>
-          </a:prstGeom>
-          <a:noFill/>
-        </p:spPr>
-        <p:txBody>
-          <a:bodyPr wrap="square" lIns="0" rIns="0" tIns="0" bIns="0" anchor="ctr">
-            <a:spAutoFit/>
-          </a:bodyPr>
-          <a:lstStyle/>
-          <a:p>
-            <a:pPr algn="ctr">
-              <a:spcAft>
-                <a:spcPts val="500"/>
-              </a:spcAft>
-              <a:defRPr sz="600" b="1">
-                <a:solidFill>
-                  <a:srgbClr val="FFFFFF"/>
-                </a:solidFill>
-                <a:latin typeface="Aptos"/>
-              </a:defRPr>
-            </a:pPr>
-          </a:p>
-        </p:txBody>
-      </p:sp>
-      <p:sp>
-        <p:nvSpPr>
-          <p:cNvPr id="24" name="TextBox 23"/>
-          <p:cNvSpPr txBox="1"/>
-          <p:nvPr/>
-        </p:nvSpPr>
-        <p:spPr>
-          <a:xfrm>
-            <a:off x="7013448" y="2944368"/>
-            <a:ext cx="3867911" cy="603503"/>
-          </a:xfrm>
-          <a:prstGeom prst="rect">
-            <a:avLst/>
-          </a:prstGeom>
-          <a:noFill/>
-        </p:spPr>
-        <p:txBody>
-          <a:bodyPr wrap="square" lIns="36576" rIns="36576" tIns="36576" bIns="36576" anchor="t">
-            <a:spAutoFit/>
-          </a:bodyPr>
-          <a:lstStyle/>
-          <a:p>
-            <a:pPr algn="l">
-              <a:spcAft>
-                <a:spcPts val="500"/>
-              </a:spcAft>
-              <a:defRPr sz="1600" b="0">
-                <a:solidFill>
-                  <a:srgbClr val="26313B"/>
-                </a:solidFill>
-                <a:latin typeface="Aptos"/>
-              </a:defRPr>
-            </a:pPr>
-            <a:r>
-              <a:t>Adjudication against the full rubric</a:t>
-            </a:r>
-          </a:p>
-        </p:txBody>
-      </p:sp>
-      <p:sp>
-        <p:nvSpPr>
-          <p:cNvPr id="25" name="Oval 24"/>
-          <p:cNvSpPr/>
-          <p:nvPr/>
-        </p:nvSpPr>
-        <p:spPr>
-          <a:xfrm>
-            <a:off x="6720840" y="3639312"/>
-            <a:ext cx="164592" cy="164592"/>
-          </a:xfrm>
-          <a:prstGeom prst="ellipse">
-            <a:avLst/>
-          </a:prstGeom>
-          <a:solidFill>
-            <a:srgbClr val="1C8585"/>
-          </a:solidFill>
-          <a:ln>
-            <a:noFill/>
-          </a:ln>
-        </p:spPr>
-        <p:style>
-          <a:lnRef idx="1">
-            <a:schemeClr val="accent1"/>
-          </a:lnRef>
-          <a:fillRef idx="3">
-            <a:schemeClr val="accent1"/>
-          </a:fillRef>
-          <a:effectRef idx="2">
-            <a:schemeClr val="accent1"/>
-          </a:effectRef>
-          <a:fontRef idx="minor">
-            <a:schemeClr val="lt1"/>
-          </a:fontRef>
-        </p:style>
-        <p:txBody>
-          <a:bodyPr rtlCol="0" anchor="ctr"/>
-          <a:lstStyle/>
-          <a:p>
-            <a:pPr algn="ctr"/>
-          </a:p>
-        </p:txBody>
-      </p:sp>
-      <p:sp>
-        <p:nvSpPr>
-          <p:cNvPr id="26" name="TextBox 25"/>
-          <p:cNvSpPr txBox="1"/>
-          <p:nvPr/>
-        </p:nvSpPr>
-        <p:spPr>
-          <a:xfrm>
-            <a:off x="6720840" y="3643884"/>
-            <a:ext cx="164592" cy="155448"/>
-          </a:xfrm>
-          <a:prstGeom prst="rect">
-            <a:avLst/>
-          </a:prstGeom>
-          <a:noFill/>
-        </p:spPr>
-        <p:txBody>
-          <a:bodyPr wrap="square" lIns="0" rIns="0" tIns="0" bIns="0" anchor="ctr">
-            <a:spAutoFit/>
-          </a:bodyPr>
-          <a:lstStyle/>
-          <a:p>
-            <a:pPr algn="ctr">
-              <a:spcAft>
-                <a:spcPts val="500"/>
-              </a:spcAft>
-              <a:defRPr sz="600" b="1">
-                <a:solidFill>
-                  <a:srgbClr val="FFFFFF"/>
-                </a:solidFill>
-                <a:latin typeface="Aptos"/>
-              </a:defRPr>
-            </a:pPr>
-          </a:p>
-        </p:txBody>
-      </p:sp>
-      <p:sp>
-        <p:nvSpPr>
-          <p:cNvPr id="27" name="TextBox 26"/>
-          <p:cNvSpPr txBox="1"/>
-          <p:nvPr/>
-        </p:nvSpPr>
-        <p:spPr>
-          <a:xfrm>
-            <a:off x="7013448" y="3602736"/>
-            <a:ext cx="3867911" cy="603503"/>
-          </a:xfrm>
-          <a:prstGeom prst="rect">
-            <a:avLst/>
-          </a:prstGeom>
-          <a:noFill/>
-        </p:spPr>
-        <p:txBody>
-          <a:bodyPr wrap="square" lIns="36576" rIns="36576" tIns="36576" bIns="36576" anchor="t">
-            <a:spAutoFit/>
-          </a:bodyPr>
-          <a:lstStyle/>
-          <a:p>
-            <a:pPr algn="l">
-              <a:spcAft>
-                <a:spcPts val="500"/>
-              </a:spcAft>
-              <a:defRPr sz="1600" b="0">
-                <a:solidFill>
-                  <a:srgbClr val="26313B"/>
-                </a:solidFill>
-                <a:latin typeface="Aptos"/>
-              </a:defRPr>
-            </a:pPr>
-            <a:r>
-              <a:t>A public, sealed gold test set</a:t>
-            </a:r>
-          </a:p>
-        </p:txBody>
-      </p:sp>
-      <p:sp>
-        <p:nvSpPr>
-          <p:cNvPr id="28" name="TextBox 27"/>
-          <p:cNvSpPr txBox="1"/>
-          <p:nvPr/>
-        </p:nvSpPr>
-        <p:spPr>
-          <a:xfrm>
-            <a:off x="1143000" y="5230368"/>
-            <a:ext cx="9966960" cy="548640"/>
-          </a:xfrm>
-          <a:prstGeom prst="rect">
-            <a:avLst/>
-          </a:prstGeom>
-          <a:noFill/>
-        </p:spPr>
-        <p:txBody>
-          <a:bodyPr wrap="square" lIns="36576" rIns="36576" tIns="36576" bIns="36576" anchor="t">
-            <a:spAutoFit/>
-          </a:bodyPr>
-          <a:lstStyle/>
-          <a:p>
-            <a:pPr algn="ctr">
-              <a:spcAft>
-                <a:spcPts val="500"/>
-              </a:spcAft>
-              <a:defRPr sz="1900" b="1">
-                <a:solidFill>
-                  <a:srgbClr val="A6413E"/>
-                </a:solidFill>
-                <a:latin typeface="Aptos"/>
-              </a:defRPr>
-            </a:pPr>
-            <a:r>
-              <a:t>Therefore, model scores measure agreement with this operational reference—not ambiguity accuracy.</a:t>
-            </a:r>
-          </a:p>
-        </p:txBody>
-      </p:sp>
-      <p:sp>
-        <p:nvSpPr>
-          <p:cNvPr id="29" name="TextBox 28"/>
           <p:cNvSpPr txBox="1"/>
           <p:nvPr/>
         </p:nvSpPr>
@@ -20104,14 +19955,14 @@
               </a:defRPr>
             </a:pPr>
             <a:r>
-              <a:t>Source: paper/main.tex, Construct Validity and Annotation sections.</a:t>
-            </a:r>
-          </a:p>
-        </p:txBody>
-      </p:sp>
-      <p:sp>
-        <p:nvSpPr>
-          <p:cNvPr id="30" name="TextBox 29"/>
+              <a:t>Source: paper/main.tex, Annotation Disagreement Audit and Construct Validity.</a:t>
+            </a:r>
+          </a:p>
+        </p:txBody>
+      </p:sp>
+      <p:sp>
+        <p:nvSpPr>
+          <p:cNvPr id="22" name="TextBox 21"/>
           <p:cNvSpPr txBox="1"/>
           <p:nvPr/>
         </p:nvSpPr>
@@ -20289,46 +20140,7 @@
       </p:sp>
       <p:sp>
         <p:nvSpPr>
-          <p:cNvPr id="5" name="TextBox 4"/>
-          <p:cNvSpPr txBox="1"/>
-          <p:nvPr/>
-        </p:nvSpPr>
-        <p:spPr>
-          <a:xfrm>
-            <a:off x="10744200" y="6492240"/>
-            <a:ext cx="777240" cy="201168"/>
-          </a:xfrm>
-          <a:prstGeom prst="rect">
-            <a:avLst/>
-          </a:prstGeom>
-          <a:noFill/>
-        </p:spPr>
-        <p:txBody>
-          <a:bodyPr wrap="square" lIns="36576" rIns="36576" tIns="36576" bIns="36576" anchor="t">
-            <a:spAutoFit/>
-          </a:bodyPr>
-          <a:lstStyle/>
-          <a:p>
-            <a:pPr algn="r">
-              <a:spcAft>
-                <a:spcPts val="500"/>
-              </a:spcAft>
-              <a:defRPr sz="900" b="0">
-                <a:solidFill>
-                  <a:srgbClr val="5B6974"/>
-                </a:solidFill>
-                <a:latin typeface="Aptos"/>
-              </a:defRPr>
-            </a:pPr>
-            <a:r>
-              <a:t>08  |  18</a:t>
-            </a:r>
-          </a:p>
-        </p:txBody>
-      </p:sp>
-      <p:sp>
-        <p:nvSpPr>
-          <p:cNvPr id="6" name="Rounded Rectangle 5"/>
+          <p:cNvPr id="5" name="Rounded Rectangle 4"/>
           <p:cNvSpPr/>
           <p:nvPr/>
         </p:nvSpPr>
@@ -20373,7 +20185,7 @@
       </p:sp>
       <p:sp>
         <p:nvSpPr>
-          <p:cNvPr id="7" name="Rectangle 6"/>
+          <p:cNvPr id="6" name="Rectangle 5"/>
           <p:cNvSpPr/>
           <p:nvPr/>
         </p:nvSpPr>
@@ -20418,7 +20230,7 @@
       </p:sp>
       <p:sp>
         <p:nvSpPr>
-          <p:cNvPr id="8" name="TextBox 7"/>
+          <p:cNvPr id="7" name="TextBox 6"/>
           <p:cNvSpPr txBox="1"/>
           <p:nvPr/>
         </p:nvSpPr>
@@ -20457,7 +20269,7 @@
       </p:sp>
       <p:sp>
         <p:nvSpPr>
-          <p:cNvPr id="9" name="TextBox 8"/>
+          <p:cNvPr id="8" name="TextBox 7"/>
           <p:cNvSpPr txBox="1"/>
           <p:nvPr/>
         </p:nvSpPr>
@@ -20496,7 +20308,7 @@
       </p:sp>
       <p:sp>
         <p:nvSpPr>
-          <p:cNvPr id="10" name="Rounded Rectangle 9"/>
+          <p:cNvPr id="9" name="Rounded Rectangle 8"/>
           <p:cNvSpPr/>
           <p:nvPr/>
         </p:nvSpPr>
@@ -20541,7 +20353,7 @@
       </p:sp>
       <p:sp>
         <p:nvSpPr>
-          <p:cNvPr id="11" name="Rectangle 10"/>
+          <p:cNvPr id="10" name="Rectangle 9"/>
           <p:cNvSpPr/>
           <p:nvPr/>
         </p:nvSpPr>
@@ -20586,7 +20398,7 @@
       </p:sp>
       <p:sp>
         <p:nvSpPr>
-          <p:cNvPr id="12" name="TextBox 11"/>
+          <p:cNvPr id="11" name="TextBox 10"/>
           <p:cNvSpPr txBox="1"/>
           <p:nvPr/>
         </p:nvSpPr>
@@ -20625,7 +20437,7 @@
       </p:sp>
       <p:sp>
         <p:nvSpPr>
-          <p:cNvPr id="13" name="TextBox 12"/>
+          <p:cNvPr id="12" name="TextBox 11"/>
           <p:cNvSpPr txBox="1"/>
           <p:nvPr/>
         </p:nvSpPr>
@@ -20664,7 +20476,7 @@
       </p:sp>
       <p:sp>
         <p:nvSpPr>
-          <p:cNvPr id="14" name="Rounded Rectangle 13"/>
+          <p:cNvPr id="13" name="Rounded Rectangle 12"/>
           <p:cNvSpPr/>
           <p:nvPr/>
         </p:nvSpPr>
@@ -20709,7 +20521,7 @@
       </p:sp>
       <p:sp>
         <p:nvSpPr>
-          <p:cNvPr id="15" name="Rectangle 14"/>
+          <p:cNvPr id="14" name="Rectangle 13"/>
           <p:cNvSpPr/>
           <p:nvPr/>
         </p:nvSpPr>
@@ -20754,7 +20566,7 @@
       </p:sp>
       <p:sp>
         <p:nvSpPr>
-          <p:cNvPr id="16" name="TextBox 15"/>
+          <p:cNvPr id="15" name="TextBox 14"/>
           <p:cNvSpPr txBox="1"/>
           <p:nvPr/>
         </p:nvSpPr>
@@ -20793,7 +20605,7 @@
       </p:sp>
       <p:sp>
         <p:nvSpPr>
-          <p:cNvPr id="17" name="TextBox 16"/>
+          <p:cNvPr id="16" name="TextBox 15"/>
           <p:cNvSpPr txBox="1"/>
           <p:nvPr/>
         </p:nvSpPr>
@@ -20832,7 +20644,7 @@
       </p:sp>
       <p:sp>
         <p:nvSpPr>
-          <p:cNvPr id="18" name="Rounded Rectangle 17"/>
+          <p:cNvPr id="17" name="Rounded Rectangle 16"/>
           <p:cNvSpPr/>
           <p:nvPr/>
         </p:nvSpPr>
@@ -20877,7 +20689,7 @@
       </p:sp>
       <p:sp>
         <p:nvSpPr>
-          <p:cNvPr id="19" name="Rectangle 18"/>
+          <p:cNvPr id="18" name="Rectangle 17"/>
           <p:cNvSpPr/>
           <p:nvPr/>
         </p:nvSpPr>
@@ -20922,7 +20734,7 @@
       </p:sp>
       <p:sp>
         <p:nvSpPr>
-          <p:cNvPr id="20" name="TextBox 19"/>
+          <p:cNvPr id="19" name="TextBox 18"/>
           <p:cNvSpPr txBox="1"/>
           <p:nvPr/>
         </p:nvSpPr>
@@ -20961,7 +20773,7 @@
       </p:sp>
       <p:sp>
         <p:nvSpPr>
-          <p:cNvPr id="21" name="TextBox 20"/>
+          <p:cNvPr id="20" name="TextBox 19"/>
           <p:cNvSpPr txBox="1"/>
           <p:nvPr/>
         </p:nvSpPr>
@@ -21000,7 +20812,7 @@
       </p:sp>
       <p:sp>
         <p:nvSpPr>
-          <p:cNvPr id="22" name="TextBox 21"/>
+          <p:cNvPr id="21" name="TextBox 20"/>
           <p:cNvSpPr txBox="1"/>
           <p:nvPr/>
         </p:nvSpPr>
@@ -21039,7 +20851,7 @@
       </p:sp>
       <p:sp>
         <p:nvSpPr>
-          <p:cNvPr id="23" name="TextBox 22"/>
+          <p:cNvPr id="22" name="TextBox 21"/>
           <p:cNvSpPr txBox="1"/>
           <p:nvPr/>
         </p:nvSpPr>
@@ -21078,7 +20890,7 @@
       </p:sp>
       <p:sp>
         <p:nvSpPr>
-          <p:cNvPr id="24" name="TextBox 23"/>
+          <p:cNvPr id="23" name="TextBox 22"/>
           <p:cNvSpPr txBox="1"/>
           <p:nvPr/>
         </p:nvSpPr>
@@ -21262,45 +21074,6 @@
         </p:nvSpPr>
         <p:spPr>
           <a:xfrm>
-            <a:off x="10744200" y="6492240"/>
-            <a:ext cx="777240" cy="201168"/>
-          </a:xfrm>
-          <a:prstGeom prst="rect">
-            <a:avLst/>
-          </a:prstGeom>
-          <a:noFill/>
-        </p:spPr>
-        <p:txBody>
-          <a:bodyPr wrap="square" lIns="36576" rIns="36576" tIns="36576" bIns="36576" anchor="t">
-            <a:spAutoFit/>
-          </a:bodyPr>
-          <a:lstStyle/>
-          <a:p>
-            <a:pPr algn="r">
-              <a:spcAft>
-                <a:spcPts val="500"/>
-              </a:spcAft>
-              <a:defRPr sz="900" b="0">
-                <a:solidFill>
-                  <a:srgbClr val="5B6974"/>
-                </a:solidFill>
-                <a:latin typeface="Aptos"/>
-              </a:defRPr>
-            </a:pPr>
-            <a:r>
-              <a:t>09  |  18</a:t>
-            </a:r>
-          </a:p>
-        </p:txBody>
-      </p:sp>
-      <p:sp>
-        <p:nvSpPr>
-          <p:cNvPr id="6" name="TextBox 5"/>
-          <p:cNvSpPr txBox="1"/>
-          <p:nvPr/>
-        </p:nvSpPr>
-        <p:spPr>
-          <a:xfrm>
             <a:off x="868680" y="1261872"/>
             <a:ext cx="4754880" cy="384048"/>
           </a:xfrm>
@@ -21334,7 +21107,7 @@
       </p:sp>
       <p:sp>
         <p:nvSpPr>
-          <p:cNvPr id="7" name="Oval 6"/>
+          <p:cNvPr id="6" name="Oval 5"/>
           <p:cNvSpPr/>
           <p:nvPr/>
         </p:nvSpPr>
@@ -21377,7 +21150,7 @@
       </p:sp>
       <p:sp>
         <p:nvSpPr>
-          <p:cNvPr id="8" name="TextBox 7"/>
+          <p:cNvPr id="7" name="TextBox 6"/>
           <p:cNvSpPr txBox="1"/>
           <p:nvPr/>
         </p:nvSpPr>
@@ -21413,7 +21186,7 @@
       </p:sp>
       <p:sp>
         <p:nvSpPr>
-          <p:cNvPr id="9" name="TextBox 8"/>
+          <p:cNvPr id="8" name="TextBox 7"/>
           <p:cNvSpPr txBox="1"/>
           <p:nvPr/>
         </p:nvSpPr>
@@ -21452,7 +21225,7 @@
       </p:sp>
       <p:sp>
         <p:nvSpPr>
-          <p:cNvPr id="10" name="Oval 9"/>
+          <p:cNvPr id="9" name="Oval 8"/>
           <p:cNvSpPr/>
           <p:nvPr/>
         </p:nvSpPr>
@@ -21495,7 +21268,7 @@
       </p:sp>
       <p:sp>
         <p:nvSpPr>
-          <p:cNvPr id="11" name="TextBox 10"/>
+          <p:cNvPr id="10" name="TextBox 9"/>
           <p:cNvSpPr txBox="1"/>
           <p:nvPr/>
         </p:nvSpPr>
@@ -21531,7 +21304,7 @@
       </p:sp>
       <p:sp>
         <p:nvSpPr>
-          <p:cNvPr id="12" name="TextBox 11"/>
+          <p:cNvPr id="11" name="TextBox 10"/>
           <p:cNvSpPr txBox="1"/>
           <p:nvPr/>
         </p:nvSpPr>
@@ -21570,7 +21343,7 @@
       </p:sp>
       <p:sp>
         <p:nvSpPr>
-          <p:cNvPr id="13" name="Oval 12"/>
+          <p:cNvPr id="12" name="Oval 11"/>
           <p:cNvSpPr/>
           <p:nvPr/>
         </p:nvSpPr>
@@ -21613,7 +21386,7 @@
       </p:sp>
       <p:sp>
         <p:nvSpPr>
-          <p:cNvPr id="14" name="TextBox 13"/>
+          <p:cNvPr id="13" name="TextBox 12"/>
           <p:cNvSpPr txBox="1"/>
           <p:nvPr/>
         </p:nvSpPr>
@@ -21649,7 +21422,7 @@
       </p:sp>
       <p:sp>
         <p:nvSpPr>
-          <p:cNvPr id="15" name="TextBox 14"/>
+          <p:cNvPr id="14" name="TextBox 13"/>
           <p:cNvSpPr txBox="1"/>
           <p:nvPr/>
         </p:nvSpPr>
@@ -21688,7 +21461,7 @@
       </p:sp>
       <p:sp>
         <p:nvSpPr>
-          <p:cNvPr id="16" name="Oval 15"/>
+          <p:cNvPr id="15" name="Oval 14"/>
           <p:cNvSpPr/>
           <p:nvPr/>
         </p:nvSpPr>
@@ -21731,7 +21504,7 @@
       </p:sp>
       <p:sp>
         <p:nvSpPr>
-          <p:cNvPr id="17" name="TextBox 16"/>
+          <p:cNvPr id="16" name="TextBox 15"/>
           <p:cNvSpPr txBox="1"/>
           <p:nvPr/>
         </p:nvSpPr>
@@ -21767,7 +21540,7 @@
       </p:sp>
       <p:sp>
         <p:nvSpPr>
-          <p:cNvPr id="18" name="TextBox 17"/>
+          <p:cNvPr id="17" name="TextBox 16"/>
           <p:cNvSpPr txBox="1"/>
           <p:nvPr/>
         </p:nvSpPr>
@@ -21806,7 +21579,7 @@
       </p:sp>
       <p:sp>
         <p:nvSpPr>
-          <p:cNvPr id="19" name="Rounded Rectangle 18"/>
+          <p:cNvPr id="18" name="Rounded Rectangle 17"/>
           <p:cNvSpPr/>
           <p:nvPr/>
         </p:nvSpPr>
@@ -21851,7 +21624,7 @@
       </p:sp>
       <p:sp>
         <p:nvSpPr>
-          <p:cNvPr id="20" name="TextBox 19"/>
+          <p:cNvPr id="19" name="TextBox 18"/>
           <p:cNvSpPr txBox="1"/>
           <p:nvPr/>
         </p:nvSpPr>
@@ -21890,7 +21663,7 @@
       </p:sp>
       <p:sp>
         <p:nvSpPr>
-          <p:cNvPr id="21" name="Rounded Rectangle 20"/>
+          <p:cNvPr id="20" name="Rounded Rectangle 19"/>
           <p:cNvSpPr/>
           <p:nvPr/>
         </p:nvSpPr>
@@ -21935,7 +21708,7 @@
       </p:sp>
       <p:sp>
         <p:nvSpPr>
-          <p:cNvPr id="22" name="TextBox 21"/>
+          <p:cNvPr id="21" name="TextBox 20"/>
           <p:cNvSpPr txBox="1"/>
           <p:nvPr/>
         </p:nvSpPr>
@@ -21974,7 +21747,7 @@
       </p:sp>
       <p:sp>
         <p:nvSpPr>
-          <p:cNvPr id="23" name="TextBox 22"/>
+          <p:cNvPr id="22" name="TextBox 21"/>
           <p:cNvSpPr txBox="1"/>
           <p:nvPr/>
         </p:nvSpPr>
@@ -22006,14 +21779,14 @@
               </a:defRPr>
             </a:pPr>
             <a:r>
-              <a:t>family-isolated OOF</a:t>
-            </a:r>
-          </a:p>
-        </p:txBody>
-      </p:sp>
-      <p:sp>
-        <p:nvSpPr>
-          <p:cNvPr id="24" name="Rounded Rectangle 23"/>
+              <a:t>transformer family OOF</a:t>
+            </a:r>
+          </a:p>
+        </p:txBody>
+      </p:sp>
+      <p:sp>
+        <p:nvSpPr>
+          <p:cNvPr id="23" name="Rounded Rectangle 22"/>
           <p:cNvSpPr/>
           <p:nvPr/>
         </p:nvSpPr>
@@ -22058,7 +21831,7 @@
       </p:sp>
       <p:sp>
         <p:nvSpPr>
-          <p:cNvPr id="25" name="TextBox 24"/>
+          <p:cNvPr id="24" name="TextBox 23"/>
           <p:cNvSpPr txBox="1"/>
           <p:nvPr/>
         </p:nvSpPr>
@@ -22090,14 +21863,14 @@
               </a:defRPr>
             </a:pPr>
             <a:r>
-              <a:t>1 seed</a:t>
-            </a:r>
-          </a:p>
-        </p:txBody>
-      </p:sp>
-      <p:sp>
-        <p:nvSpPr>
-          <p:cNvPr id="26" name="TextBox 25"/>
+              <a:t>3-fold</a:t>
+            </a:r>
+          </a:p>
+        </p:txBody>
+      </p:sp>
+      <p:sp>
+        <p:nvSpPr>
+          <p:cNvPr id="25" name="TextBox 24"/>
           <p:cNvSpPr txBox="1"/>
           <p:nvPr/>
         </p:nvSpPr>
@@ -22129,14 +21902,14 @@
               </a:defRPr>
             </a:pPr>
             <a:r>
-              <a:t>run-to-run uncertainty remains</a:t>
-            </a:r>
-          </a:p>
-        </p:txBody>
-      </p:sp>
-      <p:sp>
-        <p:nvSpPr>
-          <p:cNvPr id="27" name="TextBox 26"/>
+              <a:t>classical family OOF</a:t>
+            </a:r>
+          </a:p>
+        </p:txBody>
+      </p:sp>
+      <p:sp>
+        <p:nvSpPr>
+          <p:cNvPr id="26" name="TextBox 25"/>
           <p:cNvSpPr txBox="1"/>
           <p:nvPr/>
         </p:nvSpPr>
@@ -22160,7 +21933,7 @@
               <a:spcAft>
                 <a:spcPts val="500"/>
               </a:spcAft>
-              <a:defRPr sz="1600" b="1">
+              <a:defRPr sz="1500" b="1">
                 <a:solidFill>
                   <a:srgbClr val="A6413E"/>
                 </a:solidFill>
@@ -22168,14 +21941,14 @@
               </a:defRPr>
             </a:pPr>
             <a:r>
-              <a:t>Development evaluation—not a sealed test.</a:t>
-            </a:r>
-          </a:p>
-        </p:txBody>
-      </p:sp>
-      <p:sp>
-        <p:nvSpPr>
-          <p:cNvPr id="28" name="TextBox 27"/>
+              <a:t>Protocols differ; the newest transformer also uses one seed.</a:t>
+            </a:r>
+          </a:p>
+        </p:txBody>
+      </p:sp>
+      <p:sp>
+        <p:nvSpPr>
+          <p:cNvPr id="27" name="TextBox 26"/>
           <p:cNvSpPr txBox="1"/>
           <p:nvPr/>
         </p:nvSpPr>
@@ -22214,7 +21987,7 @@
       </p:sp>
       <p:sp>
         <p:nvSpPr>
-          <p:cNvPr id="29" name="TextBox 28"/>
+          <p:cNvPr id="28" name="TextBox 27"/>
           <p:cNvSpPr txBox="1"/>
           <p:nvPr/>
         </p:nvSpPr>
@@ -22253,7 +22026,7 @@
       </p:sp>
       <p:sp>
         <p:nvSpPr>
-          <p:cNvPr id="30" name="TextBox 29"/>
+          <p:cNvPr id="29" name="TextBox 28"/>
           <p:cNvSpPr txBox="1"/>
           <p:nvPr/>
         </p:nvSpPr>
